--- a/slides/06-superset.pptx
+++ b/slides/06-superset.pptx
@@ -8977,12 +8977,12 @@
         </p:nvSpPr>
         <p:spPr>
           <a:xfrm>
-            <a:off x="1015901" y="1985516"/>
-            <a:ext cx="7111901" cy="1603772"/>
+            <a:off x="888802" y="1702594"/>
+            <a:ext cx="7365950" cy="2169765"/>
           </a:xfrm>
           <a:prstGeom prst="roundRect">
             <a:avLst>
-              <a:gd name="adj" fmla="val 6335"/>
+              <a:gd name="adj" fmla="val 4683"/>
             </a:avLst>
           </a:prstGeom>
           <a:solidFill>
@@ -9016,8 +9016,8 @@
         </p:nvSpPr>
         <p:spPr>
           <a:xfrm>
-            <a:off x="1015901" y="1985516"/>
-            <a:ext cx="7111901" cy="253901"/>
+            <a:off x="888802" y="1702594"/>
+            <a:ext cx="7365950" cy="253901"/>
           </a:xfrm>
           <a:prstGeom prst="roundRect">
             <a:avLst>
@@ -9048,7 +9048,7 @@
         </p:nvSpPr>
         <p:spPr>
           <a:xfrm>
-            <a:off x="1142851" y="2067967"/>
+            <a:off x="1015752" y="1785045"/>
             <a:ext cx="88850" cy="88850"/>
           </a:xfrm>
           <a:prstGeom prst="roundRect">
@@ -9080,7 +9080,7 @@
         </p:nvSpPr>
         <p:spPr>
           <a:xfrm>
-            <a:off x="1295102" y="2067967"/>
+            <a:off x="1168003" y="1785045"/>
             <a:ext cx="88850" cy="88850"/>
           </a:xfrm>
           <a:prstGeom prst="roundRect">
@@ -9112,7 +9112,7 @@
         </p:nvSpPr>
         <p:spPr>
           <a:xfrm>
-            <a:off x="1447354" y="2067967"/>
+            <a:off x="1320254" y="1785045"/>
             <a:ext cx="88850" cy="88850"/>
           </a:xfrm>
           <a:prstGeom prst="roundRect">
@@ -9144,7 +9144,7 @@
         </p:nvSpPr>
         <p:spPr>
           <a:xfrm>
-            <a:off x="1701105" y="2055316"/>
+            <a:off x="1574006" y="1772394"/>
             <a:ext cx="528584" cy="114300"/>
           </a:xfrm>
           <a:prstGeom prst="rect">
@@ -9183,8 +9183,8 @@
         </p:nvSpPr>
         <p:spPr>
           <a:xfrm>
-            <a:off x="1244501" y="2417118"/>
-            <a:ext cx="6787795" cy="275630"/>
+            <a:off x="1117402" y="2134195"/>
+            <a:ext cx="7046925" cy="255836"/>
           </a:xfrm>
           <a:prstGeom prst="rect">
             <a:avLst/>
@@ -9198,12 +9198,12 @@
           <a:p>
             <a:pPr algn="l" indent="0" marL="0">
               <a:lnSpc>
-                <a:spcPts val="2170"/>
+                <a:spcPts val="2015"/>
               </a:lnSpc>
               <a:buNone/>
             </a:pPr>
             <a:r>
-              <a:rPr lang="en-US" sz="1400" b="1" dirty="0">
+              <a:rPr lang="en-US" sz="1300" b="1" dirty="0">
                 <a:solidFill>
                   <a:srgbClr val="3FB950"/>
                 </a:solidFill>
@@ -9215,12 +9215,12 @@
             </a:r>
             <a:pPr algn="l" indent="0" marL="0">
               <a:lnSpc>
-                <a:spcPts val="2170"/>
+                <a:spcPts val="2015"/>
               </a:lnSpc>
               <a:buNone/>
             </a:pPr>
             <a:r>
-              <a:rPr lang="en-US" sz="1400" dirty="0">
+              <a:rPr lang="en-US" sz="1300" dirty="0">
                 <a:solidFill>
                   <a:srgbClr val="E6EDF3"/>
                 </a:solidFill>
@@ -9228,9 +9228,9 @@
                 <a:ea typeface="Courier New" pitchFamily="34" charset="-122"/>
                 <a:cs typeface="Courier New" pitchFamily="34" charset="-120"/>
               </a:rPr>
-              <a:t> azd up</a:t>
-            </a:r>
-            <a:endParaRPr lang="en-US" sz="1400" dirty="0"/>
+              <a:t> node ../../.github/scripts/verify-superset.mjs</a:t>
+            </a:r>
+            <a:endParaRPr lang="en-US" sz="1300" dirty="0"/>
           </a:p>
         </p:txBody>
       </p:sp>
@@ -9242,8 +9242,8 @@
         </p:nvSpPr>
         <p:spPr>
           <a:xfrm>
-            <a:off x="1244501" y="2834878"/>
-            <a:ext cx="6787795" cy="275630"/>
+            <a:off x="1117402" y="2390031"/>
+            <a:ext cx="7046925" cy="255836"/>
           </a:xfrm>
           <a:prstGeom prst="rect">
             <a:avLst/>
@@ -9257,12 +9257,12 @@
           <a:p>
             <a:pPr algn="l" indent="0" marL="0">
               <a:lnSpc>
-                <a:spcPts val="2170"/>
+                <a:spcPts val="2015"/>
               </a:lnSpc>
               <a:buNone/>
             </a:pPr>
             <a:r>
-              <a:rPr lang="en-US" sz="1400" b="1" dirty="0">
+              <a:rPr lang="en-US" sz="1300" b="1" dirty="0">
                 <a:solidFill>
                   <a:srgbClr val="3FB950"/>
                 </a:solidFill>
@@ -9270,39 +9270,64 @@
                 <a:ea typeface="Courier New" pitchFamily="34" charset="-122"/>
                 <a:cs typeface="Courier New" pitchFamily="34" charset="-120"/>
               </a:rPr>
-              <a:t>$</a:t>
-            </a:r>
+              <a:t>PASS Init logs contain PostgresqlImpl</a:t>
+            </a:r>
+            <a:endParaRPr lang="en-US" sz="1300" dirty="0"/>
+          </a:p>
+        </p:txBody>
+      </p:sp>
+      <p:sp>
+        <p:nvSpPr>
+          <p:cNvPr id="15" name="Text 12"/>
+          <p:cNvSpPr/>
+          <p:nvPr/>
+        </p:nvSpPr>
+        <p:spPr>
+          <a:xfrm>
+            <a:off x="1117402" y="2645866"/>
+            <a:ext cx="7046925" cy="255836"/>
+          </a:xfrm>
+          <a:prstGeom prst="rect">
+            <a:avLst/>
+          </a:prstGeom>
+          <a:noFill/>
+          <a:ln/>
+        </p:spPr>
+        <p:txBody>
+          <a:bodyPr wrap="square" lIns="0" tIns="0" rIns="0" bIns="0" rtlCol="0" anchor="t"/>
+          <a:lstStyle/>
+          <a:p>
             <a:pPr algn="l" indent="0" marL="0">
               <a:lnSpc>
-                <a:spcPts val="2170"/>
+                <a:spcPts val="2015"/>
               </a:lnSpc>
               <a:buNone/>
             </a:pPr>
             <a:r>
-              <a:rPr lang="en-US" sz="1400" dirty="0">
-                <a:solidFill>
-                  <a:srgbClr val="E6EDF3"/>
+              <a:rPr lang="en-US" sz="1300" b="1" dirty="0">
+                <a:solidFill>
+                  <a:srgbClr val="3FB950"/>
                 </a:solidFill>
                 <a:latin typeface="Courier New" pitchFamily="34" charset="0"/>
                 <a:ea typeface="Courier New" pitchFamily="34" charset="-122"/>
                 <a:cs typeface="Courier New" pitchFamily="34" charset="-120"/>
               </a:rPr>
-              <a:t> node ../../.github/scripts/verify-superset.mjs</a:t>
-            </a:r>
-            <a:endParaRPr lang="en-US" sz="1400" dirty="0"/>
-          </a:p>
-        </p:txBody>
-      </p:sp>
-      <p:sp>
-        <p:nvSpPr>
-          <p:cNvPr id="15" name="Text 12"/>
-          <p:cNvSpPr/>
-          <p:nvPr/>
-        </p:nvSpPr>
-        <p:spPr>
-          <a:xfrm>
-            <a:off x="1244501" y="3110508"/>
-            <a:ext cx="6787795" cy="275630"/>
+              <a:t>PASS psycopg2 importable in main container</a:t>
+            </a:r>
+            <a:endParaRPr lang="en-US" sz="1300" dirty="0"/>
+          </a:p>
+        </p:txBody>
+      </p:sp>
+      <p:sp>
+        <p:nvSpPr>
+          <p:cNvPr id="16" name="Text 13"/>
+          <p:cNvSpPr/>
+          <p:nvPr/>
+        </p:nvSpPr>
+        <p:spPr>
+          <a:xfrm>
+            <a:off x="1117402" y="2901702"/>
+            <a:ext cx="7046925" cy="255836"/>
           </a:xfrm>
           <a:prstGeom prst="rect">
             <a:avLst/>
@@ -9316,12 +9341,12 @@
           <a:p>
             <a:pPr algn="l" indent="0" marL="0">
               <a:lnSpc>
-                <a:spcPts val="2170"/>
+                <a:spcPts val="2015"/>
               </a:lnSpc>
               <a:buNone/>
             </a:pPr>
             <a:r>
-              <a:rPr lang="en-US" sz="1400" b="1" dirty="0">
+              <a:rPr lang="en-US" sz="1300" b="1" dirty="0">
                 <a:solidFill>
                   <a:srgbClr val="3FB950"/>
                 </a:solidFill>
@@ -9329,15 +9354,99 @@
                 <a:ea typeface="Courier New" pitchFamily="34" charset="-122"/>
                 <a:cs typeface="Courier New" pitchFamily="34" charset="-120"/>
               </a:rPr>
-              <a:t>PASS: 6/6 checks passed</a:t>
-            </a:r>
-            <a:endParaRPr lang="en-US" sz="1400" dirty="0"/>
+              <a:t>PASS GET /health returns HTTP 200</a:t>
+            </a:r>
+            <a:endParaRPr lang="en-US" sz="1300" dirty="0"/>
+          </a:p>
+        </p:txBody>
+      </p:sp>
+      <p:sp>
+        <p:nvSpPr>
+          <p:cNvPr id="17" name="Text 14"/>
+          <p:cNvSpPr/>
+          <p:nvPr/>
+        </p:nvSpPr>
+        <p:spPr>
+          <a:xfrm>
+            <a:off x="1117402" y="3157538"/>
+            <a:ext cx="7046925" cy="255836"/>
+          </a:xfrm>
+          <a:prstGeom prst="rect">
+            <a:avLst/>
+          </a:prstGeom>
+          <a:noFill/>
+          <a:ln/>
+        </p:spPr>
+        <p:txBody>
+          <a:bodyPr wrap="square" lIns="0" tIns="0" rIns="0" bIns="0" rtlCol="0" anchor="t"/>
+          <a:lstStyle/>
+          <a:p>
+            <a:pPr algn="l" indent="0" marL="0">
+              <a:lnSpc>
+                <a:spcPts val="2015"/>
+              </a:lnSpc>
+              <a:buNone/>
+            </a:pPr>
+            <a:r>
+              <a:rPr lang="en-US" sz="1300" dirty="0">
+                <a:solidFill>
+                  <a:srgbClr val="8B949E"/>
+                </a:solidFill>
+                <a:latin typeface="Courier New" pitchFamily="34" charset="0"/>
+                <a:ea typeface="Courier New" pitchFamily="34" charset="-122"/>
+                <a:cs typeface="Courier New" pitchFamily="34" charset="-120"/>
+              </a:rPr>
+              <a:t># ...</a:t>
+            </a:r>
+            <a:endParaRPr lang="en-US" sz="1300" dirty="0"/>
+          </a:p>
+        </p:txBody>
+      </p:sp>
+      <p:sp>
+        <p:nvSpPr>
+          <p:cNvPr id="18" name="Text 15"/>
+          <p:cNvSpPr/>
+          <p:nvPr/>
+        </p:nvSpPr>
+        <p:spPr>
+          <a:xfrm>
+            <a:off x="1117402" y="3413373"/>
+            <a:ext cx="7046925" cy="255836"/>
+          </a:xfrm>
+          <a:prstGeom prst="rect">
+            <a:avLst/>
+          </a:prstGeom>
+          <a:noFill/>
+          <a:ln/>
+        </p:spPr>
+        <p:txBody>
+          <a:bodyPr wrap="square" lIns="0" tIns="0" rIns="0" bIns="0" rtlCol="0" anchor="t"/>
+          <a:lstStyle/>
+          <a:p>
+            <a:pPr algn="l" indent="0" marL="0">
+              <a:lnSpc>
+                <a:spcPts val="2015"/>
+              </a:lnSpc>
+              <a:buNone/>
+            </a:pPr>
+            <a:r>
+              <a:rPr lang="en-US" sz="1300" b="1" dirty="0">
+                <a:solidFill>
+                  <a:srgbClr val="3FB950"/>
+                </a:solidFill>
+                <a:latin typeface="Courier New" pitchFamily="34" charset="0"/>
+                <a:ea typeface="Courier New" pitchFamily="34" charset="-122"/>
+                <a:cs typeface="Courier New" pitchFamily="34" charset="-120"/>
+              </a:rPr>
+              <a:t>6/6 checks passed</a:t>
+            </a:r>
+            <a:endParaRPr lang="en-US" sz="1300" dirty="0"/>
           </a:p>
         </p:txBody>
       </p:sp>
       <p:pic>
         <p:nvPicPr>
-          <p:cNvPr id="16" name="Image 1" descr="/Users/danwahlin/.copilot/session-state/a2da67da-2d7a-45f2-aa6a-2a42a7b82a72/files/build/icons/GoGraph-0969DA.png">    </p:cNvPr>
+          <p:cNvPr id="19" name="Image 1" descr="/Users/danwahlin/.copilot/session-state/a2da67da-2d7a-45f2-aa6a-2a42a7b82a72/files/build/icons/GoGraph-0969DA.png">    </p:cNvPr>
           <p:cNvPicPr>
             <a:picLocks noChangeAspect="1"/>
           </p:cNvPicPr>
@@ -9351,7 +9460,7 @@
         </p:blipFill>
         <p:spPr>
           <a:xfrm>
-            <a:off x="1015901" y="3830538"/>
+            <a:off x="888802" y="4113609"/>
             <a:ext cx="190500" cy="190500"/>
           </a:xfrm>
           <a:prstGeom prst="rect">
@@ -9361,13 +9470,13 @@
       </p:pic>
       <p:sp>
         <p:nvSpPr>
-          <p:cNvPr id="17" name="Text 13"/>
-          <p:cNvSpPr/>
-          <p:nvPr/>
-        </p:nvSpPr>
-        <p:spPr>
-          <a:xfrm>
-            <a:off x="1307902" y="3817888"/>
+          <p:cNvPr id="20" name="Text 16"/>
+          <p:cNvSpPr/>
+          <p:nvPr/>
+        </p:nvSpPr>
+        <p:spPr>
+          <a:xfrm>
+            <a:off x="1180802" y="4100959"/>
             <a:ext cx="3544639" cy="215950"/>
           </a:xfrm>
           <a:prstGeom prst="rect">

--- a/slides/06-superset.pptx
+++ b/slides/06-superset.pptx
@@ -2017,7 +2017,9 @@
           <a:p>
             <a:r>
               <a:rPr lang="en-US" dirty="0"/>
-              <a:t>Ask for cost and for the reasoning. The explanation should mention init containers, the shared volume, and ConfigMaps. Look at the monthly cost carefully before continuing.</a:t>
+              <a:t>Ask for cost and for the reasoning. The explanation should mention init containers, the shared volume, and ConfigMaps. Look at the monthly cost carefully before continuing.
+Full prompt:
+Plan an Apache Superset deployment to Azure with Bicep and azd, using AKS with two Standard_D2s_v3 nodes (not Container Apps), Azure Database for PostgreSQL Flexible Server, and the westus region. List each Azure resource, its SKU, and the estimated monthly cost if left running, and explain why this workload uses AKS. Don't create files or Azure resources yet.</a:t>
             </a:r>
             <a:endParaRPr lang="en-US" dirty="0"/>
           </a:p>
@@ -2486,12 +2488,12 @@
         </p:nvSpPr>
         <p:spPr>
           <a:xfrm>
-            <a:off x="7689800" y="152400"/>
-            <a:ext cx="870049" cy="266700"/>
+            <a:off x="7596187" y="152400"/>
+            <a:ext cx="963662" cy="279350"/>
           </a:xfrm>
           <a:prstGeom prst="roundRect">
             <a:avLst>
-              <a:gd name="adj" fmla="val 23810"/>
+              <a:gd name="adj" fmla="val 22731"/>
             </a:avLst>
           </a:prstGeom>
           <a:solidFill>
@@ -2518,8 +2520,8 @@
         </p:nvSpPr>
         <p:spPr>
           <a:xfrm>
-            <a:off x="7810589" y="219075"/>
-            <a:ext cx="628471" cy="133350"/>
+            <a:off x="7728944" y="220563"/>
+            <a:ext cx="698150" cy="142875"/>
           </a:xfrm>
           <a:prstGeom prst="rect">
             <a:avLst/>
@@ -2535,7 +2537,7 @@
               <a:buNone/>
             </a:pPr>
             <a:r>
-              <a:rPr lang="en-US" sz="900" b="1" dirty="0">
+              <a:rPr lang="en-US" sz="1000" b="1" dirty="0">
                 <a:solidFill>
                   <a:srgbClr val="FFFFFF"/>
                 </a:solidFill>
@@ -2545,7 +2547,7 @@
               </a:rPr>
               <a:t>SUPERSET</a:t>
             </a:r>
-            <a:endParaRPr lang="en-US" sz="900" dirty="0"/>
+            <a:endParaRPr lang="en-US" sz="1000" dirty="0"/>
           </a:p>
         </p:txBody>
       </p:sp>
@@ -2614,7 +2616,7 @@
         <p:spPr>
           <a:xfrm>
             <a:off x="482501" y="1053852"/>
-            <a:ext cx="7772400" cy="152400"/>
+            <a:ext cx="7772400" cy="171450"/>
           </a:xfrm>
           <a:prstGeom prst="rect">
             <a:avLst/>
@@ -2633,7 +2635,7 @@
               <a:buNone/>
             </a:pPr>
             <a:r>
-              <a:rPr lang="en-US" sz="1100" b="1" dirty="0">
+              <a:rPr lang="en-US" sz="1200" b="1" dirty="0">
                 <a:solidFill>
                   <a:srgbClr val="1A7F37"/>
                 </a:solidFill>
@@ -2643,7 +2645,7 @@
               </a:rPr>
               <a:t>AGENTIC JOURNEY · GITHUB AND AZURE</a:t>
             </a:r>
-            <a:endParaRPr lang="en-US" sz="1100" dirty="0"/>
+            <a:endParaRPr lang="en-US" sz="1200" dirty="0"/>
           </a:p>
         </p:txBody>
       </p:sp>
@@ -2655,7 +2657,7 @@
         </p:nvSpPr>
         <p:spPr>
           <a:xfrm>
-            <a:off x="482501" y="1282452"/>
+            <a:off x="482501" y="1301502"/>
             <a:ext cx="7772400" cy="584150"/>
           </a:xfrm>
           <a:prstGeom prst="rect">
@@ -2697,8 +2699,8 @@
         </p:nvSpPr>
         <p:spPr>
           <a:xfrm>
-            <a:off x="482501" y="2019002"/>
-            <a:ext cx="7772400" cy="558701"/>
+            <a:off x="482501" y="2038052"/>
+            <a:ext cx="7772400" cy="584299"/>
           </a:xfrm>
           <a:prstGeom prst="rect">
             <a:avLst/>
@@ -2712,7 +2714,7 @@
           <a:p>
             <a:pPr algn="l" indent="0" marL="0">
               <a:lnSpc>
-                <a:spcPts val="2200"/>
+                <a:spcPts val="2300"/>
               </a:lnSpc>
               <a:spcBef>
                 <a:spcPts val="1200"/>
@@ -2720,7 +2722,7 @@
               <a:buNone/>
             </a:pPr>
             <a:r>
-              <a:rPr lang="en-US" sz="1600" dirty="0">
+              <a:rPr lang="en-US" sz="1700" dirty="0">
                 <a:solidFill>
                   <a:srgbClr val="59636E"/>
                 </a:solidFill>
@@ -2730,7 +2732,7 @@
               </a:rPr>
               <a:t>What if an app needed Kubernetes? Let an agent deploy a BI platform to AKS, and make every expensive mistake before you pay for it.</a:t>
             </a:r>
-            <a:endParaRPr lang="en-US" sz="1600" dirty="0"/>
+            <a:endParaRPr lang="en-US" sz="1700" dirty="0"/>
           </a:p>
         </p:txBody>
       </p:sp>
@@ -2742,12 +2744,12 @@
         </p:nvSpPr>
         <p:spPr>
           <a:xfrm>
-            <a:off x="482501" y="3022550"/>
-            <a:ext cx="355550" cy="355550"/>
+            <a:off x="482501" y="2946350"/>
+            <a:ext cx="431750" cy="431750"/>
           </a:xfrm>
           <a:prstGeom prst="roundRect">
             <a:avLst>
-              <a:gd name="adj" fmla="val 21432"/>
+              <a:gd name="adj" fmla="val 17649"/>
             </a:avLst>
           </a:prstGeom>
           <a:solidFill>
@@ -2782,8 +2784,8 @@
         </p:blipFill>
         <p:spPr>
           <a:xfrm>
-            <a:off x="558701" y="3098750"/>
-            <a:ext cx="203150" cy="203150"/>
+            <a:off x="577751" y="3041600"/>
+            <a:ext cx="241250" cy="241250"/>
           </a:xfrm>
           <a:prstGeom prst="rect">
             <a:avLst/>
@@ -2798,8 +2800,8 @@
         </p:nvSpPr>
         <p:spPr>
           <a:xfrm>
-            <a:off x="952351" y="3051125"/>
-            <a:ext cx="812155" cy="114300"/>
+            <a:off x="1028551" y="2973288"/>
+            <a:ext cx="947109" cy="142875"/>
           </a:xfrm>
           <a:prstGeom prst="rect">
             <a:avLst/>
@@ -2815,7 +2817,7 @@
               <a:buNone/>
             </a:pPr>
             <a:r>
-              <a:rPr lang="en-US" sz="850" b="1" dirty="0">
+              <a:rPr lang="en-US" sz="1000" b="1" dirty="0">
                 <a:solidFill>
                   <a:srgbClr val="59636E"/>
                 </a:solidFill>
@@ -2825,7 +2827,7 @@
               </a:rPr>
               <a:t>SESSION</a:t>
             </a:r>
-            <a:endParaRPr lang="en-US" sz="850" dirty="0"/>
+            <a:endParaRPr lang="en-US" sz="1000" dirty="0"/>
           </a:p>
         </p:txBody>
       </p:sp>
@@ -2837,8 +2839,8 @@
         </p:nvSpPr>
         <p:spPr>
           <a:xfrm>
-            <a:off x="952351" y="3178076"/>
-            <a:ext cx="812155" cy="171450"/>
+            <a:off x="1028551" y="3141464"/>
+            <a:ext cx="947109" cy="209550"/>
           </a:xfrm>
           <a:prstGeom prst="rect">
             <a:avLst/>
@@ -2854,7 +2856,7 @@
               <a:buNone/>
             </a:pPr>
             <a:r>
-              <a:rPr lang="en-US" sz="1200" b="1" dirty="0">
+              <a:rPr lang="en-US" sz="1400" b="1" dirty="0">
                 <a:solidFill>
                   <a:srgbClr val="1F2328"/>
                 </a:solidFill>
@@ -2864,7 +2866,7 @@
               </a:rPr>
               <a:t>60 minutes</a:t>
             </a:r>
-            <a:endParaRPr lang="en-US" sz="1200" dirty="0"/>
+            <a:endParaRPr lang="en-US" sz="1400" dirty="0"/>
           </a:p>
         </p:txBody>
       </p:sp>
@@ -2876,12 +2878,12 @@
         </p:nvSpPr>
         <p:spPr>
           <a:xfrm>
-            <a:off x="2129582" y="3022550"/>
-            <a:ext cx="355550" cy="355550"/>
+            <a:off x="2312640" y="2946350"/>
+            <a:ext cx="431750" cy="431750"/>
           </a:xfrm>
           <a:prstGeom prst="roundRect">
             <a:avLst>
-              <a:gd name="adj" fmla="val 21432"/>
+              <a:gd name="adj" fmla="val 17649"/>
             </a:avLst>
           </a:prstGeom>
           <a:solidFill>
@@ -2916,8 +2918,8 @@
         </p:blipFill>
         <p:spPr>
           <a:xfrm>
-            <a:off x="2205782" y="3098750"/>
-            <a:ext cx="203150" cy="203150"/>
+            <a:off x="2407890" y="3041600"/>
+            <a:ext cx="241250" cy="241250"/>
           </a:xfrm>
           <a:prstGeom prst="rect">
             <a:avLst/>
@@ -2932,8 +2934,8 @@
         </p:nvSpPr>
         <p:spPr>
           <a:xfrm>
-            <a:off x="2599432" y="3051125"/>
-            <a:ext cx="1300511" cy="114300"/>
+            <a:off x="2858691" y="2973288"/>
+            <a:ext cx="1516681" cy="142875"/>
           </a:xfrm>
           <a:prstGeom prst="rect">
             <a:avLst/>
@@ -2949,7 +2951,7 @@
               <a:buNone/>
             </a:pPr>
             <a:r>
-              <a:rPr lang="en-US" sz="850" b="1" dirty="0">
+              <a:rPr lang="en-US" sz="1000" b="1" dirty="0">
                 <a:solidFill>
                   <a:srgbClr val="59636E"/>
                 </a:solidFill>
@@ -2959,7 +2961,7 @@
               </a:rPr>
               <a:t>COST IF LEFT RUNNING</a:t>
             </a:r>
-            <a:endParaRPr lang="en-US" sz="850" dirty="0"/>
+            <a:endParaRPr lang="en-US" sz="1000" dirty="0"/>
           </a:p>
         </p:txBody>
       </p:sp>
@@ -2971,8 +2973,8 @@
         </p:nvSpPr>
         <p:spPr>
           <a:xfrm>
-            <a:off x="2599432" y="3178076"/>
-            <a:ext cx="1300511" cy="171450"/>
+            <a:off x="2858691" y="3141464"/>
+            <a:ext cx="1516681" cy="209550"/>
           </a:xfrm>
           <a:prstGeom prst="rect">
             <a:avLst/>
@@ -2988,7 +2990,7 @@
               <a:buNone/>
             </a:pPr>
             <a:r>
-              <a:rPr lang="en-US" sz="1200" b="1" dirty="0">
+              <a:rPr lang="en-US" sz="1400" b="1" dirty="0">
                 <a:solidFill>
                   <a:srgbClr val="1F2328"/>
                 </a:solidFill>
@@ -2998,7 +3000,7 @@
               </a:rPr>
               <a:t>~$200–215/month</a:t>
             </a:r>
-            <a:endParaRPr lang="en-US" sz="1200" dirty="0"/>
+            <a:endParaRPr lang="en-US" sz="1400" dirty="0"/>
           </a:p>
         </p:txBody>
       </p:sp>
@@ -3010,12 +3012,12 @@
         </p:nvSpPr>
         <p:spPr>
           <a:xfrm>
-            <a:off x="4255443" y="3022550"/>
-            <a:ext cx="355550" cy="355550"/>
+            <a:off x="4701183" y="2946350"/>
+            <a:ext cx="431750" cy="431750"/>
           </a:xfrm>
           <a:prstGeom prst="roundRect">
             <a:avLst>
-              <a:gd name="adj" fmla="val 21432"/>
+              <a:gd name="adj" fmla="val 17649"/>
             </a:avLst>
           </a:prstGeom>
           <a:solidFill>
@@ -3050,8 +3052,8 @@
         </p:blipFill>
         <p:spPr>
           <a:xfrm>
-            <a:off x="4331643" y="3098750"/>
-            <a:ext cx="203150" cy="203150"/>
+            <a:off x="4796433" y="3041600"/>
+            <a:ext cx="241250" cy="241250"/>
           </a:xfrm>
           <a:prstGeom prst="rect">
             <a:avLst/>
@@ -3066,8 +3068,8 @@
         </p:nvSpPr>
         <p:spPr>
           <a:xfrm>
-            <a:off x="4725293" y="3051125"/>
-            <a:ext cx="1403738" cy="114300"/>
+            <a:off x="5247233" y="2973288"/>
+            <a:ext cx="1637062" cy="142875"/>
           </a:xfrm>
           <a:prstGeom prst="rect">
             <a:avLst/>
@@ -3083,7 +3085,7 @@
               <a:buNone/>
             </a:pPr>
             <a:r>
-              <a:rPr lang="en-US" sz="850" b="1" dirty="0">
+              <a:rPr lang="en-US" sz="1000" b="1" dirty="0">
                 <a:solidFill>
                   <a:srgbClr val="59636E"/>
                 </a:solidFill>
@@ -3093,7 +3095,7 @@
               </a:rPr>
               <a:t>RUNS ON</a:t>
             </a:r>
-            <a:endParaRPr lang="en-US" sz="850" dirty="0"/>
+            <a:endParaRPr lang="en-US" sz="1000" dirty="0"/>
           </a:p>
         </p:txBody>
       </p:sp>
@@ -3105,8 +3107,8 @@
         </p:nvSpPr>
         <p:spPr>
           <a:xfrm>
-            <a:off x="4725293" y="3178076"/>
-            <a:ext cx="1403738" cy="171450"/>
+            <a:off x="5247233" y="3141464"/>
+            <a:ext cx="1637062" cy="209550"/>
           </a:xfrm>
           <a:prstGeom prst="rect">
             <a:avLst/>
@@ -3122,7 +3124,7 @@
               <a:buNone/>
             </a:pPr>
             <a:r>
-              <a:rPr lang="en-US" sz="1200" b="1" dirty="0">
+              <a:rPr lang="en-US" sz="1400" b="1" dirty="0">
                 <a:solidFill>
                   <a:srgbClr val="1F2328"/>
                 </a:solidFill>
@@ -3132,7 +3134,7 @@
               </a:rPr>
               <a:t>AKS + PostgreSQL</a:t>
             </a:r>
-            <a:endParaRPr lang="en-US" sz="1200" dirty="0"/>
+            <a:endParaRPr lang="en-US" sz="1400" dirty="0"/>
           </a:p>
         </p:txBody>
       </p:sp>
@@ -3144,8 +3146,8 @@
         </p:nvSpPr>
         <p:spPr>
           <a:xfrm>
-            <a:off x="482501" y="3759101"/>
-            <a:ext cx="8342275" cy="133350"/>
+            <a:off x="482501" y="3708350"/>
+            <a:ext cx="8342275" cy="142875"/>
           </a:xfrm>
           <a:prstGeom prst="rect">
             <a:avLst/>
@@ -3161,7 +3163,7 @@
               <a:buNone/>
             </a:pPr>
             <a:r>
-              <a:rPr lang="en-US" sz="900" b="1" dirty="0">
+              <a:rPr lang="en-US" sz="1000" b="1" dirty="0">
                 <a:solidFill>
                   <a:srgbClr val="59636E"/>
                 </a:solidFill>
@@ -3171,7 +3173,7 @@
               </a:rPr>
               <a:t>IN THIS SESSION</a:t>
             </a:r>
-            <a:endParaRPr lang="en-US" sz="900" dirty="0"/>
+            <a:endParaRPr lang="en-US" sz="1000" dirty="0"/>
           </a:p>
         </p:txBody>
       </p:sp>
@@ -3183,12 +3185,12 @@
         </p:nvSpPr>
         <p:spPr>
           <a:xfrm>
-            <a:off x="482501" y="3981301"/>
-            <a:ext cx="1055638" cy="336352"/>
+            <a:off x="482501" y="3952726"/>
+            <a:ext cx="1178570" cy="361652"/>
           </a:xfrm>
           <a:prstGeom prst="roundRect">
             <a:avLst>
-              <a:gd name="adj" fmla="val 52861"/>
+              <a:gd name="adj" fmla="val 52675"/>
             </a:avLst>
           </a:prstGeom>
           <a:solidFill>
@@ -3219,12 +3221,12 @@
         </p:nvSpPr>
         <p:spPr>
           <a:xfrm>
-            <a:off x="568226" y="4054227"/>
-            <a:ext cx="190500" cy="190500"/>
+            <a:off x="568226" y="4025652"/>
+            <a:ext cx="215801" cy="215801"/>
           </a:xfrm>
           <a:prstGeom prst="roundRect">
             <a:avLst>
-              <a:gd name="adj" fmla="val 480000"/>
+              <a:gd name="adj" fmla="val 423724"/>
             </a:avLst>
           </a:prstGeom>
           <a:solidFill>
@@ -3251,8 +3253,8 @@
         </p:nvSpPr>
         <p:spPr>
           <a:xfrm>
-            <a:off x="634633" y="4092327"/>
-            <a:ext cx="57686" cy="114300"/>
+            <a:off x="643640" y="4066877"/>
+            <a:ext cx="64972" cy="133350"/>
           </a:xfrm>
           <a:prstGeom prst="rect">
             <a:avLst/>
@@ -3268,7 +3270,7 @@
               <a:buNone/>
             </a:pPr>
             <a:r>
-              <a:rPr lang="en-US" sz="800" b="1" dirty="0">
+              <a:rPr lang="en-US" sz="900" b="1" dirty="0">
                 <a:solidFill>
                   <a:srgbClr val="FFFFFF"/>
                 </a:solidFill>
@@ -3278,7 +3280,7 @@
               </a:rPr>
               <a:t>1</a:t>
             </a:r>
-            <a:endParaRPr lang="en-US" sz="800" dirty="0"/>
+            <a:endParaRPr lang="en-US" sz="900" dirty="0"/>
           </a:p>
         </p:txBody>
       </p:sp>
@@ -3290,8 +3292,8 @@
         </p:nvSpPr>
         <p:spPr>
           <a:xfrm>
-            <a:off x="834926" y="4078039"/>
-            <a:ext cx="578072" cy="142875"/>
+            <a:off x="860227" y="4047827"/>
+            <a:ext cx="664753" cy="171450"/>
           </a:xfrm>
           <a:prstGeom prst="rect">
             <a:avLst/>
@@ -3307,7 +3309,7 @@
               <a:buNone/>
             </a:pPr>
             <a:r>
-              <a:rPr lang="en-US" sz="1000" b="1" dirty="0">
+              <a:rPr lang="en-US" sz="1150" b="1" dirty="0">
                 <a:solidFill>
                   <a:srgbClr val="0969DA"/>
                 </a:solidFill>
@@ -3317,7 +3319,7 @@
               </a:rPr>
               <a:t>Why AKS</a:t>
             </a:r>
-            <a:endParaRPr lang="en-US" sz="1000" dirty="0"/>
+            <a:endParaRPr lang="en-US" sz="1150" dirty="0"/>
           </a:p>
         </p:txBody>
       </p:sp>
@@ -3329,12 +3331,12 @@
         </p:nvSpPr>
         <p:spPr>
           <a:xfrm>
-            <a:off x="1639639" y="3981301"/>
-            <a:ext cx="1674316" cy="336352"/>
+            <a:off x="1762571" y="3952726"/>
+            <a:ext cx="1890117" cy="361652"/>
           </a:xfrm>
           <a:prstGeom prst="roundRect">
             <a:avLst>
-              <a:gd name="adj" fmla="val 52861"/>
+              <a:gd name="adj" fmla="val 52675"/>
             </a:avLst>
           </a:prstGeom>
           <a:solidFill>
@@ -3365,12 +3367,12 @@
         </p:nvSpPr>
         <p:spPr>
           <a:xfrm>
-            <a:off x="1725364" y="4054227"/>
-            <a:ext cx="190500" cy="190500"/>
+            <a:off x="1848296" y="4025652"/>
+            <a:ext cx="215801" cy="215801"/>
           </a:xfrm>
           <a:prstGeom prst="roundRect">
             <a:avLst>
-              <a:gd name="adj" fmla="val 480000"/>
+              <a:gd name="adj" fmla="val 423724"/>
             </a:avLst>
           </a:prstGeom>
           <a:solidFill>
@@ -3397,8 +3399,8 @@
         </p:nvSpPr>
         <p:spPr>
           <a:xfrm>
-            <a:off x="1791772" y="4092327"/>
-            <a:ext cx="57686" cy="114300"/>
+            <a:off x="1923711" y="4066877"/>
+            <a:ext cx="64972" cy="133350"/>
           </a:xfrm>
           <a:prstGeom prst="rect">
             <a:avLst/>
@@ -3414,7 +3416,7 @@
               <a:buNone/>
             </a:pPr>
             <a:r>
-              <a:rPr lang="en-US" sz="800" b="1" dirty="0">
+              <a:rPr lang="en-US" sz="900" b="1" dirty="0">
                 <a:solidFill>
                   <a:srgbClr val="FFFFFF"/>
                 </a:solidFill>
@@ -3424,7 +3426,7 @@
               </a:rPr>
               <a:t>2</a:t>
             </a:r>
-            <a:endParaRPr lang="en-US" sz="800" dirty="0"/>
+            <a:endParaRPr lang="en-US" sz="900" dirty="0"/>
           </a:p>
         </p:txBody>
       </p:sp>
@@ -3436,8 +3438,8 @@
         </p:nvSpPr>
         <p:spPr>
           <a:xfrm>
-            <a:off x="1992064" y="4078039"/>
-            <a:ext cx="1209124" cy="142875"/>
+            <a:off x="2140297" y="4047827"/>
+            <a:ext cx="1390531" cy="171450"/>
           </a:xfrm>
           <a:prstGeom prst="rect">
             <a:avLst/>
@@ -3453,7 +3455,7 @@
               <a:buNone/>
             </a:pPr>
             <a:r>
-              <a:rPr lang="en-US" sz="1000" b="1" dirty="0">
+              <a:rPr lang="en-US" sz="1150" b="1" dirty="0">
                 <a:solidFill>
                   <a:srgbClr val="8250DF"/>
                 </a:solidFill>
@@ -3463,7 +3465,7 @@
               </a:rPr>
               <a:t>Gate, then generate</a:t>
             </a:r>
-            <a:endParaRPr lang="en-US" sz="1000" dirty="0"/>
+            <a:endParaRPr lang="en-US" sz="1150" dirty="0"/>
           </a:p>
         </p:txBody>
       </p:sp>
@@ -3475,12 +3477,12 @@
         </p:nvSpPr>
         <p:spPr>
           <a:xfrm>
-            <a:off x="3415457" y="3981301"/>
-            <a:ext cx="1547366" cy="336352"/>
+            <a:off x="3754189" y="3952726"/>
+            <a:ext cx="1744117" cy="361652"/>
           </a:xfrm>
           <a:prstGeom prst="roundRect">
             <a:avLst>
-              <a:gd name="adj" fmla="val 52861"/>
+              <a:gd name="adj" fmla="val 52675"/>
             </a:avLst>
           </a:prstGeom>
           <a:solidFill>
@@ -3511,12 +3513,12 @@
         </p:nvSpPr>
         <p:spPr>
           <a:xfrm>
-            <a:off x="3501182" y="4054227"/>
-            <a:ext cx="190500" cy="190500"/>
+            <a:off x="3839914" y="4025652"/>
+            <a:ext cx="215801" cy="215801"/>
           </a:xfrm>
           <a:prstGeom prst="roundRect">
             <a:avLst>
-              <a:gd name="adj" fmla="val 480000"/>
+              <a:gd name="adj" fmla="val 423724"/>
             </a:avLst>
           </a:prstGeom>
           <a:solidFill>
@@ -3543,8 +3545,8 @@
         </p:nvSpPr>
         <p:spPr>
           <a:xfrm>
-            <a:off x="3567589" y="4092327"/>
-            <a:ext cx="57686" cy="114300"/>
+            <a:off x="3915329" y="4066877"/>
+            <a:ext cx="64972" cy="133350"/>
           </a:xfrm>
           <a:prstGeom prst="rect">
             <a:avLst/>
@@ -3560,7 +3562,7 @@
               <a:buNone/>
             </a:pPr>
             <a:r>
-              <a:rPr lang="en-US" sz="800" b="1" dirty="0">
+              <a:rPr lang="en-US" sz="900" b="1" dirty="0">
                 <a:solidFill>
                   <a:srgbClr val="FFFFFF"/>
                 </a:solidFill>
@@ -3570,7 +3572,7 @@
               </a:rPr>
               <a:t>3</a:t>
             </a:r>
-            <a:endParaRPr lang="en-US" sz="800" dirty="0"/>
+            <a:endParaRPr lang="en-US" sz="900" dirty="0"/>
           </a:p>
         </p:txBody>
       </p:sp>
@@ -3582,8 +3584,8 @@
         </p:nvSpPr>
         <p:spPr>
           <a:xfrm>
-            <a:off x="3767882" y="4078039"/>
-            <a:ext cx="1079635" cy="142875"/>
+            <a:off x="4131915" y="4047827"/>
+            <a:ext cx="1241611" cy="171450"/>
           </a:xfrm>
           <a:prstGeom prst="rect">
             <a:avLst/>
@@ -3599,7 +3601,7 @@
               <a:buNone/>
             </a:pPr>
             <a:r>
-              <a:rPr lang="en-US" sz="1000" b="1" dirty="0">
+              <a:rPr lang="en-US" sz="1150" b="1" dirty="0">
                 <a:solidFill>
                   <a:srgbClr val="1A7F37"/>
                 </a:solidFill>
@@ -3609,7 +3611,7 @@
               </a:rPr>
               <a:t>Deploy and verify</a:t>
             </a:r>
-            <a:endParaRPr lang="en-US" sz="1000" dirty="0"/>
+            <a:endParaRPr lang="en-US" sz="1150" dirty="0"/>
           </a:p>
         </p:txBody>
       </p:sp>
@@ -3621,8 +3623,8 @@
         </p:nvSpPr>
         <p:spPr>
           <a:xfrm>
-            <a:off x="482501" y="4724400"/>
-            <a:ext cx="2396237" cy="142875"/>
+            <a:off x="482501" y="4673501"/>
+            <a:ext cx="2635329" cy="152400"/>
           </a:xfrm>
           <a:prstGeom prst="rect">
             <a:avLst/>
@@ -3638,7 +3640,7 @@
               <a:buNone/>
             </a:pPr>
             <a:r>
-              <a:rPr lang="en-US" sz="1000" b="1" dirty="0">
+              <a:rPr lang="en-US" sz="1100" b="1" dirty="0">
                 <a:solidFill>
                   <a:srgbClr val="0969DA"/>
                 </a:solidFill>
@@ -3648,7 +3650,7 @@
               </a:rPr>
               <a:t>github.com/microsoft/agentic-journeys</a:t>
             </a:r>
-            <a:endParaRPr lang="en-US" sz="1000" dirty="0"/>
+            <a:endParaRPr lang="en-US" sz="1100" dirty="0"/>
           </a:p>
         </p:txBody>
       </p:sp>
@@ -3692,12 +3694,12 @@
         </p:nvSpPr>
         <p:spPr>
           <a:xfrm>
-            <a:off x="7689800" y="152400"/>
-            <a:ext cx="870049" cy="266700"/>
+            <a:off x="7596187" y="152400"/>
+            <a:ext cx="963662" cy="279350"/>
           </a:xfrm>
           <a:prstGeom prst="roundRect">
             <a:avLst>
-              <a:gd name="adj" fmla="val 23810"/>
+              <a:gd name="adj" fmla="val 22731"/>
             </a:avLst>
           </a:prstGeom>
           <a:solidFill>
@@ -3724,8 +3726,8 @@
         </p:nvSpPr>
         <p:spPr>
           <a:xfrm>
-            <a:off x="7810589" y="219075"/>
-            <a:ext cx="628471" cy="133350"/>
+            <a:off x="7728944" y="220563"/>
+            <a:ext cx="698150" cy="142875"/>
           </a:xfrm>
           <a:prstGeom prst="rect">
             <a:avLst/>
@@ -3741,7 +3743,7 @@
               <a:buNone/>
             </a:pPr>
             <a:r>
-              <a:rPr lang="en-US" sz="900" b="1" dirty="0">
+              <a:rPr lang="en-US" sz="1000" b="1" dirty="0">
                 <a:solidFill>
                   <a:srgbClr val="FFFFFF"/>
                 </a:solidFill>
@@ -3751,7 +3753,7 @@
               </a:rPr>
               <a:t>SUPERSET</a:t>
             </a:r>
-            <a:endParaRPr lang="en-US" sz="900" dirty="0"/>
+            <a:endParaRPr lang="en-US" sz="1000" dirty="0"/>
           </a:p>
         </p:txBody>
       </p:sp>
@@ -3788,7 +3790,7 @@
         <p:spPr>
           <a:xfrm>
             <a:off x="482501" y="330101"/>
-            <a:ext cx="7772400" cy="142875"/>
+            <a:ext cx="8342275" cy="152400"/>
           </a:xfrm>
           <a:prstGeom prst="rect">
             <a:avLst/>
@@ -3804,7 +3806,7 @@
               <a:buNone/>
             </a:pPr>
             <a:r>
-              <a:rPr lang="en-US" sz="1000" b="1" dirty="0">
+              <a:rPr lang="en-US" sz="1100" b="1" dirty="0">
                 <a:solidFill>
                   <a:srgbClr val="8250DF"/>
                 </a:solidFill>
@@ -3814,7 +3816,7 @@
               </a:rPr>
               <a:t>TEST-FIRST INFRASTRUCTURE</a:t>
             </a:r>
-            <a:endParaRPr lang="en-US" sz="1000" dirty="0"/>
+            <a:endParaRPr lang="en-US" sz="1100" dirty="0"/>
           </a:p>
         </p:txBody>
       </p:sp>
@@ -3826,8 +3828,8 @@
         </p:nvSpPr>
         <p:spPr>
           <a:xfrm>
-            <a:off x="482501" y="523726"/>
-            <a:ext cx="7772400" cy="393650"/>
+            <a:off x="482501" y="533251"/>
+            <a:ext cx="8342275" cy="419100"/>
           </a:xfrm>
           <a:prstGeom prst="rect">
             <a:avLst/>
@@ -3841,7 +3843,7 @@
           <a:p>
             <a:pPr algn="l" indent="0" marL="0">
               <a:lnSpc>
-                <a:spcPts val="3100"/>
+                <a:spcPts val="3300"/>
               </a:lnSpc>
               <a:spcBef>
                 <a:spcPts val="400"/>
@@ -3849,7 +3851,7 @@
               <a:buNone/>
             </a:pPr>
             <a:r>
-              <a:rPr lang="en-US" sz="2600" b="1" dirty="0">
+              <a:rPr lang="en-US" sz="2800" b="1" dirty="0">
                 <a:solidFill>
                   <a:srgbClr val="1F2328"/>
                 </a:solidFill>
@@ -3859,7 +3861,7 @@
               </a:rPr>
               <a:t>Fail fast, offline, for free</a:t>
             </a:r>
-            <a:endParaRPr lang="en-US" sz="2600" dirty="0"/>
+            <a:endParaRPr lang="en-US" sz="2800" dirty="0"/>
           </a:p>
         </p:txBody>
       </p:sp>
@@ -3871,7 +3873,7 @@
         </p:nvSpPr>
         <p:spPr>
           <a:xfrm>
-            <a:off x="901601" y="1903065"/>
+            <a:off x="901601" y="1848594"/>
             <a:ext cx="584150" cy="584150"/>
           </a:xfrm>
           <a:prstGeom prst="roundRect">
@@ -3911,7 +3913,7 @@
         </p:blipFill>
         <p:spPr>
           <a:xfrm>
-            <a:off x="1028551" y="2030016"/>
+            <a:off x="1028551" y="1975545"/>
             <a:ext cx="330101" cy="330101"/>
           </a:xfrm>
           <a:prstGeom prst="rect">
@@ -3927,8 +3929,8 @@
         </p:nvSpPr>
         <p:spPr>
           <a:xfrm>
-            <a:off x="814694" y="2588716"/>
-            <a:ext cx="758113" cy="206425"/>
+            <a:off x="756251" y="2534245"/>
+            <a:ext cx="874850" cy="238125"/>
           </a:xfrm>
           <a:prstGeom prst="rect">
             <a:avLst/>
@@ -3942,12 +3944,12 @@
           <a:p>
             <a:pPr algn="ctr" indent="0" marL="0">
               <a:lnSpc>
-                <a:spcPts val="1625"/>
+                <a:spcPts val="1875"/>
               </a:lnSpc>
               <a:buNone/>
             </a:pPr>
             <a:r>
-              <a:rPr lang="en-US" sz="1300" b="1" dirty="0">
+              <a:rPr lang="en-US" sz="1500" b="1" dirty="0">
                 <a:solidFill>
                   <a:srgbClr val="1F2328"/>
                 </a:solidFill>
@@ -3957,7 +3959,7 @@
               </a:rPr>
               <a:t>Gate fails</a:t>
             </a:r>
-            <a:endParaRPr lang="en-US" sz="1300" dirty="0"/>
+            <a:endParaRPr lang="en-US" sz="1500" dirty="0"/>
           </a:p>
         </p:txBody>
       </p:sp>
@@ -3969,8 +3971,8 @@
         </p:nvSpPr>
         <p:spPr>
           <a:xfrm>
-            <a:off x="474803" y="2896642"/>
-            <a:ext cx="1437894" cy="360164"/>
+            <a:off x="474803" y="2873871"/>
+            <a:ext cx="1437894" cy="428625"/>
           </a:xfrm>
           <a:prstGeom prst="rect">
             <a:avLst/>
@@ -3984,12 +3986,12 @@
           <a:p>
             <a:pPr algn="ctr" indent="0" marL="0">
               <a:lnSpc>
-                <a:spcPts val="1418"/>
+                <a:spcPts val="1688"/>
               </a:lnSpc>
               <a:buNone/>
             </a:pPr>
             <a:r>
-              <a:rPr lang="en-US" sz="1050" dirty="0">
+              <a:rPr lang="en-US" sz="1250" dirty="0">
                 <a:solidFill>
                   <a:srgbClr val="59636E"/>
                 </a:solidFill>
@@ -3999,7 +4001,7 @@
               </a:rPr>
               <a:t>infra-superset/ doesn't exist yet</a:t>
             </a:r>
-            <a:endParaRPr lang="en-US" sz="1050" dirty="0"/>
+            <a:endParaRPr lang="en-US" sz="1250" dirty="0"/>
           </a:p>
         </p:txBody>
       </p:sp>
@@ -4011,8 +4013,8 @@
         </p:nvSpPr>
         <p:spPr>
           <a:xfrm>
-            <a:off x="1934519" y="2076004"/>
-            <a:ext cx="207365" cy="238125"/>
+            <a:off x="1921615" y="2007245"/>
+            <a:ext cx="233172" cy="266700"/>
           </a:xfrm>
           <a:prstGeom prst="rect">
             <a:avLst/>
@@ -4028,7 +4030,7 @@
               <a:buNone/>
             </a:pPr>
             <a:r>
-              <a:rPr lang="en-US" sz="1600" dirty="0">
+              <a:rPr lang="en-US" sz="1800" dirty="0">
                 <a:solidFill>
                   <a:srgbClr val="818B98"/>
                 </a:solidFill>
@@ -4038,7 +4040,7 @@
               </a:rPr>
               <a:t>→</a:t>
             </a:r>
-            <a:endParaRPr lang="en-US" sz="1600" dirty="0"/>
+            <a:endParaRPr lang="en-US" sz="1800" dirty="0"/>
           </a:p>
         </p:txBody>
       </p:sp>
@@ -4050,7 +4052,7 @@
         </p:nvSpPr>
         <p:spPr>
           <a:xfrm>
-            <a:off x="2590651" y="1903065"/>
+            <a:off x="2590651" y="1848594"/>
             <a:ext cx="584150" cy="584150"/>
           </a:xfrm>
           <a:prstGeom prst="roundRect">
@@ -4090,7 +4092,7 @@
         </p:blipFill>
         <p:spPr>
           <a:xfrm>
-            <a:off x="2717602" y="2030016"/>
+            <a:off x="2717602" y="1975545"/>
             <a:ext cx="330101" cy="330101"/>
           </a:xfrm>
           <a:prstGeom prst="rect">
@@ -4106,8 +4108,8 @@
         </p:nvSpPr>
         <p:spPr>
           <a:xfrm>
-            <a:off x="2517712" y="2588716"/>
-            <a:ext cx="730029" cy="206425"/>
+            <a:off x="2461543" y="2534245"/>
+            <a:ext cx="842516" cy="238125"/>
           </a:xfrm>
           <a:prstGeom prst="rect">
             <a:avLst/>
@@ -4121,12 +4123,12 @@
           <a:p>
             <a:pPr algn="ctr" indent="0" marL="0">
               <a:lnSpc>
-                <a:spcPts val="1625"/>
+                <a:spcPts val="1875"/>
               </a:lnSpc>
               <a:buNone/>
             </a:pPr>
             <a:r>
-              <a:rPr lang="en-US" sz="1300" b="1" dirty="0">
+              <a:rPr lang="en-US" sz="1500" b="1" dirty="0">
                 <a:solidFill>
                   <a:srgbClr val="1F2328"/>
                 </a:solidFill>
@@ -4136,7 +4138,7 @@
               </a:rPr>
               <a:t>Generate</a:t>
             </a:r>
-            <a:endParaRPr lang="en-US" sz="1300" dirty="0"/>
+            <a:endParaRPr lang="en-US" sz="1500" dirty="0"/>
           </a:p>
         </p:txBody>
       </p:sp>
@@ -4148,8 +4150,8 @@
         </p:nvSpPr>
         <p:spPr>
           <a:xfrm>
-            <a:off x="2198467" y="2896642"/>
-            <a:ext cx="1368519" cy="180082"/>
+            <a:off x="2163854" y="2873871"/>
+            <a:ext cx="1437894" cy="428625"/>
           </a:xfrm>
           <a:prstGeom prst="rect">
             <a:avLst/>
@@ -4163,12 +4165,12 @@
           <a:p>
             <a:pPr algn="ctr" indent="0" marL="0">
               <a:lnSpc>
-                <a:spcPts val="1418"/>
+                <a:spcPts val="1688"/>
               </a:lnSpc>
               <a:buNone/>
             </a:pPr>
             <a:r>
-              <a:rPr lang="en-US" sz="1050" dirty="0">
+              <a:rPr lang="en-US" sz="1250" dirty="0">
                 <a:solidFill>
                   <a:srgbClr val="59636E"/>
                 </a:solidFill>
@@ -4178,7 +4180,7 @@
               </a:rPr>
               <a:t>Bicep, manifests, hook</a:t>
             </a:r>
-            <a:endParaRPr lang="en-US" sz="1050" dirty="0"/>
+            <a:endParaRPr lang="en-US" sz="1250" dirty="0"/>
           </a:p>
         </p:txBody>
       </p:sp>
@@ -4190,8 +4192,8 @@
         </p:nvSpPr>
         <p:spPr>
           <a:xfrm>
-            <a:off x="3623569" y="2076004"/>
-            <a:ext cx="207365" cy="238125"/>
+            <a:off x="3610666" y="2007245"/>
+            <a:ext cx="233172" cy="266700"/>
           </a:xfrm>
           <a:prstGeom prst="rect">
             <a:avLst/>
@@ -4207,7 +4209,7 @@
               <a:buNone/>
             </a:pPr>
             <a:r>
-              <a:rPr lang="en-US" sz="1600" dirty="0">
+              <a:rPr lang="en-US" sz="1800" dirty="0">
                 <a:solidFill>
                   <a:srgbClr val="818B98"/>
                 </a:solidFill>
@@ -4217,7 +4219,7 @@
               </a:rPr>
               <a:t>→</a:t>
             </a:r>
-            <a:endParaRPr lang="en-US" sz="1600" dirty="0"/>
+            <a:endParaRPr lang="en-US" sz="1800" dirty="0"/>
           </a:p>
         </p:txBody>
       </p:sp>
@@ -4229,7 +4231,7 @@
         </p:nvSpPr>
         <p:spPr>
           <a:xfrm>
-            <a:off x="4279702" y="1903065"/>
+            <a:off x="4279702" y="1848594"/>
             <a:ext cx="584150" cy="584150"/>
           </a:xfrm>
           <a:prstGeom prst="roundRect">
@@ -4269,7 +4271,7 @@
         </p:blipFill>
         <p:spPr>
           <a:xfrm>
-            <a:off x="4406652" y="2030016"/>
+            <a:off x="4406652" y="1975545"/>
             <a:ext cx="330101" cy="330101"/>
           </a:xfrm>
           <a:prstGeom prst="rect">
@@ -4285,8 +4287,8 @@
         </p:nvSpPr>
         <p:spPr>
           <a:xfrm>
-            <a:off x="4075753" y="2588716"/>
-            <a:ext cx="992195" cy="206425"/>
+            <a:off x="3999245" y="2534245"/>
+            <a:ext cx="1145063" cy="238125"/>
           </a:xfrm>
           <a:prstGeom prst="rect">
             <a:avLst/>
@@ -4300,12 +4302,12 @@
           <a:p>
             <a:pPr algn="ctr" indent="0" marL="0">
               <a:lnSpc>
-                <a:spcPts val="1625"/>
+                <a:spcPts val="1875"/>
               </a:lnSpc>
               <a:buNone/>
             </a:pPr>
             <a:r>
-              <a:rPr lang="en-US" sz="1300" b="1" dirty="0">
+              <a:rPr lang="en-US" sz="1500" b="1" dirty="0">
                 <a:solidFill>
                   <a:srgbClr val="1F2328"/>
                 </a:solidFill>
@@ -4315,7 +4317,7 @@
               </a:rPr>
               <a:t>Gate passes</a:t>
             </a:r>
-            <a:endParaRPr lang="en-US" sz="1300" dirty="0"/>
+            <a:endParaRPr lang="en-US" sz="1500" dirty="0"/>
           </a:p>
         </p:txBody>
       </p:sp>
@@ -4327,8 +4329,8 @@
         </p:nvSpPr>
         <p:spPr>
           <a:xfrm>
-            <a:off x="3852904" y="2896642"/>
-            <a:ext cx="1437894" cy="360164"/>
+            <a:off x="3852904" y="2873871"/>
+            <a:ext cx="1437894" cy="428625"/>
           </a:xfrm>
           <a:prstGeom prst="rect">
             <a:avLst/>
@@ -4342,12 +4344,12 @@
           <a:p>
             <a:pPr algn="ctr" indent="0" marL="0">
               <a:lnSpc>
-                <a:spcPts val="1418"/>
+                <a:spcPts val="1688"/>
               </a:lnSpc>
               <a:buNone/>
             </a:pPr>
             <a:r>
-              <a:rPr lang="en-US" sz="1050" dirty="0">
+              <a:rPr lang="en-US" sz="1250" dirty="0">
                 <a:solidFill>
                   <a:srgbClr val="59636E"/>
                 </a:solidFill>
@@ -4357,7 +4359,7 @@
               </a:rPr>
               <a:t>Without changing the gate</a:t>
             </a:r>
-            <a:endParaRPr lang="en-US" sz="1050" dirty="0"/>
+            <a:endParaRPr lang="en-US" sz="1250" dirty="0"/>
           </a:p>
         </p:txBody>
       </p:sp>
@@ -4369,8 +4371,8 @@
         </p:nvSpPr>
         <p:spPr>
           <a:xfrm>
-            <a:off x="5312619" y="2076004"/>
-            <a:ext cx="207365" cy="238125"/>
+            <a:off x="5299716" y="2007245"/>
+            <a:ext cx="233172" cy="266700"/>
           </a:xfrm>
           <a:prstGeom prst="rect">
             <a:avLst/>
@@ -4386,7 +4388,7 @@
               <a:buNone/>
             </a:pPr>
             <a:r>
-              <a:rPr lang="en-US" sz="1600" dirty="0">
+              <a:rPr lang="en-US" sz="1800" dirty="0">
                 <a:solidFill>
                   <a:srgbClr val="818B98"/>
                 </a:solidFill>
@@ -4396,7 +4398,7 @@
               </a:rPr>
               <a:t>→</a:t>
             </a:r>
-            <a:endParaRPr lang="en-US" sz="1600" dirty="0"/>
+            <a:endParaRPr lang="en-US" sz="1800" dirty="0"/>
           </a:p>
         </p:txBody>
       </p:sp>
@@ -4408,7 +4410,7 @@
         </p:nvSpPr>
         <p:spPr>
           <a:xfrm>
-            <a:off x="5968752" y="1903065"/>
+            <a:off x="5968752" y="1848594"/>
             <a:ext cx="584150" cy="584150"/>
           </a:xfrm>
           <a:prstGeom prst="roundRect">
@@ -4448,7 +4450,7 @@
         </p:blipFill>
         <p:spPr>
           <a:xfrm>
-            <a:off x="6095702" y="2030016"/>
+            <a:off x="6095702" y="1975545"/>
             <a:ext cx="330101" cy="330101"/>
           </a:xfrm>
           <a:prstGeom prst="rect">
@@ -4464,8 +4466,8 @@
         </p:nvSpPr>
         <p:spPr>
           <a:xfrm>
-            <a:off x="5942569" y="2588716"/>
-            <a:ext cx="636517" cy="206425"/>
+            <a:off x="5893536" y="2534245"/>
+            <a:ext cx="734583" cy="238125"/>
           </a:xfrm>
           <a:prstGeom prst="rect">
             <a:avLst/>
@@ -4479,12 +4481,12 @@
           <a:p>
             <a:pPr algn="ctr" indent="0" marL="0">
               <a:lnSpc>
-                <a:spcPts val="1625"/>
+                <a:spcPts val="1875"/>
               </a:lnSpc>
               <a:buNone/>
             </a:pPr>
             <a:r>
-              <a:rPr lang="en-US" sz="1300" b="1" dirty="0">
+              <a:rPr lang="en-US" sz="1500" b="1" dirty="0">
                 <a:solidFill>
                   <a:srgbClr val="1F2328"/>
                 </a:solidFill>
@@ -4494,7 +4496,7 @@
               </a:rPr>
               <a:t>Preview</a:t>
             </a:r>
-            <a:endParaRPr lang="en-US" sz="1300" dirty="0"/>
+            <a:endParaRPr lang="en-US" sz="1500" dirty="0"/>
           </a:p>
         </p:txBody>
       </p:sp>
@@ -4506,8 +4508,8 @@
         </p:nvSpPr>
         <p:spPr>
           <a:xfrm>
-            <a:off x="5561539" y="2896642"/>
-            <a:ext cx="1398577" cy="180082"/>
+            <a:off x="5541955" y="2873871"/>
+            <a:ext cx="1437894" cy="428625"/>
           </a:xfrm>
           <a:prstGeom prst="rect">
             <a:avLst/>
@@ -4521,12 +4523,12 @@
           <a:p>
             <a:pPr algn="ctr" indent="0" marL="0">
               <a:lnSpc>
-                <a:spcPts val="1418"/>
+                <a:spcPts val="1688"/>
               </a:lnSpc>
               <a:buNone/>
             </a:pPr>
             <a:r>
-              <a:rPr lang="en-US" sz="1050" dirty="0">
+              <a:rPr lang="en-US" sz="1250" dirty="0">
                 <a:solidFill>
                   <a:srgbClr val="59636E"/>
                 </a:solidFill>
@@ -4536,7 +4538,7 @@
               </a:rPr>
               <a:t>azd provision --preview</a:t>
             </a:r>
-            <a:endParaRPr lang="en-US" sz="1050" dirty="0"/>
+            <a:endParaRPr lang="en-US" sz="1250" dirty="0"/>
           </a:p>
         </p:txBody>
       </p:sp>
@@ -4548,8 +4550,8 @@
         </p:nvSpPr>
         <p:spPr>
           <a:xfrm>
-            <a:off x="7001670" y="2076004"/>
-            <a:ext cx="207365" cy="238125"/>
+            <a:off x="6988766" y="2007245"/>
+            <a:ext cx="233172" cy="266700"/>
           </a:xfrm>
           <a:prstGeom prst="rect">
             <a:avLst/>
@@ -4565,7 +4567,7 @@
               <a:buNone/>
             </a:pPr>
             <a:r>
-              <a:rPr lang="en-US" sz="1600" dirty="0">
+              <a:rPr lang="en-US" sz="1800" dirty="0">
                 <a:solidFill>
                   <a:srgbClr val="818B98"/>
                 </a:solidFill>
@@ -4575,7 +4577,7 @@
               </a:rPr>
               <a:t>→</a:t>
             </a:r>
-            <a:endParaRPr lang="en-US" sz="1600" dirty="0"/>
+            <a:endParaRPr lang="en-US" sz="1800" dirty="0"/>
           </a:p>
         </p:txBody>
       </p:sp>
@@ -4587,7 +4589,7 @@
         </p:nvSpPr>
         <p:spPr>
           <a:xfrm>
-            <a:off x="7657802" y="1903065"/>
+            <a:off x="7657802" y="1848594"/>
             <a:ext cx="584150" cy="584150"/>
           </a:xfrm>
           <a:prstGeom prst="roundRect">
@@ -4627,7 +4629,7 @@
         </p:blipFill>
         <p:spPr>
           <a:xfrm>
-            <a:off x="7784753" y="2030016"/>
+            <a:off x="7784753" y="1975545"/>
             <a:ext cx="330101" cy="330101"/>
           </a:xfrm>
           <a:prstGeom prst="rect">
@@ -4643,8 +4645,8 @@
         </p:nvSpPr>
         <p:spPr>
           <a:xfrm>
-            <a:off x="7683233" y="2588716"/>
-            <a:ext cx="533290" cy="206425"/>
+            <a:off x="7642244" y="2534245"/>
+            <a:ext cx="615416" cy="238125"/>
           </a:xfrm>
           <a:prstGeom prst="rect">
             <a:avLst/>
@@ -4658,12 +4660,12 @@
           <a:p>
             <a:pPr algn="ctr" indent="0" marL="0">
               <a:lnSpc>
-                <a:spcPts val="1625"/>
+                <a:spcPts val="1875"/>
               </a:lnSpc>
               <a:buNone/>
             </a:pPr>
             <a:r>
-              <a:rPr lang="en-US" sz="1300" b="1" dirty="0">
+              <a:rPr lang="en-US" sz="1500" b="1" dirty="0">
                 <a:solidFill>
                   <a:srgbClr val="1F2328"/>
                 </a:solidFill>
@@ -4673,7 +4675,7 @@
               </a:rPr>
               <a:t>azd up</a:t>
             </a:r>
-            <a:endParaRPr lang="en-US" sz="1300" dirty="0"/>
+            <a:endParaRPr lang="en-US" sz="1500" dirty="0"/>
           </a:p>
         </p:txBody>
       </p:sp>
@@ -4685,8 +4687,8 @@
         </p:nvSpPr>
         <p:spPr>
           <a:xfrm>
-            <a:off x="7231005" y="2896642"/>
-            <a:ext cx="1437894" cy="360164"/>
+            <a:off x="7231005" y="2873871"/>
+            <a:ext cx="1437894" cy="428625"/>
           </a:xfrm>
           <a:prstGeom prst="rect">
             <a:avLst/>
@@ -4700,12 +4702,12 @@
           <a:p>
             <a:pPr algn="ctr" indent="0" marL="0">
               <a:lnSpc>
-                <a:spcPts val="1418"/>
+                <a:spcPts val="1688"/>
               </a:lnSpc>
               <a:buNone/>
             </a:pPr>
             <a:r>
-              <a:rPr lang="en-US" sz="1050" dirty="0">
+              <a:rPr lang="en-US" sz="1250" dirty="0">
                 <a:solidFill>
                   <a:srgbClr val="59636E"/>
                 </a:solidFill>
@@ -4715,7 +4717,7 @@
               </a:rPr>
               <a:t>Now it's worth paying for</a:t>
             </a:r>
-            <a:endParaRPr lang="en-US" sz="1050" dirty="0"/>
+            <a:endParaRPr lang="en-US" sz="1250" dirty="0"/>
           </a:p>
         </p:txBody>
       </p:sp>
@@ -4727,12 +4729,12 @@
         </p:nvSpPr>
         <p:spPr>
           <a:xfrm>
-            <a:off x="2186285" y="3688556"/>
-            <a:ext cx="4770983" cy="427732"/>
+            <a:off x="1839813" y="3759696"/>
+            <a:ext cx="5463927" cy="462111"/>
           </a:xfrm>
           <a:prstGeom prst="roundRect">
             <a:avLst>
-              <a:gd name="adj" fmla="val 17815"/>
+              <a:gd name="adj" fmla="val 16490"/>
             </a:avLst>
           </a:prstGeom>
           <a:solidFill>
@@ -4771,7 +4773,7 @@
         </p:blipFill>
         <p:spPr>
           <a:xfrm>
-            <a:off x="2348210" y="3813572"/>
+            <a:off x="2001738" y="3901827"/>
             <a:ext cx="177701" cy="177701"/>
           </a:xfrm>
           <a:prstGeom prst="rect">
@@ -4787,8 +4789,8 @@
         </p:nvSpPr>
         <p:spPr>
           <a:xfrm>
-            <a:off x="2627412" y="3799582"/>
-            <a:ext cx="4251290" cy="205680"/>
+            <a:off x="2280940" y="3870722"/>
+            <a:ext cx="4958093" cy="240060"/>
           </a:xfrm>
           <a:prstGeom prst="rect">
             <a:avLst/>
@@ -4802,12 +4804,12 @@
           <a:p>
             <a:pPr algn="l" indent="0" marL="0">
               <a:lnSpc>
-                <a:spcPts val="1620"/>
+                <a:spcPts val="1890"/>
               </a:lnSpc>
               <a:buNone/>
             </a:pPr>
             <a:r>
-              <a:rPr lang="en-US" sz="1200" dirty="0">
+              <a:rPr lang="en-US" sz="1400" dirty="0">
                 <a:solidFill>
                   <a:srgbClr val="1F2328"/>
                 </a:solidFill>
@@ -4817,7 +4819,7 @@
               </a:rPr>
               <a:t>An AKS failure costs 20 minutes. A failing gate costs seconds.</a:t>
             </a:r>
-            <a:endParaRPr lang="en-US" sz="1200" dirty="0"/>
+            <a:endParaRPr lang="en-US" sz="1400" dirty="0"/>
           </a:p>
         </p:txBody>
       </p:sp>
@@ -4861,12 +4863,12 @@
         </p:nvSpPr>
         <p:spPr>
           <a:xfrm>
-            <a:off x="7689800" y="152400"/>
-            <a:ext cx="870049" cy="266700"/>
+            <a:off x="7596187" y="152400"/>
+            <a:ext cx="963662" cy="279350"/>
           </a:xfrm>
           <a:prstGeom prst="roundRect">
             <a:avLst>
-              <a:gd name="adj" fmla="val 23810"/>
+              <a:gd name="adj" fmla="val 22731"/>
             </a:avLst>
           </a:prstGeom>
           <a:solidFill>
@@ -4893,8 +4895,8 @@
         </p:nvSpPr>
         <p:spPr>
           <a:xfrm>
-            <a:off x="7810589" y="219075"/>
-            <a:ext cx="628471" cy="133350"/>
+            <a:off x="7728944" y="220563"/>
+            <a:ext cx="698150" cy="142875"/>
           </a:xfrm>
           <a:prstGeom prst="rect">
             <a:avLst/>
@@ -4910,7 +4912,7 @@
               <a:buNone/>
             </a:pPr>
             <a:r>
-              <a:rPr lang="en-US" sz="900" b="1" dirty="0">
+              <a:rPr lang="en-US" sz="1000" b="1" dirty="0">
                 <a:solidFill>
                   <a:srgbClr val="FFFFFF"/>
                 </a:solidFill>
@@ -4920,7 +4922,7 @@
               </a:rPr>
               <a:t>SUPERSET</a:t>
             </a:r>
-            <a:endParaRPr lang="en-US" sz="900" dirty="0"/>
+            <a:endParaRPr lang="en-US" sz="1000" dirty="0"/>
           </a:p>
         </p:txBody>
       </p:sp>
@@ -4957,7 +4959,7 @@
         <p:spPr>
           <a:xfrm>
             <a:off x="482501" y="330101"/>
-            <a:ext cx="7772400" cy="142875"/>
+            <a:ext cx="8342275" cy="152400"/>
           </a:xfrm>
           <a:prstGeom prst="rect">
             <a:avLst/>
@@ -4973,7 +4975,7 @@
               <a:buNone/>
             </a:pPr>
             <a:r>
-              <a:rPr lang="en-US" sz="1000" b="1" dirty="0">
+              <a:rPr lang="en-US" sz="1100" b="1" dirty="0">
                 <a:solidFill>
                   <a:srgbClr val="8250DF"/>
                 </a:solidFill>
@@ -4983,7 +4985,7 @@
               </a:rPr>
               <a:t>RED</a:t>
             </a:r>
-            <a:endParaRPr lang="en-US" sz="1000" dirty="0"/>
+            <a:endParaRPr lang="en-US" sz="1100" dirty="0"/>
           </a:p>
         </p:txBody>
       </p:sp>
@@ -4995,8 +4997,8 @@
         </p:nvSpPr>
         <p:spPr>
           <a:xfrm>
-            <a:off x="482501" y="523726"/>
-            <a:ext cx="7772400" cy="393650"/>
+            <a:off x="482501" y="533251"/>
+            <a:ext cx="8342275" cy="419100"/>
           </a:xfrm>
           <a:prstGeom prst="rect">
             <a:avLst/>
@@ -5010,7 +5012,7 @@
           <a:p>
             <a:pPr algn="l" indent="0" marL="0">
               <a:lnSpc>
-                <a:spcPts val="3100"/>
+                <a:spcPts val="3300"/>
               </a:lnSpc>
               <a:spcBef>
                 <a:spcPts val="400"/>
@@ -5018,7 +5020,7 @@
               <a:buNone/>
             </a:pPr>
             <a:r>
-              <a:rPr lang="en-US" sz="2600" b="1" dirty="0">
+              <a:rPr lang="en-US" sz="2800" b="1" dirty="0">
                 <a:solidFill>
                   <a:srgbClr val="1F2328"/>
                 </a:solidFill>
@@ -5028,7 +5030,7 @@
               </a:rPr>
               <a:t>Write the gate first</a:t>
             </a:r>
-            <a:endParaRPr lang="en-US" sz="2600" dirty="0"/>
+            <a:endParaRPr lang="en-US" sz="2800" dirty="0"/>
           </a:p>
         </p:txBody>
       </p:sp>
@@ -5040,12 +5042,12 @@
         </p:nvSpPr>
         <p:spPr>
           <a:xfrm>
-            <a:off x="634901" y="2129135"/>
-            <a:ext cx="7873901" cy="1812280"/>
+            <a:off x="634901" y="1846064"/>
+            <a:ext cx="7873901" cy="2429173"/>
           </a:xfrm>
           <a:prstGeom prst="roundRect">
             <a:avLst>
-              <a:gd name="adj" fmla="val 5606"/>
+              <a:gd name="adj" fmla="val 4183"/>
             </a:avLst>
           </a:prstGeom>
           <a:solidFill>
@@ -5079,7 +5081,7 @@
         </p:nvSpPr>
         <p:spPr>
           <a:xfrm>
-            <a:off x="634901" y="2133898"/>
+            <a:off x="634901" y="1850827"/>
             <a:ext cx="7873901" cy="0"/>
           </a:xfrm>
           <a:prstGeom prst="line">
@@ -5102,8 +5104,8 @@
         </p:nvSpPr>
         <p:spPr>
           <a:xfrm>
-            <a:off x="8504039" y="2129135"/>
-            <a:ext cx="0" cy="1812280"/>
+            <a:off x="8504039" y="1846064"/>
+            <a:ext cx="0" cy="2429173"/>
           </a:xfrm>
           <a:prstGeom prst="line">
             <a:avLst/>
@@ -5125,7 +5127,7 @@
         </p:nvSpPr>
         <p:spPr>
           <a:xfrm>
-            <a:off x="634901" y="3936653"/>
+            <a:off x="634901" y="4270474"/>
             <a:ext cx="7873901" cy="0"/>
           </a:xfrm>
           <a:prstGeom prst="line">
@@ -5148,8 +5150,8 @@
         </p:nvSpPr>
         <p:spPr>
           <a:xfrm>
-            <a:off x="663476" y="2129135"/>
-            <a:ext cx="0" cy="1812280"/>
+            <a:off x="663476" y="1846064"/>
+            <a:ext cx="0" cy="2429173"/>
           </a:xfrm>
           <a:prstGeom prst="line">
             <a:avLst/>
@@ -5179,8 +5181,8 @@
         </p:blipFill>
         <p:spPr>
           <a:xfrm>
-            <a:off x="945952" y="2341811"/>
-            <a:ext cx="165050" cy="165050"/>
+            <a:off x="971401" y="2084189"/>
+            <a:ext cx="190500" cy="190500"/>
           </a:xfrm>
           <a:prstGeom prst="rect">
             <a:avLst/>
@@ -5195,8 +5197,8 @@
         </p:nvSpPr>
         <p:spPr>
           <a:xfrm>
-            <a:off x="1187202" y="2357586"/>
-            <a:ext cx="498830" cy="133350"/>
+            <a:off x="1238101" y="2103239"/>
+            <a:ext cx="581867" cy="152400"/>
           </a:xfrm>
           <a:prstGeom prst="rect">
             <a:avLst/>
@@ -5212,7 +5214,7 @@
               <a:buNone/>
             </a:pPr>
             <a:r>
-              <a:rPr lang="en-US" sz="900" b="1" dirty="0">
+              <a:rPr lang="en-US" sz="1050" b="1" dirty="0">
                 <a:solidFill>
                   <a:srgbClr val="8250DF"/>
                 </a:solidFill>
@@ -5222,7 +5224,7 @@
               </a:rPr>
               <a:t>PROMPT</a:t>
             </a:r>
-            <a:endParaRPr lang="en-US" sz="900" dirty="0"/>
+            <a:endParaRPr lang="en-US" sz="1050" dirty="0"/>
           </a:p>
         </p:txBody>
       </p:sp>
@@ -5234,8 +5236,8 @@
         </p:nvSpPr>
         <p:spPr>
           <a:xfrm>
-            <a:off x="945952" y="2621012"/>
-            <a:ext cx="7445413" cy="1082278"/>
+            <a:off x="971401" y="2388840"/>
+            <a:ext cx="7393496" cy="1622971"/>
           </a:xfrm>
           <a:prstGeom prst="rect">
             <a:avLst/>
@@ -5249,12 +5251,12 @@
           <a:p>
             <a:pPr algn="l" indent="0" marL="0">
               <a:lnSpc>
-                <a:spcPts val="2130"/>
+                <a:spcPts val="2556"/>
               </a:lnSpc>
               <a:buNone/>
             </a:pPr>
             <a:r>
-              <a:rPr lang="en-US" sz="1500" dirty="0">
+              <a:rPr lang="en-US" sz="1800" dirty="0">
                 <a:solidFill>
                   <a:srgbClr val="1F2328"/>
                 </a:solidFill>
@@ -5266,12 +5268,12 @@
             </a:r>
             <a:pPr algn="l" indent="0" marL="0">
               <a:lnSpc>
-                <a:spcPts val="2130"/>
+                <a:spcPts val="2556"/>
               </a:lnSpc>
               <a:buNone/>
             </a:pPr>
             <a:r>
-              <a:rPr lang="en-US" sz="1500" b="1" dirty="0">
+              <a:rPr lang="en-US" sz="1800" b="1" dirty="0">
                 <a:solidFill>
                   <a:srgbClr val="1F2328"/>
                 </a:solidFill>
@@ -5283,12 +5285,12 @@
             </a:r>
             <a:pPr algn="l" indent="0" marL="0">
               <a:lnSpc>
-                <a:spcPts val="2130"/>
+                <a:spcPts val="2556"/>
               </a:lnSpc>
               <a:buNone/>
             </a:pPr>
             <a:r>
-              <a:rPr lang="en-US" sz="1500" dirty="0">
+              <a:rPr lang="en-US" sz="1800" dirty="0">
                 <a:solidFill>
                   <a:srgbClr val="1F2328"/>
                 </a:solidFill>
@@ -5300,12 +5302,12 @@
             </a:r>
             <a:pPr algn="l" indent="0" marL="0">
               <a:lnSpc>
-                <a:spcPts val="2130"/>
+                <a:spcPts val="2556"/>
               </a:lnSpc>
               <a:buNone/>
             </a:pPr>
             <a:r>
-              <a:rPr lang="en-US" sz="1500" b="1" dirty="0">
+              <a:rPr lang="en-US" sz="1800" b="1" dirty="0">
                 <a:solidFill>
                   <a:srgbClr val="1F2328"/>
                 </a:solidFill>
@@ -5315,7 +5317,7 @@
               </a:rPr>
               <a:t>don't generate any infrastructure yet.</a:t>
             </a:r>
-            <a:endParaRPr lang="en-US" sz="1500" dirty="0"/>
+            <a:endParaRPr lang="en-US" sz="1800" dirty="0"/>
           </a:p>
         </p:txBody>
       </p:sp>
@@ -5359,12 +5361,12 @@
         </p:nvSpPr>
         <p:spPr>
           <a:xfrm>
-            <a:off x="7689800" y="152400"/>
-            <a:ext cx="870049" cy="266700"/>
+            <a:off x="7596187" y="152400"/>
+            <a:ext cx="963662" cy="279350"/>
           </a:xfrm>
           <a:prstGeom prst="roundRect">
             <a:avLst>
-              <a:gd name="adj" fmla="val 23810"/>
+              <a:gd name="adj" fmla="val 22731"/>
             </a:avLst>
           </a:prstGeom>
           <a:solidFill>
@@ -5391,8 +5393,8 @@
         </p:nvSpPr>
         <p:spPr>
           <a:xfrm>
-            <a:off x="7810589" y="219075"/>
-            <a:ext cx="628471" cy="133350"/>
+            <a:off x="7728944" y="220563"/>
+            <a:ext cx="698150" cy="142875"/>
           </a:xfrm>
           <a:prstGeom prst="rect">
             <a:avLst/>
@@ -5408,7 +5410,7 @@
               <a:buNone/>
             </a:pPr>
             <a:r>
-              <a:rPr lang="en-US" sz="900" b="1" dirty="0">
+              <a:rPr lang="en-US" sz="1000" b="1" dirty="0">
                 <a:solidFill>
                   <a:srgbClr val="FFFFFF"/>
                 </a:solidFill>
@@ -5418,7 +5420,7 @@
               </a:rPr>
               <a:t>SUPERSET</a:t>
             </a:r>
-            <a:endParaRPr lang="en-US" sz="900" dirty="0"/>
+            <a:endParaRPr lang="en-US" sz="1000" dirty="0"/>
           </a:p>
         </p:txBody>
       </p:sp>
@@ -5455,7 +5457,7 @@
         <p:spPr>
           <a:xfrm>
             <a:off x="482501" y="330101"/>
-            <a:ext cx="7772400" cy="142875"/>
+            <a:ext cx="8342275" cy="152400"/>
           </a:xfrm>
           <a:prstGeom prst="rect">
             <a:avLst/>
@@ -5471,7 +5473,7 @@
               <a:buNone/>
             </a:pPr>
             <a:r>
-              <a:rPr lang="en-US" sz="1000" b="1" dirty="0">
+              <a:rPr lang="en-US" sz="1100" b="1" dirty="0">
                 <a:solidFill>
                   <a:srgbClr val="8250DF"/>
                 </a:solidFill>
@@ -5481,7 +5483,7 @@
               </a:rPr>
               <a:t>GREEN</a:t>
             </a:r>
-            <a:endParaRPr lang="en-US" sz="1000" dirty="0"/>
+            <a:endParaRPr lang="en-US" sz="1100" dirty="0"/>
           </a:p>
         </p:txBody>
       </p:sp>
@@ -5493,8 +5495,8 @@
         </p:nvSpPr>
         <p:spPr>
           <a:xfrm>
-            <a:off x="482501" y="523726"/>
-            <a:ext cx="7772400" cy="393650"/>
+            <a:off x="482501" y="533251"/>
+            <a:ext cx="8342275" cy="419100"/>
           </a:xfrm>
           <a:prstGeom prst="rect">
             <a:avLst/>
@@ -5508,7 +5510,7 @@
           <a:p>
             <a:pPr algn="l" indent="0" marL="0">
               <a:lnSpc>
-                <a:spcPts val="3100"/>
+                <a:spcPts val="3300"/>
               </a:lnSpc>
               <a:spcBef>
                 <a:spcPts val="400"/>
@@ -5516,7 +5518,7 @@
               <a:buNone/>
             </a:pPr>
             <a:r>
-              <a:rPr lang="en-US" sz="2600" b="1" dirty="0">
+              <a:rPr lang="en-US" sz="2800" b="1" dirty="0">
                 <a:solidFill>
                   <a:srgbClr val="1F2328"/>
                 </a:solidFill>
@@ -5526,7 +5528,7 @@
               </a:rPr>
               <a:t>Generate until the gate passes</a:t>
             </a:r>
-            <a:endParaRPr lang="en-US" sz="2600" dirty="0"/>
+            <a:endParaRPr lang="en-US" sz="2800" dirty="0"/>
           </a:p>
         </p:txBody>
       </p:sp>
@@ -5538,12 +5540,12 @@
         </p:nvSpPr>
         <p:spPr>
           <a:xfrm>
-            <a:off x="634901" y="2067818"/>
-            <a:ext cx="7873901" cy="1934766"/>
+            <a:off x="634901" y="1846064"/>
+            <a:ext cx="7873901" cy="2429173"/>
           </a:xfrm>
           <a:prstGeom prst="roundRect">
             <a:avLst>
-              <a:gd name="adj" fmla="val 5251"/>
+              <a:gd name="adj" fmla="val 4183"/>
             </a:avLst>
           </a:prstGeom>
           <a:solidFill>
@@ -5577,7 +5579,7 @@
         </p:nvSpPr>
         <p:spPr>
           <a:xfrm>
-            <a:off x="634901" y="2072580"/>
+            <a:off x="634901" y="1850827"/>
             <a:ext cx="7873901" cy="0"/>
           </a:xfrm>
           <a:prstGeom prst="line">
@@ -5600,8 +5602,8 @@
         </p:nvSpPr>
         <p:spPr>
           <a:xfrm>
-            <a:off x="8504039" y="2067818"/>
-            <a:ext cx="0" cy="1934766"/>
+            <a:off x="8504039" y="1846064"/>
+            <a:ext cx="0" cy="2429173"/>
           </a:xfrm>
           <a:prstGeom prst="line">
             <a:avLst/>
@@ -5623,7 +5625,7 @@
         </p:nvSpPr>
         <p:spPr>
           <a:xfrm>
-            <a:off x="634901" y="3997821"/>
+            <a:off x="634901" y="4270474"/>
             <a:ext cx="7873901" cy="0"/>
           </a:xfrm>
           <a:prstGeom prst="line">
@@ -5646,8 +5648,8 @@
         </p:nvSpPr>
         <p:spPr>
           <a:xfrm>
-            <a:off x="663476" y="2067818"/>
-            <a:ext cx="0" cy="1934766"/>
+            <a:off x="663476" y="1846064"/>
+            <a:ext cx="0" cy="2429173"/>
           </a:xfrm>
           <a:prstGeom prst="line">
             <a:avLst/>
@@ -5677,8 +5679,8 @@
         </p:blipFill>
         <p:spPr>
           <a:xfrm>
-            <a:off x="945952" y="2280493"/>
-            <a:ext cx="165050" cy="165050"/>
+            <a:off x="971401" y="2084189"/>
+            <a:ext cx="190500" cy="190500"/>
           </a:xfrm>
           <a:prstGeom prst="rect">
             <a:avLst/>
@@ -5693,8 +5695,8 @@
         </p:nvSpPr>
         <p:spPr>
           <a:xfrm>
-            <a:off x="1187202" y="2296269"/>
-            <a:ext cx="1220054" cy="133350"/>
+            <a:off x="1238101" y="2103239"/>
+            <a:ext cx="1423169" cy="152400"/>
           </a:xfrm>
           <a:prstGeom prst="rect">
             <a:avLst/>
@@ -5710,7 +5712,7 @@
               <a:buNone/>
             </a:pPr>
             <a:r>
-              <a:rPr lang="en-US" sz="900" dirty="0">
+              <a:rPr lang="en-US" sz="1050" dirty="0">
                 <a:solidFill>
                   <a:srgbClr val="8250DF"/>
                 </a:solidFill>
@@ -5724,7 +5726,7 @@
               <a:buNone/>
             </a:pPr>
             <a:r>
-              <a:rPr lang="en-US" sz="900" b="1" dirty="0">
+              <a:rPr lang="en-US" sz="1050" b="1" dirty="0">
                 <a:solidFill>
                   <a:srgbClr val="818B98"/>
                 </a:solidFill>
@@ -5734,7 +5736,7 @@
               </a:rPr>
               <a:t> · ABRIDGED</a:t>
             </a:r>
-            <a:endParaRPr lang="en-US" sz="900" dirty="0"/>
+            <a:endParaRPr lang="en-US" sz="1050" dirty="0"/>
           </a:p>
         </p:txBody>
       </p:sp>
@@ -5746,8 +5748,8 @@
         </p:nvSpPr>
         <p:spPr>
           <a:xfrm>
-            <a:off x="945952" y="2547045"/>
-            <a:ext cx="7445413" cy="1217414"/>
+            <a:off x="971401" y="2388840"/>
+            <a:ext cx="7393496" cy="1622971"/>
           </a:xfrm>
           <a:prstGeom prst="rect">
             <a:avLst/>
@@ -5761,12 +5763,12 @@
           <a:p>
             <a:pPr algn="l" indent="0" marL="0">
               <a:lnSpc>
-                <a:spcPts val="1917"/>
+                <a:spcPts val="2556"/>
               </a:lnSpc>
               <a:buNone/>
             </a:pPr>
             <a:r>
-              <a:rPr lang="en-US" sz="1350" dirty="0">
+              <a:rPr lang="en-US" sz="1800" dirty="0">
                 <a:solidFill>
                   <a:srgbClr val="1F2328"/>
                 </a:solidFill>
@@ -5778,12 +5780,12 @@
             </a:r>
             <a:pPr algn="l" indent="0" marL="0">
               <a:lnSpc>
-                <a:spcPts val="1917"/>
+                <a:spcPts val="2556"/>
               </a:lnSpc>
               <a:buNone/>
             </a:pPr>
             <a:r>
-              <a:rPr lang="en-US" sz="1350" b="1" dirty="0">
+              <a:rPr lang="en-US" sz="1800" b="1" dirty="0">
                 <a:solidFill>
                   <a:srgbClr val="1F2328"/>
                 </a:solidFill>
@@ -5795,12 +5797,12 @@
             </a:r>
             <a:pPr algn="l" indent="0" marL="0">
               <a:lnSpc>
-                <a:spcPts val="1917"/>
+                <a:spcPts val="2556"/>
               </a:lnSpc>
               <a:buNone/>
             </a:pPr>
             <a:r>
-              <a:rPr lang="en-US" sz="1350" dirty="0">
+              <a:rPr lang="en-US" sz="1800" dirty="0">
                 <a:solidFill>
                   <a:srgbClr val="1F2328"/>
                 </a:solidFill>
@@ -5808,16 +5810,16 @@
                 <a:ea typeface="Arial" pitchFamily="34" charset="-122"/>
                 <a:cs typeface="Arial" pitchFamily="34" charset="-120"/>
               </a:rPr>
-              <a:t> … The hook must attach the Kubernetes manifests to </a:t>
+              <a:t> … </a:t>
             </a:r>
             <a:pPr algn="l" indent="0" marL="0">
               <a:lnSpc>
-                <a:spcPts val="1917"/>
+                <a:spcPts val="2556"/>
               </a:lnSpc>
               <a:buNone/>
             </a:pPr>
             <a:r>
-              <a:rPr lang="en-US" sz="1350" b="1" dirty="0">
+              <a:rPr lang="en-US" sz="1800" b="1" dirty="0">
                 <a:solidFill>
                   <a:srgbClr val="1F2328"/>
                 </a:solidFill>
@@ -5825,43 +5827,9 @@
                 <a:ea typeface="Arial" pitchFamily="34" charset="-122"/>
                 <a:cs typeface="Arial" pitchFamily="34" charset="-120"/>
               </a:rPr>
-              <a:t>az aks command invoke</a:t>
-            </a:r>
-            <a:pPr algn="l" indent="0" marL="0">
-              <a:lnSpc>
-                <a:spcPts val="1917"/>
-              </a:lnSpc>
-              <a:buNone/>
-            </a:pPr>
-            <a:r>
-              <a:rPr lang="en-US" sz="1350" dirty="0">
-                <a:solidFill>
-                  <a:srgbClr val="1F2328"/>
-                </a:solidFill>
-                <a:latin typeface="Arial" pitchFamily="34" charset="0"/>
-                <a:ea typeface="Arial" pitchFamily="34" charset="-122"/>
-                <a:cs typeface="Arial" pitchFamily="34" charset="-120"/>
-              </a:rPr>
-              <a:t>, run Helm and kubectl inside Azure … without requiring those tools on the host. … Run azd provision --preview … </a:t>
-            </a:r>
-            <a:pPr algn="l" indent="0" marL="0">
-              <a:lnSpc>
-                <a:spcPts val="1917"/>
-              </a:lnSpc>
-              <a:buNone/>
-            </a:pPr>
-            <a:r>
-              <a:rPr lang="en-US" sz="1350" b="1" dirty="0">
-                <a:solidFill>
-                  <a:srgbClr val="1F2328"/>
-                </a:solidFill>
-                <a:latin typeface="Arial" pitchFamily="34" charset="0"/>
-                <a:ea typeface="Arial" pitchFamily="34" charset="-122"/>
-                <a:cs typeface="Arial" pitchFamily="34" charset="-120"/>
-              </a:rPr>
               <a:t>Don't run azd up.</a:t>
             </a:r>
-            <a:endParaRPr lang="en-US" sz="1350" dirty="0"/>
+            <a:endParaRPr lang="en-US" sz="1800" dirty="0"/>
           </a:p>
         </p:txBody>
       </p:sp>
@@ -5905,12 +5873,12 @@
         </p:nvSpPr>
         <p:spPr>
           <a:xfrm>
-            <a:off x="7689800" y="152400"/>
-            <a:ext cx="870049" cy="266700"/>
+            <a:off x="7596187" y="152400"/>
+            <a:ext cx="963662" cy="279350"/>
           </a:xfrm>
           <a:prstGeom prst="roundRect">
             <a:avLst>
-              <a:gd name="adj" fmla="val 23810"/>
+              <a:gd name="adj" fmla="val 22731"/>
             </a:avLst>
           </a:prstGeom>
           <a:solidFill>
@@ -5937,8 +5905,8 @@
         </p:nvSpPr>
         <p:spPr>
           <a:xfrm>
-            <a:off x="7810589" y="219075"/>
-            <a:ext cx="628471" cy="133350"/>
+            <a:off x="7728944" y="220563"/>
+            <a:ext cx="698150" cy="142875"/>
           </a:xfrm>
           <a:prstGeom prst="rect">
             <a:avLst/>
@@ -5954,7 +5922,7 @@
               <a:buNone/>
             </a:pPr>
             <a:r>
-              <a:rPr lang="en-US" sz="900" b="1" dirty="0">
+              <a:rPr lang="en-US" sz="1000" b="1" dirty="0">
                 <a:solidFill>
                   <a:srgbClr val="FFFFFF"/>
                 </a:solidFill>
@@ -5964,7 +5932,7 @@
               </a:rPr>
               <a:t>SUPERSET</a:t>
             </a:r>
-            <a:endParaRPr lang="en-US" sz="900" dirty="0"/>
+            <a:endParaRPr lang="en-US" sz="1000" dirty="0"/>
           </a:p>
         </p:txBody>
       </p:sp>
@@ -6001,7 +5969,7 @@
         <p:spPr>
           <a:xfrm>
             <a:off x="482501" y="330101"/>
-            <a:ext cx="7772400" cy="142875"/>
+            <a:ext cx="8342275" cy="152400"/>
           </a:xfrm>
           <a:prstGeom prst="rect">
             <a:avLst/>
@@ -6017,7 +5985,7 @@
               <a:buNone/>
             </a:pPr>
             <a:r>
-              <a:rPr lang="en-US" sz="1000" b="1" dirty="0">
+              <a:rPr lang="en-US" sz="1100" b="1" dirty="0">
                 <a:solidFill>
                   <a:srgbClr val="8250DF"/>
                 </a:solidFill>
@@ -6027,7 +5995,7 @@
               </a:rPr>
               <a:t>ARCHITECTURE</a:t>
             </a:r>
-            <a:endParaRPr lang="en-US" sz="1000" dirty="0"/>
+            <a:endParaRPr lang="en-US" sz="1100" dirty="0"/>
           </a:p>
         </p:txBody>
       </p:sp>
@@ -6039,8 +6007,8 @@
         </p:nvSpPr>
         <p:spPr>
           <a:xfrm>
-            <a:off x="482501" y="523726"/>
-            <a:ext cx="7772400" cy="393650"/>
+            <a:off x="482501" y="533251"/>
+            <a:ext cx="8342275" cy="419100"/>
           </a:xfrm>
           <a:prstGeom prst="rect">
             <a:avLst/>
@@ -6054,7 +6022,7 @@
           <a:p>
             <a:pPr algn="l" indent="0" marL="0">
               <a:lnSpc>
-                <a:spcPts val="3100"/>
+                <a:spcPts val="3300"/>
               </a:lnSpc>
               <a:spcBef>
                 <a:spcPts val="400"/>
@@ -6062,7 +6030,7 @@
               <a:buNone/>
             </a:pPr>
             <a:r>
-              <a:rPr lang="en-US" sz="2600" b="1" dirty="0">
+              <a:rPr lang="en-US" sz="2800" b="1" dirty="0">
                 <a:solidFill>
                   <a:srgbClr val="1F2328"/>
                 </a:solidFill>
@@ -6072,7 +6040,7 @@
               </a:rPr>
               <a:t>What azd creates</a:t>
             </a:r>
-            <a:endParaRPr lang="en-US" sz="2600" dirty="0"/>
+            <a:endParaRPr lang="en-US" sz="2800" dirty="0"/>
           </a:p>
         </p:txBody>
       </p:sp>
@@ -6084,12 +6052,12 @@
         </p:nvSpPr>
         <p:spPr>
           <a:xfrm>
-            <a:off x="346472" y="2479625"/>
-            <a:ext cx="1066800" cy="1060252"/>
+            <a:off x="562124" y="2047875"/>
+            <a:ext cx="1574750" cy="1288852"/>
           </a:xfrm>
           <a:prstGeom prst="roundRect">
             <a:avLst>
-              <a:gd name="adj" fmla="val 9583"/>
+              <a:gd name="adj" fmla="val 7883"/>
             </a:avLst>
           </a:prstGeom>
           <a:solidFill>
@@ -6120,12 +6088,12 @@
         </p:nvSpPr>
         <p:spPr>
           <a:xfrm>
-            <a:off x="689372" y="2603450"/>
-            <a:ext cx="381000" cy="381000"/>
+            <a:off x="1120825" y="2197001"/>
+            <a:ext cx="457200" cy="457200"/>
           </a:xfrm>
           <a:prstGeom prst="roundRect">
             <a:avLst>
-              <a:gd name="adj" fmla="val 20000"/>
+              <a:gd name="adj" fmla="val 16667"/>
             </a:avLst>
           </a:prstGeom>
           <a:solidFill>
@@ -6146,7 +6114,7 @@
       </p:sp>
       <p:pic>
         <p:nvPicPr>
-          <p:cNvPr id="9" name="Image 1" descr="/Users/danwahlin/.copilot/session-state/a2da67da-2d7a-45f2-aa6a-2a42a7b82a72/files/build/icons/GoPerson-8250DF.png">    </p:cNvPr>
+          <p:cNvPr id="9" name="Image 1" descr="/Users/danwahlin/.copilot/session-state/a2da67da-2d7a-45f2-aa6a-2a42a7b82a72/files/build/icons/GoGlobe-8250DF.png">    </p:cNvPr>
           <p:cNvPicPr>
             <a:picLocks noChangeAspect="1"/>
           </p:cNvPicPr>
@@ -6160,8 +6128,8 @@
         </p:blipFill>
         <p:spPr>
           <a:xfrm>
-            <a:off x="771971" y="2686050"/>
-            <a:ext cx="215801" cy="215801"/>
+            <a:off x="1222474" y="2298650"/>
+            <a:ext cx="253901" cy="253901"/>
           </a:xfrm>
           <a:prstGeom prst="rect">
             <a:avLst/>
@@ -6176,8 +6144,8 @@
         </p:nvSpPr>
         <p:spPr>
           <a:xfrm>
-            <a:off x="756455" y="3047851"/>
-            <a:ext cx="246834" cy="165050"/>
+            <a:off x="769227" y="2730401"/>
+            <a:ext cx="1160395" cy="203150"/>
           </a:xfrm>
           <a:prstGeom prst="rect">
             <a:avLst/>
@@ -6191,12 +6159,12 @@
           <a:p>
             <a:pPr algn="ctr" indent="0" marL="0">
               <a:lnSpc>
-                <a:spcPts val="1300"/>
+                <a:spcPts val="1600"/>
               </a:lnSpc>
               <a:buNone/>
             </a:pPr>
             <a:r>
-              <a:rPr lang="en-US" sz="1050" b="1" dirty="0">
+              <a:rPr lang="en-US" sz="1300" b="1" dirty="0">
                 <a:solidFill>
                   <a:srgbClr val="1F2328"/>
                 </a:solidFill>
@@ -6204,9 +6172,9 @@
                 <a:ea typeface="Arial" pitchFamily="34" charset="-122"/>
                 <a:cs typeface="Arial" pitchFamily="34" charset="-120"/>
               </a:rPr>
-              <a:t>You</a:t>
-            </a:r>
-            <a:endParaRPr lang="en-US" sz="1050" dirty="0"/>
+              <a:t>Load Balancer</a:t>
+            </a:r>
+            <a:endParaRPr lang="en-US" sz="1300" dirty="0"/>
           </a:p>
         </p:txBody>
       </p:sp>
@@ -6218,8 +6186,8 @@
         </p:nvSpPr>
         <p:spPr>
           <a:xfrm>
-            <a:off x="677972" y="3276302"/>
-            <a:ext cx="403800" cy="139750"/>
+            <a:off x="890214" y="3009751"/>
+            <a:ext cx="918570" cy="177850"/>
           </a:xfrm>
           <a:prstGeom prst="rect">
             <a:avLst/>
@@ -6233,12 +6201,12 @@
           <a:p>
             <a:pPr algn="ctr" indent="0" marL="0">
               <a:lnSpc>
-                <a:spcPts val="1100"/>
+                <a:spcPts val="1400"/>
               </a:lnSpc>
               <a:buNone/>
             </a:pPr>
             <a:r>
-              <a:rPr lang="en-US" sz="850" dirty="0">
+              <a:rPr lang="en-US" sz="1100" dirty="0">
                 <a:solidFill>
                   <a:srgbClr val="59636E"/>
                 </a:solidFill>
@@ -6246,9 +6214,9 @@
                 <a:ea typeface="Arial" pitchFamily="34" charset="-122"/>
                 <a:cs typeface="Arial" pitchFamily="34" charset="-120"/>
               </a:rPr>
-              <a:t>Browser</a:t>
-            </a:r>
-            <a:endParaRPr lang="en-US" sz="850" dirty="0"/>
+              <a:t>Probe /healthz</a:t>
+            </a:r>
+            <a:endParaRPr lang="en-US" sz="1100" dirty="0"/>
           </a:p>
         </p:txBody>
       </p:sp>
@@ -6260,8 +6228,8 @@
         </p:nvSpPr>
         <p:spPr>
           <a:xfrm>
-            <a:off x="1538040" y="2895451"/>
-            <a:ext cx="207365" cy="228600"/>
+            <a:off x="2261539" y="2565350"/>
+            <a:ext cx="233172" cy="254050"/>
           </a:xfrm>
           <a:prstGeom prst="rect">
             <a:avLst/>
@@ -6275,12 +6243,12 @@
           <a:p>
             <a:pPr algn="ctr" indent="0" marL="0">
               <a:lnSpc>
-                <a:spcPts val="1800"/>
+                <a:spcPts val="2000"/>
               </a:lnSpc>
               <a:buNone/>
             </a:pPr>
             <a:r>
-              <a:rPr lang="en-US" sz="1600" dirty="0">
+              <a:rPr lang="en-US" sz="1800" dirty="0">
                 <a:solidFill>
                   <a:srgbClr val="818B98"/>
                 </a:solidFill>
@@ -6290,7 +6258,7 @@
               </a:rPr>
               <a:t>→</a:t>
             </a:r>
-            <a:endParaRPr lang="en-US" sz="1600" dirty="0"/>
+            <a:endParaRPr lang="en-US" sz="1800" dirty="0"/>
           </a:p>
         </p:txBody>
       </p:sp>
@@ -6302,12 +6270,111 @@
         </p:nvSpPr>
         <p:spPr>
           <a:xfrm>
-            <a:off x="1870323" y="2479625"/>
-            <a:ext cx="1371600" cy="1060252"/>
+            <a:off x="2619375" y="1765399"/>
+            <a:ext cx="3777853" cy="1853952"/>
           </a:xfrm>
           <a:prstGeom prst="roundRect">
             <a:avLst>
-              <a:gd name="adj" fmla="val 9583"/>
+              <a:gd name="adj" fmla="val 6850"/>
+            </a:avLst>
+          </a:prstGeom>
+          <a:solidFill>
+            <a:srgbClr val="DDF4FF"/>
+          </a:solidFill>
+          <a:ln w="9525">
+            <a:solidFill>
+              <a:srgbClr val="9CD7FF"/>
+            </a:solidFill>
+          </a:ln>
+        </p:spPr>
+        <p:txBody>
+          <a:bodyPr wrap="square" rtlCol="0" anchor="ctr"/>
+          <a:lstStyle/>
+          <a:p>
+            <a:pPr indent="0" marL="0">
+              <a:buNone/>
+            </a:pPr>
+            <a:endParaRPr lang="en-US" dirty="0"/>
+          </a:p>
+        </p:txBody>
+      </p:sp>
+      <p:pic>
+        <p:nvPicPr>
+          <p:cNvPr id="14" name="Image 2" descr="/Users/danwahlin/.copilot/session-state/a2da67da-2d7a-45f2-aa6a-2a42a7b82a72/files/build/icons/GoCloud-0969DA.png">    </p:cNvPr>
+          <p:cNvPicPr>
+            <a:picLocks noChangeAspect="1"/>
+          </p:cNvPicPr>
+          <p:nvPr/>
+        </p:nvPicPr>
+        <p:blipFill>
+          <a:blip r:embed="rId3"/>
+          <a:stretch>
+            <a:fillRect/>
+          </a:stretch>
+        </p:blipFill>
+        <p:spPr>
+          <a:xfrm>
+            <a:off x="2781300" y="1927324"/>
+            <a:ext cx="165050" cy="165050"/>
+          </a:xfrm>
+          <a:prstGeom prst="rect">
+            <a:avLst/>
+          </a:prstGeom>
+        </p:spPr>
+      </p:pic>
+      <p:sp>
+        <p:nvSpPr>
+          <p:cNvPr id="15" name="Text 10"/>
+          <p:cNvSpPr/>
+          <p:nvPr/>
+        </p:nvSpPr>
+        <p:spPr>
+          <a:xfrm>
+            <a:off x="3009751" y="1938337"/>
+            <a:ext cx="957129" cy="142875"/>
+          </a:xfrm>
+          <a:prstGeom prst="rect">
+            <a:avLst/>
+          </a:prstGeom>
+          <a:noFill/>
+          <a:ln/>
+        </p:spPr>
+        <p:txBody>
+          <a:bodyPr wrap="square" lIns="0" tIns="0" rIns="0" bIns="0" rtlCol="0" anchor="t"/>
+          <a:lstStyle/>
+          <a:p>
+            <a:pPr algn="l" indent="0" marL="0">
+              <a:buNone/>
+            </a:pPr>
+            <a:r>
+              <a:rPr lang="en-US" sz="1000" b="1" dirty="0">
+                <a:solidFill>
+                  <a:srgbClr val="0969DA"/>
+                </a:solidFill>
+                <a:latin typeface="Arial" pitchFamily="34" charset="0"/>
+                <a:ea typeface="Arial" pitchFamily="34" charset="-122"/>
+                <a:cs typeface="Arial" pitchFamily="34" charset="-120"/>
+              </a:rPr>
+              <a:t>AKS · 2 NODES</a:t>
+            </a:r>
+            <a:endParaRPr lang="en-US" sz="1000" dirty="0"/>
+          </a:p>
+        </p:txBody>
+      </p:sp>
+      <p:sp>
+        <p:nvSpPr>
+          <p:cNvPr id="16" name="Text 11"/>
+          <p:cNvSpPr/>
+          <p:nvPr/>
+        </p:nvSpPr>
+        <p:spPr>
+          <a:xfrm>
+            <a:off x="2781300" y="2168575"/>
+            <a:ext cx="1498550" cy="1288852"/>
+          </a:xfrm>
+          <a:prstGeom prst="roundRect">
+            <a:avLst>
+              <a:gd name="adj" fmla="val 7883"/>
             </a:avLst>
           </a:prstGeom>
           <a:solidFill>
@@ -6332,18 +6399,18 @@
       </p:sp>
       <p:sp>
         <p:nvSpPr>
-          <p:cNvPr id="14" name="Text 10"/>
-          <p:cNvSpPr/>
-          <p:nvPr/>
-        </p:nvSpPr>
-        <p:spPr>
-          <a:xfrm>
-            <a:off x="2365623" y="2603450"/>
-            <a:ext cx="381000" cy="381000"/>
+          <p:cNvPr id="17" name="Text 12"/>
+          <p:cNvSpPr/>
+          <p:nvPr/>
+        </p:nvSpPr>
+        <p:spPr>
+          <a:xfrm>
+            <a:off x="3301901" y="2317700"/>
+            <a:ext cx="457200" cy="457200"/>
           </a:xfrm>
           <a:prstGeom prst="roundRect">
             <a:avLst>
-              <a:gd name="adj" fmla="val 20000"/>
+              <a:gd name="adj" fmla="val 16667"/>
             </a:avLst>
           </a:prstGeom>
           <a:solidFill>
@@ -6364,193 +6431,7 @@
       </p:sp>
       <p:pic>
         <p:nvPicPr>
-          <p:cNvPr id="15" name="Image 2" descr="/Users/danwahlin/.copilot/session-state/a2da67da-2d7a-45f2-aa6a-2a42a7b82a72/files/build/icons/GoGlobe-0969DA.png">    </p:cNvPr>
-          <p:cNvPicPr>
-            <a:picLocks noChangeAspect="1"/>
-          </p:cNvPicPr>
-          <p:nvPr/>
-        </p:nvPicPr>
-        <p:blipFill>
-          <a:blip r:embed="rId3"/>
-          <a:stretch>
-            <a:fillRect/>
-          </a:stretch>
-        </p:blipFill>
-        <p:spPr>
-          <a:xfrm>
-            <a:off x="2448223" y="2686050"/>
-            <a:ext cx="215801" cy="215801"/>
-          </a:xfrm>
-          <a:prstGeom prst="rect">
-            <a:avLst/>
-          </a:prstGeom>
-        </p:spPr>
-      </p:pic>
-      <p:sp>
-        <p:nvSpPr>
-          <p:cNvPr id="16" name="Text 11"/>
-          <p:cNvSpPr/>
-          <p:nvPr/>
-        </p:nvSpPr>
-        <p:spPr>
-          <a:xfrm>
-            <a:off x="2087352" y="3047851"/>
-            <a:ext cx="937394" cy="165050"/>
-          </a:xfrm>
-          <a:prstGeom prst="rect">
-            <a:avLst/>
-          </a:prstGeom>
-          <a:noFill/>
-          <a:ln/>
-        </p:spPr>
-        <p:txBody>
-          <a:bodyPr wrap="square" lIns="0" tIns="0" rIns="0" bIns="0" rtlCol="0" anchor="t"/>
-          <a:lstStyle/>
-          <a:p>
-            <a:pPr algn="ctr" indent="0" marL="0">
-              <a:lnSpc>
-                <a:spcPts val="1300"/>
-              </a:lnSpc>
-              <a:buNone/>
-            </a:pPr>
-            <a:r>
-              <a:rPr lang="en-US" sz="1050" b="1" dirty="0">
-                <a:solidFill>
-                  <a:srgbClr val="1F2328"/>
-                </a:solidFill>
-                <a:latin typeface="Arial" pitchFamily="34" charset="0"/>
-                <a:ea typeface="Arial" pitchFamily="34" charset="-122"/>
-                <a:cs typeface="Arial" pitchFamily="34" charset="-120"/>
-              </a:rPr>
-              <a:t>Load Balancer</a:t>
-            </a:r>
-            <a:endParaRPr lang="en-US" sz="1050" dirty="0"/>
-          </a:p>
-        </p:txBody>
-      </p:sp>
-      <p:sp>
-        <p:nvSpPr>
-          <p:cNvPr id="17" name="Text 12"/>
-          <p:cNvSpPr/>
-          <p:nvPr/>
-        </p:nvSpPr>
-        <p:spPr>
-          <a:xfrm>
-            <a:off x="2207276" y="3276302"/>
-            <a:ext cx="697694" cy="139750"/>
-          </a:xfrm>
-          <a:prstGeom prst="rect">
-            <a:avLst/>
-          </a:prstGeom>
-          <a:noFill/>
-          <a:ln/>
-        </p:spPr>
-        <p:txBody>
-          <a:bodyPr wrap="square" lIns="0" tIns="0" rIns="0" bIns="0" rtlCol="0" anchor="t"/>
-          <a:lstStyle/>
-          <a:p>
-            <a:pPr algn="ctr" indent="0" marL="0">
-              <a:lnSpc>
-                <a:spcPts val="1100"/>
-              </a:lnSpc>
-              <a:buNone/>
-            </a:pPr>
-            <a:r>
-              <a:rPr lang="en-US" sz="850" dirty="0">
-                <a:solidFill>
-                  <a:srgbClr val="59636E"/>
-                </a:solidFill>
-                <a:latin typeface="Arial" pitchFamily="34" charset="0"/>
-                <a:ea typeface="Arial" pitchFamily="34" charset="-122"/>
-                <a:cs typeface="Arial" pitchFamily="34" charset="-120"/>
-              </a:rPr>
-              <a:t>probe /healthz</a:t>
-            </a:r>
-            <a:endParaRPr lang="en-US" sz="850" dirty="0"/>
-          </a:p>
-        </p:txBody>
-      </p:sp>
-      <p:sp>
-        <p:nvSpPr>
-          <p:cNvPr id="18" name="Text 13"/>
-          <p:cNvSpPr/>
-          <p:nvPr/>
-        </p:nvSpPr>
-        <p:spPr>
-          <a:xfrm>
-            <a:off x="3366692" y="2895451"/>
-            <a:ext cx="207365" cy="228600"/>
-          </a:xfrm>
-          <a:prstGeom prst="rect">
-            <a:avLst/>
-          </a:prstGeom>
-          <a:noFill/>
-          <a:ln/>
-        </p:spPr>
-        <p:txBody>
-          <a:bodyPr wrap="square" lIns="0" tIns="0" rIns="0" bIns="0" rtlCol="0" anchor="t"/>
-          <a:lstStyle/>
-          <a:p>
-            <a:pPr algn="ctr" indent="0" marL="0">
-              <a:lnSpc>
-                <a:spcPts val="1800"/>
-              </a:lnSpc>
-              <a:buNone/>
-            </a:pPr>
-            <a:r>
-              <a:rPr lang="en-US" sz="1600" dirty="0">
-                <a:solidFill>
-                  <a:srgbClr val="818B98"/>
-                </a:solidFill>
-                <a:latin typeface="Arial" pitchFamily="34" charset="0"/>
-                <a:ea typeface="Arial" pitchFamily="34" charset="-122"/>
-                <a:cs typeface="Arial" pitchFamily="34" charset="-120"/>
-              </a:rPr>
-              <a:t>→</a:t>
-            </a:r>
-            <a:endParaRPr lang="en-US" sz="1600" dirty="0"/>
-          </a:p>
-        </p:txBody>
-      </p:sp>
-      <p:sp>
-        <p:nvSpPr>
-          <p:cNvPr id="19" name="Text 14"/>
-          <p:cNvSpPr/>
-          <p:nvPr/>
-        </p:nvSpPr>
-        <p:spPr>
-          <a:xfrm>
-            <a:off x="3698974" y="2209800"/>
-            <a:ext cx="3345954" cy="1599902"/>
-          </a:xfrm>
-          <a:prstGeom prst="roundRect">
-            <a:avLst>
-              <a:gd name="adj" fmla="val 7938"/>
-            </a:avLst>
-          </a:prstGeom>
-          <a:solidFill>
-            <a:srgbClr val="DDF4FF"/>
-          </a:solidFill>
-          <a:ln w="9525">
-            <a:solidFill>
-              <a:srgbClr val="9CD7FF"/>
-            </a:solidFill>
-          </a:ln>
-        </p:spPr>
-        <p:txBody>
-          <a:bodyPr wrap="square" rtlCol="0" anchor="ctr"/>
-          <a:lstStyle/>
-          <a:p>
-            <a:pPr indent="0" marL="0">
-              <a:buNone/>
-            </a:pPr>
-            <a:endParaRPr lang="en-US" dirty="0"/>
-          </a:p>
-        </p:txBody>
-      </p:sp>
-      <p:pic>
-        <p:nvPicPr>
-          <p:cNvPr id="20" name="Image 3" descr="/Users/danwahlin/.copilot/session-state/a2da67da-2d7a-45f2-aa6a-2a42a7b82a72/files/build/icons/GoCloud-0969DA.png">    </p:cNvPr>
+          <p:cNvPr id="18" name="Image 3" descr="/Users/danwahlin/.copilot/session-state/a2da67da-2d7a-45f2-aa6a-2a42a7b82a72/files/build/icons/GoArrowSwitch-0969DA.png">    </p:cNvPr>
           <p:cNvPicPr>
             <a:picLocks noChangeAspect="1"/>
           </p:cNvPicPr>
@@ -6564,8 +6445,8 @@
         </p:blipFill>
         <p:spPr>
           <a:xfrm>
-            <a:off x="3860899" y="2371725"/>
-            <a:ext cx="139601" cy="139601"/>
+            <a:off x="3403550" y="2419350"/>
+            <a:ext cx="253901" cy="253901"/>
           </a:xfrm>
           <a:prstGeom prst="rect">
             <a:avLst/>
@@ -6574,40 +6455,127 @@
       </p:pic>
       <p:sp>
         <p:nvSpPr>
+          <p:cNvPr id="19" name="Text 13"/>
+          <p:cNvSpPr/>
+          <p:nvPr/>
+        </p:nvSpPr>
+        <p:spPr>
+          <a:xfrm>
+            <a:off x="3263930" y="2851100"/>
+            <a:ext cx="533290" cy="203150"/>
+          </a:xfrm>
+          <a:prstGeom prst="rect">
+            <a:avLst/>
+          </a:prstGeom>
+          <a:noFill/>
+          <a:ln/>
+        </p:spPr>
+        <p:txBody>
+          <a:bodyPr wrap="square" lIns="0" tIns="0" rIns="0" bIns="0" rtlCol="0" anchor="t"/>
+          <a:lstStyle/>
+          <a:p>
+            <a:pPr algn="ctr" indent="0" marL="0">
+              <a:lnSpc>
+                <a:spcPts val="1600"/>
+              </a:lnSpc>
+              <a:buNone/>
+            </a:pPr>
+            <a:r>
+              <a:rPr lang="en-US" sz="1300" b="1" dirty="0">
+                <a:solidFill>
+                  <a:srgbClr val="1F2328"/>
+                </a:solidFill>
+                <a:latin typeface="Arial" pitchFamily="34" charset="0"/>
+                <a:ea typeface="Arial" pitchFamily="34" charset="-122"/>
+                <a:cs typeface="Arial" pitchFamily="34" charset="-120"/>
+              </a:rPr>
+              <a:t>NGINX</a:t>
+            </a:r>
+            <a:endParaRPr lang="en-US" sz="1300" dirty="0"/>
+          </a:p>
+        </p:txBody>
+      </p:sp>
+      <p:sp>
+        <p:nvSpPr>
+          <p:cNvPr id="20" name="Text 14"/>
+          <p:cNvSpPr/>
+          <p:nvPr/>
+        </p:nvSpPr>
+        <p:spPr>
+          <a:xfrm>
+            <a:off x="3000246" y="3130451"/>
+            <a:ext cx="1060659" cy="177850"/>
+          </a:xfrm>
+          <a:prstGeom prst="rect">
+            <a:avLst/>
+          </a:prstGeom>
+          <a:noFill/>
+          <a:ln/>
+        </p:spPr>
+        <p:txBody>
+          <a:bodyPr wrap="square" lIns="0" tIns="0" rIns="0" bIns="0" rtlCol="0" anchor="t"/>
+          <a:lstStyle/>
+          <a:p>
+            <a:pPr algn="ctr" indent="0" marL="0">
+              <a:lnSpc>
+                <a:spcPts val="1400"/>
+              </a:lnSpc>
+              <a:buNone/>
+            </a:pPr>
+            <a:r>
+              <a:rPr lang="en-US" sz="1100" dirty="0">
+                <a:solidFill>
+                  <a:srgbClr val="59636E"/>
+                </a:solidFill>
+                <a:latin typeface="Arial" pitchFamily="34" charset="0"/>
+                <a:ea typeface="Arial" pitchFamily="34" charset="-122"/>
+                <a:cs typeface="Arial" pitchFamily="34" charset="-120"/>
+              </a:rPr>
+              <a:t>Ingress via Helm</a:t>
+            </a:r>
+            <a:endParaRPr lang="en-US" sz="1100" dirty="0"/>
+          </a:p>
+        </p:txBody>
+      </p:sp>
+      <p:sp>
+        <p:nvSpPr>
           <p:cNvPr id="21" name="Text 15"/>
           <p:cNvSpPr/>
           <p:nvPr/>
         </p:nvSpPr>
         <p:spPr>
           <a:xfrm>
-            <a:off x="4063901" y="2384375"/>
-            <a:ext cx="813521" cy="114300"/>
-          </a:xfrm>
-          <a:prstGeom prst="rect">
-            <a:avLst/>
-          </a:prstGeom>
-          <a:noFill/>
-          <a:ln/>
-        </p:spPr>
-        <p:txBody>
-          <a:bodyPr wrap="square" lIns="0" tIns="0" rIns="0" bIns="0" rtlCol="0" anchor="t"/>
-          <a:lstStyle/>
-          <a:p>
-            <a:pPr algn="l" indent="0" marL="0">
-              <a:buNone/>
-            </a:pPr>
-            <a:r>
-              <a:rPr lang="en-US" sz="850" b="1" dirty="0">
-                <a:solidFill>
-                  <a:srgbClr val="0969DA"/>
-                </a:solidFill>
-                <a:latin typeface="Arial" pitchFamily="34" charset="0"/>
-                <a:ea typeface="Arial" pitchFamily="34" charset="-122"/>
-                <a:cs typeface="Arial" pitchFamily="34" charset="-120"/>
-              </a:rPr>
-              <a:t>AKS · 2 NODES</a:t>
-            </a:r>
-            <a:endParaRPr lang="en-US" sz="850" dirty="0"/>
+            <a:off x="4353616" y="2685901"/>
+            <a:ext cx="233172" cy="254050"/>
+          </a:xfrm>
+          <a:prstGeom prst="rect">
+            <a:avLst/>
+          </a:prstGeom>
+          <a:noFill/>
+          <a:ln/>
+        </p:spPr>
+        <p:txBody>
+          <a:bodyPr wrap="square" lIns="0" tIns="0" rIns="0" bIns="0" rtlCol="0" anchor="t"/>
+          <a:lstStyle/>
+          <a:p>
+            <a:pPr algn="ctr" indent="0" marL="0">
+              <a:lnSpc>
+                <a:spcPts val="2000"/>
+              </a:lnSpc>
+              <a:buNone/>
+            </a:pPr>
+            <a:r>
+              <a:rPr lang="en-US" sz="1800" dirty="0">
+                <a:solidFill>
+                  <a:srgbClr val="818B98"/>
+                </a:solidFill>
+                <a:latin typeface="Arial" pitchFamily="34" charset="0"/>
+                <a:ea typeface="Arial" pitchFamily="34" charset="-122"/>
+                <a:cs typeface="Arial" pitchFamily="34" charset="-120"/>
+              </a:rPr>
+              <a:t>→</a:t>
+            </a:r>
+            <a:endParaRPr lang="en-US" sz="1800" dirty="0"/>
           </a:p>
         </p:txBody>
       </p:sp>
@@ -6619,230 +6587,12 @@
         </p:nvSpPr>
         <p:spPr>
           <a:xfrm>
-            <a:off x="3860899" y="2587526"/>
-            <a:ext cx="1320701" cy="1060252"/>
+            <a:off x="4660553" y="2168575"/>
+            <a:ext cx="1574750" cy="1288852"/>
           </a:xfrm>
           <a:prstGeom prst="roundRect">
             <a:avLst>
-              <a:gd name="adj" fmla="val 9583"/>
-            </a:avLst>
-          </a:prstGeom>
-          <a:solidFill>
-            <a:srgbClr val="FFFFFF"/>
-          </a:solidFill>
-          <a:ln w="9525">
-            <a:solidFill>
-              <a:srgbClr val="9CD7FF"/>
-            </a:solidFill>
-          </a:ln>
-        </p:spPr>
-        <p:txBody>
-          <a:bodyPr wrap="square" rtlCol="0" anchor="ctr"/>
-          <a:lstStyle/>
-          <a:p>
-            <a:pPr indent="0" marL="0">
-              <a:buNone/>
-            </a:pPr>
-            <a:endParaRPr lang="en-US" dirty="0"/>
-          </a:p>
-        </p:txBody>
-      </p:sp>
-      <p:sp>
-        <p:nvSpPr>
-          <p:cNvPr id="23" name="Text 17"/>
-          <p:cNvSpPr/>
-          <p:nvPr/>
-        </p:nvSpPr>
-        <p:spPr>
-          <a:xfrm>
-            <a:off x="4330750" y="2711351"/>
-            <a:ext cx="381000" cy="381000"/>
-          </a:xfrm>
-          <a:prstGeom prst="roundRect">
-            <a:avLst>
-              <a:gd name="adj" fmla="val 20000"/>
-            </a:avLst>
-          </a:prstGeom>
-          <a:solidFill>
-            <a:srgbClr val="DDF4FF"/>
-          </a:solidFill>
-          <a:ln/>
-        </p:spPr>
-        <p:txBody>
-          <a:bodyPr wrap="square" rtlCol="0" anchor="ctr"/>
-          <a:lstStyle/>
-          <a:p>
-            <a:pPr indent="0" marL="0">
-              <a:buNone/>
-            </a:pPr>
-            <a:endParaRPr lang="en-US" dirty="0"/>
-          </a:p>
-        </p:txBody>
-      </p:sp>
-      <p:pic>
-        <p:nvPicPr>
-          <p:cNvPr id="24" name="Image 4" descr="/Users/danwahlin/.copilot/session-state/a2da67da-2d7a-45f2-aa6a-2a42a7b82a72/files/build/icons/GoArrowSwitch-0969DA.png">    </p:cNvPr>
-          <p:cNvPicPr>
-            <a:picLocks noChangeAspect="1"/>
-          </p:cNvPicPr>
-          <p:nvPr/>
-        </p:nvPicPr>
-        <p:blipFill>
-          <a:blip r:embed="rId5"/>
-          <a:stretch>
-            <a:fillRect/>
-          </a:stretch>
-        </p:blipFill>
-        <p:spPr>
-          <a:xfrm>
-            <a:off x="4413349" y="2793950"/>
-            <a:ext cx="215801" cy="215801"/>
-          </a:xfrm>
-          <a:prstGeom prst="rect">
-            <a:avLst/>
-          </a:prstGeom>
-        </p:spPr>
-      </p:pic>
-      <p:sp>
-        <p:nvSpPr>
-          <p:cNvPr id="25" name="Text 18"/>
-          <p:cNvSpPr/>
-          <p:nvPr/>
-        </p:nvSpPr>
-        <p:spPr>
-          <a:xfrm>
-            <a:off x="4045038" y="3155752"/>
-            <a:ext cx="952423" cy="165050"/>
-          </a:xfrm>
-          <a:prstGeom prst="rect">
-            <a:avLst/>
-          </a:prstGeom>
-          <a:noFill/>
-          <a:ln/>
-        </p:spPr>
-        <p:txBody>
-          <a:bodyPr wrap="square" lIns="0" tIns="0" rIns="0" bIns="0" rtlCol="0" anchor="t"/>
-          <a:lstStyle/>
-          <a:p>
-            <a:pPr algn="ctr" indent="0" marL="0">
-              <a:lnSpc>
-                <a:spcPts val="1300"/>
-              </a:lnSpc>
-              <a:buNone/>
-            </a:pPr>
-            <a:r>
-              <a:rPr lang="en-US" sz="1050" b="1" dirty="0">
-                <a:solidFill>
-                  <a:srgbClr val="1F2328"/>
-                </a:solidFill>
-                <a:latin typeface="Arial" pitchFamily="34" charset="0"/>
-                <a:ea typeface="Arial" pitchFamily="34" charset="-122"/>
-                <a:cs typeface="Arial" pitchFamily="34" charset="-120"/>
-              </a:rPr>
-              <a:t>NGINX ingress</a:t>
-            </a:r>
-            <a:endParaRPr lang="en-US" sz="1050" dirty="0"/>
-          </a:p>
-        </p:txBody>
-      </p:sp>
-      <p:sp>
-        <p:nvSpPr>
-          <p:cNvPr id="26" name="Text 19"/>
-          <p:cNvSpPr/>
-          <p:nvPr/>
-        </p:nvSpPr>
-        <p:spPr>
-          <a:xfrm>
-            <a:off x="4392673" y="3384203"/>
-            <a:ext cx="257005" cy="139750"/>
-          </a:xfrm>
-          <a:prstGeom prst="rect">
-            <a:avLst/>
-          </a:prstGeom>
-          <a:noFill/>
-          <a:ln/>
-        </p:spPr>
-        <p:txBody>
-          <a:bodyPr wrap="square" lIns="0" tIns="0" rIns="0" bIns="0" rtlCol="0" anchor="t"/>
-          <a:lstStyle/>
-          <a:p>
-            <a:pPr algn="ctr" indent="0" marL="0">
-              <a:lnSpc>
-                <a:spcPts val="1100"/>
-              </a:lnSpc>
-              <a:buNone/>
-            </a:pPr>
-            <a:r>
-              <a:rPr lang="en-US" sz="850" dirty="0">
-                <a:solidFill>
-                  <a:srgbClr val="59636E"/>
-                </a:solidFill>
-                <a:latin typeface="Arial" pitchFamily="34" charset="0"/>
-                <a:ea typeface="Arial" pitchFamily="34" charset="-122"/>
-                <a:cs typeface="Arial" pitchFamily="34" charset="-120"/>
-              </a:rPr>
-              <a:t>Helm</a:t>
-            </a:r>
-            <a:endParaRPr lang="en-US" sz="850" dirty="0"/>
-          </a:p>
-        </p:txBody>
-      </p:sp>
-      <p:sp>
-        <p:nvSpPr>
-          <p:cNvPr id="27" name="Text 20"/>
-          <p:cNvSpPr/>
-          <p:nvPr/>
-        </p:nvSpPr>
-        <p:spPr>
-          <a:xfrm>
-            <a:off x="5268269" y="3003352"/>
-            <a:ext cx="207365" cy="228600"/>
-          </a:xfrm>
-          <a:prstGeom prst="rect">
-            <a:avLst/>
-          </a:prstGeom>
-          <a:noFill/>
-          <a:ln/>
-        </p:spPr>
-        <p:txBody>
-          <a:bodyPr wrap="square" lIns="0" tIns="0" rIns="0" bIns="0" rtlCol="0" anchor="t"/>
-          <a:lstStyle/>
-          <a:p>
-            <a:pPr algn="ctr" indent="0" marL="0">
-              <a:lnSpc>
-                <a:spcPts val="1800"/>
-              </a:lnSpc>
-              <a:buNone/>
-            </a:pPr>
-            <a:r>
-              <a:rPr lang="en-US" sz="1600" dirty="0">
-                <a:solidFill>
-                  <a:srgbClr val="818B98"/>
-                </a:solidFill>
-                <a:latin typeface="Arial" pitchFamily="34" charset="0"/>
-                <a:ea typeface="Arial" pitchFamily="34" charset="-122"/>
-                <a:cs typeface="Arial" pitchFamily="34" charset="-120"/>
-              </a:rPr>
-              <a:t>→</a:t>
-            </a:r>
-            <a:endParaRPr lang="en-US" sz="1600" dirty="0"/>
-          </a:p>
-        </p:txBody>
-      </p:sp>
-      <p:sp>
-        <p:nvSpPr>
-          <p:cNvPr id="28" name="Text 21"/>
-          <p:cNvSpPr/>
-          <p:nvPr/>
-        </p:nvSpPr>
-        <p:spPr>
-          <a:xfrm>
-            <a:off x="5562302" y="2587526"/>
-            <a:ext cx="1320701" cy="1060252"/>
-          </a:xfrm>
-          <a:prstGeom prst="roundRect">
-            <a:avLst>
-              <a:gd name="adj" fmla="val 9583"/>
+              <a:gd name="adj" fmla="val 7883"/>
             </a:avLst>
           </a:prstGeom>
           <a:solidFill>
@@ -6867,18 +6617,18 @@
       </p:sp>
       <p:sp>
         <p:nvSpPr>
-          <p:cNvPr id="29" name="Text 22"/>
-          <p:cNvSpPr/>
-          <p:nvPr/>
-        </p:nvSpPr>
-        <p:spPr>
-          <a:xfrm>
-            <a:off x="6032153" y="2711351"/>
-            <a:ext cx="381000" cy="381000"/>
+          <p:cNvPr id="23" name="Text 17"/>
+          <p:cNvSpPr/>
+          <p:nvPr/>
+        </p:nvSpPr>
+        <p:spPr>
+          <a:xfrm>
+            <a:off x="5219254" y="2317700"/>
+            <a:ext cx="457200" cy="457200"/>
           </a:xfrm>
           <a:prstGeom prst="roundRect">
             <a:avLst>
-              <a:gd name="adj" fmla="val 20000"/>
+              <a:gd name="adj" fmla="val 16667"/>
             </a:avLst>
           </a:prstGeom>
           <a:solidFill>
@@ -6899,22 +6649,22 @@
       </p:sp>
       <p:pic>
         <p:nvPicPr>
-          <p:cNvPr id="30" name="Image 5" descr="/Users/danwahlin/.copilot/session-state/a2da67da-2d7a-45f2-aa6a-2a42a7b82a72/files/build/icons/GoGraph-BC4C00.png">    </p:cNvPr>
+          <p:cNvPr id="24" name="Image 4" descr="/Users/danwahlin/.copilot/session-state/a2da67da-2d7a-45f2-aa6a-2a42a7b82a72/files/build/icons/GoGraph-BC4C00.png">    </p:cNvPr>
           <p:cNvPicPr>
             <a:picLocks noChangeAspect="1"/>
           </p:cNvPicPr>
           <p:nvPr/>
         </p:nvPicPr>
         <p:blipFill>
-          <a:blip r:embed="rId6"/>
+          <a:blip r:embed="rId5"/>
           <a:stretch>
             <a:fillRect/>
           </a:stretch>
         </p:blipFill>
         <p:spPr>
           <a:xfrm>
-            <a:off x="6114752" y="2793950"/>
-            <a:ext cx="215801" cy="215801"/>
+            <a:off x="5320903" y="2419350"/>
+            <a:ext cx="253901" cy="253901"/>
           </a:xfrm>
           <a:prstGeom prst="rect">
             <a:avLst/>
@@ -6923,14 +6673,14 @@
       </p:pic>
       <p:sp>
         <p:nvSpPr>
-          <p:cNvPr id="31" name="Text 23"/>
-          <p:cNvSpPr/>
-          <p:nvPr/>
-        </p:nvSpPr>
-        <p:spPr>
-          <a:xfrm>
-            <a:off x="5788036" y="3155752"/>
-            <a:ext cx="869234" cy="165050"/>
+          <p:cNvPr id="25" name="Text 18"/>
+          <p:cNvSpPr/>
+          <p:nvPr/>
+        </p:nvSpPr>
+        <p:spPr>
+          <a:xfrm>
+            <a:off x="4910008" y="2851100"/>
+            <a:ext cx="1075840" cy="203150"/>
           </a:xfrm>
           <a:prstGeom prst="rect">
             <a:avLst/>
@@ -6944,12 +6694,12 @@
           <a:p>
             <a:pPr algn="ctr" indent="0" marL="0">
               <a:lnSpc>
-                <a:spcPts val="1300"/>
+                <a:spcPts val="1600"/>
               </a:lnSpc>
               <a:buNone/>
             </a:pPr>
             <a:r>
-              <a:rPr lang="en-US" sz="1050" b="1" dirty="0">
+              <a:rPr lang="en-US" sz="1300" b="1" dirty="0">
                 <a:solidFill>
                   <a:srgbClr val="1F2328"/>
                 </a:solidFill>
@@ -6959,20 +6709,20 @@
               </a:rPr>
               <a:t>Superset pod</a:t>
             </a:r>
-            <a:endParaRPr lang="en-US" sz="1050" dirty="0"/>
-          </a:p>
-        </p:txBody>
-      </p:sp>
-      <p:sp>
-        <p:nvSpPr>
-          <p:cNvPr id="32" name="Text 24"/>
-          <p:cNvSpPr/>
-          <p:nvPr/>
-        </p:nvSpPr>
-        <p:spPr>
-          <a:xfrm>
-            <a:off x="5970203" y="3384203"/>
-            <a:ext cx="504751" cy="139750"/>
+            <a:endParaRPr lang="en-US" sz="1300" dirty="0"/>
+          </a:p>
+        </p:txBody>
+      </p:sp>
+      <p:sp>
+        <p:nvSpPr>
+          <p:cNvPr id="26" name="Text 19"/>
+          <p:cNvSpPr/>
+          <p:nvPr/>
+        </p:nvSpPr>
+        <p:spPr>
+          <a:xfrm>
+            <a:off x="5117373" y="3130451"/>
+            <a:ext cx="661109" cy="177850"/>
           </a:xfrm>
           <a:prstGeom prst="rect">
             <a:avLst/>
@@ -6986,12 +6736,12 @@
           <a:p>
             <a:pPr algn="ctr" indent="0" marL="0">
               <a:lnSpc>
-                <a:spcPts val="1100"/>
+                <a:spcPts val="1400"/>
               </a:lnSpc>
               <a:buNone/>
             </a:pPr>
             <a:r>
-              <a:rPr lang="en-US" sz="850" dirty="0">
+              <a:rPr lang="en-US" sz="1100" dirty="0">
                 <a:solidFill>
                   <a:srgbClr val="59636E"/>
                 </a:solidFill>
@@ -6999,22 +6749,22 @@
                 <a:ea typeface="Arial" pitchFamily="34" charset="-122"/>
                 <a:cs typeface="Arial" pitchFamily="34" charset="-120"/>
               </a:rPr>
-              <a:t>init + main</a:t>
-            </a:r>
-            <a:endParaRPr lang="en-US" sz="850" dirty="0"/>
-          </a:p>
-        </p:txBody>
-      </p:sp>
-      <p:sp>
-        <p:nvSpPr>
-          <p:cNvPr id="33" name="Text 25"/>
-          <p:cNvSpPr/>
-          <p:nvPr/>
-        </p:nvSpPr>
-        <p:spPr>
-          <a:xfrm>
-            <a:off x="7194337" y="2843064"/>
-            <a:ext cx="183684" cy="104775"/>
+              <a:t>Init + main</a:t>
+            </a:r>
+            <a:endParaRPr lang="en-US" sz="1100" dirty="0"/>
+          </a:p>
+        </p:txBody>
+      </p:sp>
+      <p:sp>
+        <p:nvSpPr>
+          <p:cNvPr id="27" name="Text 20"/>
+          <p:cNvSpPr/>
+          <p:nvPr/>
+        </p:nvSpPr>
+        <p:spPr>
+          <a:xfrm>
+            <a:off x="6554074" y="2493913"/>
+            <a:ext cx="244861" cy="142875"/>
           </a:xfrm>
           <a:prstGeom prst="rect">
             <a:avLst/>
@@ -7030,7 +6780,7 @@
               <a:buNone/>
             </a:pPr>
             <a:r>
-              <a:rPr lang="en-US" sz="750" dirty="0">
+              <a:rPr lang="en-US" sz="1000" dirty="0">
                 <a:solidFill>
                   <a:srgbClr val="59636E"/>
                 </a:solidFill>
@@ -7040,20 +6790,20 @@
               </a:rPr>
               <a:t>SSL</a:t>
             </a:r>
-            <a:endParaRPr lang="en-US" sz="750" dirty="0"/>
-          </a:p>
-        </p:txBody>
-      </p:sp>
-      <p:sp>
-        <p:nvSpPr>
-          <p:cNvPr id="34" name="Text 26"/>
-          <p:cNvSpPr/>
-          <p:nvPr/>
-        </p:nvSpPr>
-        <p:spPr>
-          <a:xfrm>
-            <a:off x="7182496" y="2947839"/>
-            <a:ext cx="207365" cy="228600"/>
+            <a:endParaRPr lang="en-US" sz="1000" dirty="0"/>
+          </a:p>
+        </p:txBody>
+      </p:sp>
+      <p:sp>
+        <p:nvSpPr>
+          <p:cNvPr id="28" name="Text 21"/>
+          <p:cNvSpPr/>
+          <p:nvPr/>
+        </p:nvSpPr>
+        <p:spPr>
+          <a:xfrm>
+            <a:off x="6559993" y="2636788"/>
+            <a:ext cx="233172" cy="254050"/>
           </a:xfrm>
           <a:prstGeom prst="rect">
             <a:avLst/>
@@ -7067,12 +6817,12 @@
           <a:p>
             <a:pPr algn="ctr" indent="0" marL="0">
               <a:lnSpc>
-                <a:spcPts val="1800"/>
+                <a:spcPts val="2000"/>
               </a:lnSpc>
               <a:buNone/>
             </a:pPr>
             <a:r>
-              <a:rPr lang="en-US" sz="1600" dirty="0">
+              <a:rPr lang="en-US" sz="1800" dirty="0">
                 <a:solidFill>
                   <a:srgbClr val="818B98"/>
                 </a:solidFill>
@@ -7082,24 +6832,24 @@
               </a:rPr>
               <a:t>→</a:t>
             </a:r>
-            <a:endParaRPr lang="en-US" sz="1600" dirty="0"/>
-          </a:p>
-        </p:txBody>
-      </p:sp>
-      <p:sp>
-        <p:nvSpPr>
-          <p:cNvPr id="35" name="Text 27"/>
-          <p:cNvSpPr/>
-          <p:nvPr/>
-        </p:nvSpPr>
-        <p:spPr>
-          <a:xfrm>
-            <a:off x="7527429" y="2479625"/>
-            <a:ext cx="1269950" cy="1060252"/>
+            <a:endParaRPr lang="en-US" sz="1800" dirty="0"/>
+          </a:p>
+        </p:txBody>
+      </p:sp>
+      <p:sp>
+        <p:nvSpPr>
+          <p:cNvPr id="29" name="Text 22"/>
+          <p:cNvSpPr/>
+          <p:nvPr/>
+        </p:nvSpPr>
+        <p:spPr>
+          <a:xfrm>
+            <a:off x="6955929" y="2047875"/>
+            <a:ext cx="1625501" cy="1288852"/>
           </a:xfrm>
           <a:prstGeom prst="roundRect">
             <a:avLst>
-              <a:gd name="adj" fmla="val 9583"/>
+              <a:gd name="adj" fmla="val 7883"/>
             </a:avLst>
           </a:prstGeom>
           <a:solidFill>
@@ -7124,13 +6874,153 @@
       </p:sp>
       <p:sp>
         <p:nvSpPr>
-          <p:cNvPr id="36" name="Text 28"/>
-          <p:cNvSpPr/>
-          <p:nvPr/>
-        </p:nvSpPr>
-        <p:spPr>
-          <a:xfrm>
-            <a:off x="7971830" y="2603450"/>
+          <p:cNvPr id="30" name="Text 23"/>
+          <p:cNvSpPr/>
+          <p:nvPr/>
+        </p:nvSpPr>
+        <p:spPr>
+          <a:xfrm>
+            <a:off x="7540079" y="2197001"/>
+            <a:ext cx="457200" cy="457200"/>
+          </a:xfrm>
+          <a:prstGeom prst="roundRect">
+            <a:avLst>
+              <a:gd name="adj" fmla="val 16667"/>
+            </a:avLst>
+          </a:prstGeom>
+          <a:solidFill>
+            <a:srgbClr val="DAFBE1"/>
+          </a:solidFill>
+          <a:ln/>
+        </p:spPr>
+        <p:txBody>
+          <a:bodyPr wrap="square" rtlCol="0" anchor="ctr"/>
+          <a:lstStyle/>
+          <a:p>
+            <a:pPr indent="0" marL="0">
+              <a:buNone/>
+            </a:pPr>
+            <a:endParaRPr lang="en-US" dirty="0"/>
+          </a:p>
+        </p:txBody>
+      </p:sp>
+      <p:pic>
+        <p:nvPicPr>
+          <p:cNvPr id="31" name="Image 5" descr="/Users/danwahlin/.copilot/session-state/a2da67da-2d7a-45f2-aa6a-2a42a7b82a72/files/build/icons/GoDatabase-1A7F37.png">    </p:cNvPr>
+          <p:cNvPicPr>
+            <a:picLocks noChangeAspect="1"/>
+          </p:cNvPicPr>
+          <p:nvPr/>
+        </p:nvPicPr>
+        <p:blipFill>
+          <a:blip r:embed="rId6"/>
+          <a:stretch>
+            <a:fillRect/>
+          </a:stretch>
+        </p:blipFill>
+        <p:spPr>
+          <a:xfrm>
+            <a:off x="7641729" y="2298650"/>
+            <a:ext cx="253901" cy="253901"/>
+          </a:xfrm>
+          <a:prstGeom prst="rect">
+            <a:avLst/>
+          </a:prstGeom>
+        </p:spPr>
+      </p:pic>
+      <p:sp>
+        <p:nvSpPr>
+          <p:cNvPr id="32" name="Text 24"/>
+          <p:cNvSpPr/>
+          <p:nvPr/>
+        </p:nvSpPr>
+        <p:spPr>
+          <a:xfrm>
+            <a:off x="7282145" y="2730401"/>
+            <a:ext cx="973068" cy="203150"/>
+          </a:xfrm>
+          <a:prstGeom prst="rect">
+            <a:avLst/>
+          </a:prstGeom>
+          <a:noFill/>
+          <a:ln/>
+        </p:spPr>
+        <p:txBody>
+          <a:bodyPr wrap="square" lIns="0" tIns="0" rIns="0" bIns="0" rtlCol="0" anchor="t"/>
+          <a:lstStyle/>
+          <a:p>
+            <a:pPr algn="ctr" indent="0" marL="0">
+              <a:lnSpc>
+                <a:spcPts val="1600"/>
+              </a:lnSpc>
+              <a:buNone/>
+            </a:pPr>
+            <a:r>
+              <a:rPr lang="en-US" sz="1300" b="1" dirty="0">
+                <a:solidFill>
+                  <a:srgbClr val="1F2328"/>
+                </a:solidFill>
+                <a:latin typeface="Arial" pitchFamily="34" charset="0"/>
+                <a:ea typeface="Arial" pitchFamily="34" charset="-122"/>
+                <a:cs typeface="Arial" pitchFamily="34" charset="-120"/>
+              </a:rPr>
+              <a:t>PostgreSQL</a:t>
+            </a:r>
+            <a:endParaRPr lang="en-US" sz="1300" dirty="0"/>
+          </a:p>
+        </p:txBody>
+      </p:sp>
+      <p:sp>
+        <p:nvSpPr>
+          <p:cNvPr id="33" name="Text 25"/>
+          <p:cNvSpPr/>
+          <p:nvPr/>
+        </p:nvSpPr>
+        <p:spPr>
+          <a:xfrm>
+            <a:off x="7293682" y="3009751"/>
+            <a:ext cx="949994" cy="177850"/>
+          </a:xfrm>
+          <a:prstGeom prst="rect">
+            <a:avLst/>
+          </a:prstGeom>
+          <a:noFill/>
+          <a:ln/>
+        </p:spPr>
+        <p:txBody>
+          <a:bodyPr wrap="square" lIns="0" tIns="0" rIns="0" bIns="0" rtlCol="0" anchor="t"/>
+          <a:lstStyle/>
+          <a:p>
+            <a:pPr algn="ctr" indent="0" marL="0">
+              <a:lnSpc>
+                <a:spcPts val="1400"/>
+              </a:lnSpc>
+              <a:buNone/>
+            </a:pPr>
+            <a:r>
+              <a:rPr lang="en-US" sz="1100" dirty="0">
+                <a:solidFill>
+                  <a:srgbClr val="59636E"/>
+                </a:solidFill>
+                <a:latin typeface="Arial" pitchFamily="34" charset="0"/>
+                <a:ea typeface="Arial" pitchFamily="34" charset="-122"/>
+                <a:cs typeface="Arial" pitchFamily="34" charset="-120"/>
+              </a:rPr>
+              <a:t>Flexible Server</a:t>
+            </a:r>
+            <a:endParaRPr lang="en-US" sz="1100" dirty="0"/>
+          </a:p>
+        </p:txBody>
+      </p:sp>
+      <p:sp>
+        <p:nvSpPr>
+          <p:cNvPr id="34" name="Text 26"/>
+          <p:cNvSpPr/>
+          <p:nvPr/>
+        </p:nvSpPr>
+        <p:spPr>
+          <a:xfrm>
+            <a:off x="2931319" y="3924151"/>
             <a:ext cx="381000" cy="381000"/>
           </a:xfrm>
           <a:prstGeom prst="roundRect">
@@ -7139,7 +7029,7 @@
             </a:avLst>
           </a:prstGeom>
           <a:solidFill>
-            <a:srgbClr val="DAFBE1"/>
+            <a:srgbClr val="F6F8FA"/>
           </a:solidFill>
           <a:ln/>
         </p:spPr>
@@ -7156,7 +7046,7 @@
       </p:sp>
       <p:pic>
         <p:nvPicPr>
-          <p:cNvPr id="37" name="Image 6" descr="/Users/danwahlin/.copilot/session-state/a2da67da-2d7a-45f2-aa6a-2a42a7b82a72/files/build/icons/GoDatabase-1A7F37.png">    </p:cNvPr>
+          <p:cNvPr id="35" name="Image 6" descr="/Users/danwahlin/.copilot/session-state/a2da67da-2d7a-45f2-aa6a-2a42a7b82a72/files/build/icons/GoLog-59636E.png">    </p:cNvPr>
           <p:cNvPicPr>
             <a:picLocks noChangeAspect="1"/>
           </p:cNvPicPr>
@@ -7170,7 +7060,7 @@
         </p:blipFill>
         <p:spPr>
           <a:xfrm>
-            <a:off x="8054429" y="2686050"/>
+            <a:off x="3013918" y="4006751"/>
             <a:ext cx="215801" cy="215801"/>
           </a:xfrm>
           <a:prstGeom prst="rect">
@@ -7180,75 +7070,30 @@
       </p:pic>
       <p:sp>
         <p:nvSpPr>
-          <p:cNvPr id="38" name="Text 29"/>
-          <p:cNvSpPr/>
-          <p:nvPr/>
-        </p:nvSpPr>
-        <p:spPr>
-          <a:xfrm>
-            <a:off x="7769307" y="3047851"/>
-            <a:ext cx="786045" cy="165050"/>
-          </a:xfrm>
-          <a:prstGeom prst="rect">
-            <a:avLst/>
-          </a:prstGeom>
-          <a:noFill/>
-          <a:ln/>
-        </p:spPr>
-        <p:txBody>
-          <a:bodyPr wrap="square" lIns="0" tIns="0" rIns="0" bIns="0" rtlCol="0" anchor="t"/>
-          <a:lstStyle/>
-          <a:p>
-            <a:pPr algn="ctr" indent="0" marL="0">
-              <a:lnSpc>
-                <a:spcPts val="1300"/>
-              </a:lnSpc>
-              <a:buNone/>
-            </a:pPr>
-            <a:r>
-              <a:rPr lang="en-US" sz="1050" b="1" dirty="0">
-                <a:solidFill>
-                  <a:srgbClr val="1F2328"/>
-                </a:solidFill>
-                <a:latin typeface="Arial" pitchFamily="34" charset="0"/>
-                <a:ea typeface="Arial" pitchFamily="34" charset="-122"/>
-                <a:cs typeface="Arial" pitchFamily="34" charset="-120"/>
-              </a:rPr>
-              <a:t>PostgreSQL</a:t>
-            </a:r>
-            <a:endParaRPr lang="en-US" sz="1050" dirty="0"/>
-          </a:p>
-        </p:txBody>
-      </p:sp>
-      <p:sp>
-        <p:nvSpPr>
-          <p:cNvPr id="39" name="Text 30"/>
-          <p:cNvSpPr/>
-          <p:nvPr/>
-        </p:nvSpPr>
-        <p:spPr>
-          <a:xfrm>
-            <a:off x="7795266" y="3276302"/>
-            <a:ext cx="734127" cy="139750"/>
-          </a:xfrm>
-          <a:prstGeom prst="rect">
-            <a:avLst/>
-          </a:prstGeom>
-          <a:noFill/>
-          <a:ln/>
-        </p:spPr>
-        <p:txBody>
-          <a:bodyPr wrap="square" lIns="0" tIns="0" rIns="0" bIns="0" rtlCol="0" anchor="t"/>
-          <a:lstStyle/>
-          <a:p>
-            <a:pPr algn="ctr" indent="0" marL="0">
-              <a:lnSpc>
-                <a:spcPts val="1100"/>
-              </a:lnSpc>
-              <a:buNone/>
-            </a:pPr>
-            <a:r>
-              <a:rPr lang="en-US" sz="850" dirty="0">
+          <p:cNvPr id="36" name="Text 27"/>
+          <p:cNvSpPr/>
+          <p:nvPr/>
+        </p:nvSpPr>
+        <p:spPr>
+          <a:xfrm>
+            <a:off x="3413820" y="4014639"/>
+            <a:ext cx="2854535" cy="200025"/>
+          </a:xfrm>
+          <a:prstGeom prst="rect">
+            <a:avLst/>
+          </a:prstGeom>
+          <a:noFill/>
+          <a:ln/>
+        </p:spPr>
+        <p:txBody>
+          <a:bodyPr wrap="square" lIns="0" tIns="0" rIns="0" bIns="0" rtlCol="0" anchor="t"/>
+          <a:lstStyle/>
+          <a:p>
+            <a:pPr algn="l" indent="0" marL="0">
+              <a:buNone/>
+            </a:pPr>
+            <a:r>
+              <a:rPr lang="en-US" sz="1300" dirty="0">
                 <a:solidFill>
                   <a:srgbClr val="59636E"/>
                 </a:solidFill>
@@ -7256,9 +7101,9 @@
                 <a:ea typeface="Arial" pitchFamily="34" charset="-122"/>
                 <a:cs typeface="Arial" pitchFamily="34" charset="-120"/>
               </a:rPr>
-              <a:t>Flexible Server</a:t>
-            </a:r>
-            <a:endParaRPr lang="en-US" sz="850" dirty="0"/>
+              <a:t>Logs and metrics flow to Log Analytics</a:t>
+            </a:r>
+            <a:endParaRPr lang="en-US" sz="1300" dirty="0"/>
           </a:p>
         </p:txBody>
       </p:sp>
@@ -7302,12 +7147,12 @@
         </p:nvSpPr>
         <p:spPr>
           <a:xfrm>
-            <a:off x="7689800" y="152400"/>
-            <a:ext cx="870049" cy="266700"/>
+            <a:off x="7596187" y="152400"/>
+            <a:ext cx="963662" cy="279350"/>
           </a:xfrm>
           <a:prstGeom prst="roundRect">
             <a:avLst>
-              <a:gd name="adj" fmla="val 23810"/>
+              <a:gd name="adj" fmla="val 22731"/>
             </a:avLst>
           </a:prstGeom>
           <a:solidFill>
@@ -7334,8 +7179,8 @@
         </p:nvSpPr>
         <p:spPr>
           <a:xfrm>
-            <a:off x="7810589" y="219075"/>
-            <a:ext cx="628471" cy="133350"/>
+            <a:off x="7728944" y="220563"/>
+            <a:ext cx="698150" cy="142875"/>
           </a:xfrm>
           <a:prstGeom prst="rect">
             <a:avLst/>
@@ -7351,7 +7196,7 @@
               <a:buNone/>
             </a:pPr>
             <a:r>
-              <a:rPr lang="en-US" sz="900" b="1" dirty="0">
+              <a:rPr lang="en-US" sz="1000" b="1" dirty="0">
                 <a:solidFill>
                   <a:srgbClr val="FFFFFF"/>
                 </a:solidFill>
@@ -7361,7 +7206,7 @@
               </a:rPr>
               <a:t>SUPERSET</a:t>
             </a:r>
-            <a:endParaRPr lang="en-US" sz="900" dirty="0"/>
+            <a:endParaRPr lang="en-US" sz="1000" dirty="0"/>
           </a:p>
         </p:txBody>
       </p:sp>
@@ -7470,7 +7315,7 @@
         <p:spPr>
           <a:xfrm>
             <a:off x="558701" y="1828651"/>
-            <a:ext cx="3886200" cy="142875"/>
+            <a:ext cx="3886200" cy="152400"/>
           </a:xfrm>
           <a:prstGeom prst="rect">
             <a:avLst/>
@@ -7489,7 +7334,7 @@
               <a:buNone/>
             </a:pPr>
             <a:r>
-              <a:rPr lang="en-US" sz="1000" b="1" dirty="0">
+              <a:rPr lang="en-US" sz="1100" b="1" dirty="0">
                 <a:solidFill>
                   <a:srgbClr val="59636E"/>
                 </a:solidFill>
@@ -7499,7 +7344,7 @@
               </a:rPr>
               <a:t>SECTION 3 OF 3</a:t>
             </a:r>
-            <a:endParaRPr lang="en-US" sz="1000" dirty="0"/>
+            <a:endParaRPr lang="en-US" sz="1100" dirty="0"/>
           </a:p>
         </p:txBody>
       </p:sp>
@@ -7511,8 +7356,8 @@
         </p:nvSpPr>
         <p:spPr>
           <a:xfrm>
-            <a:off x="558701" y="2034927"/>
-            <a:ext cx="3886200" cy="444550"/>
+            <a:off x="558701" y="2044452"/>
+            <a:ext cx="3886200" cy="469850"/>
           </a:xfrm>
           <a:prstGeom prst="rect">
             <a:avLst/>
@@ -7526,7 +7371,7 @@
           <a:p>
             <a:pPr algn="l" indent="0" marL="0">
               <a:lnSpc>
-                <a:spcPts val="3500"/>
+                <a:spcPts val="3700"/>
               </a:lnSpc>
               <a:spcBef>
                 <a:spcPts val="500"/>
@@ -7534,7 +7379,7 @@
               <a:buNone/>
             </a:pPr>
             <a:r>
-              <a:rPr lang="en-US" sz="3000" b="1" dirty="0">
+              <a:rPr lang="en-US" sz="3200" b="1" dirty="0">
                 <a:solidFill>
                   <a:srgbClr val="1F2328"/>
                 </a:solidFill>
@@ -7544,7 +7389,7 @@
               </a:rPr>
               <a:t>Deploy and verify</a:t>
             </a:r>
-            <a:endParaRPr lang="en-US" sz="3000" dirty="0"/>
+            <a:endParaRPr lang="en-US" sz="3200" dirty="0"/>
           </a:p>
         </p:txBody>
       </p:sp>
@@ -7556,8 +7401,8 @@
         </p:nvSpPr>
         <p:spPr>
           <a:xfrm>
-            <a:off x="558701" y="2606427"/>
-            <a:ext cx="3886200" cy="723751"/>
+            <a:off x="558701" y="2666702"/>
+            <a:ext cx="3886200" cy="800100"/>
           </a:xfrm>
           <a:prstGeom prst="rect">
             <a:avLst/>
@@ -7571,15 +7416,15 @@
           <a:p>
             <a:pPr algn="l" indent="0" marL="0">
               <a:lnSpc>
-                <a:spcPts val="1900"/>
+                <a:spcPts val="2100"/>
               </a:lnSpc>
               <a:spcBef>
-                <a:spcPts val="1000"/>
+                <a:spcPts val="1200"/>
               </a:spcBef>
               <a:buNone/>
             </a:pPr>
             <a:r>
-              <a:rPr lang="en-US" sz="1400" dirty="0">
+              <a:rPr lang="en-US" sz="1600" dirty="0">
                 <a:solidFill>
                   <a:srgbClr val="59636E"/>
                 </a:solidFill>
@@ -7589,7 +7434,7 @@
               </a:rPr>
               <a:t>Deploy with one command, explore a what-if while you wait, and prove Superset is really using PostgreSQL.</a:t>
             </a:r>
-            <a:endParaRPr lang="en-US" sz="1400" dirty="0"/>
+            <a:endParaRPr lang="en-US" sz="1600" dirty="0"/>
           </a:p>
         </p:txBody>
       </p:sp>
@@ -7658,11 +7503,11 @@
         <p:spPr>
           <a:xfrm>
             <a:off x="558701" y="4368701"/>
-            <a:ext cx="999083" cy="336352"/>
+            <a:ext cx="1093589" cy="361652"/>
           </a:xfrm>
           <a:prstGeom prst="roundRect">
             <a:avLst>
-              <a:gd name="adj" fmla="val 52861"/>
+              <a:gd name="adj" fmla="val 52675"/>
             </a:avLst>
           </a:prstGeom>
           <a:solidFill>
@@ -7694,11 +7539,11 @@
         <p:spPr>
           <a:xfrm>
             <a:off x="644426" y="4441627"/>
-            <a:ext cx="190500" cy="190500"/>
+            <a:ext cx="215801" cy="215801"/>
           </a:xfrm>
           <a:prstGeom prst="roundRect">
             <a:avLst>
-              <a:gd name="adj" fmla="val 480000"/>
+              <a:gd name="adj" fmla="val 423724"/>
             </a:avLst>
           </a:prstGeom>
           <a:solidFill>
@@ -7725,8 +7570,8 @@
         </p:nvSpPr>
         <p:spPr>
           <a:xfrm>
-            <a:off x="710833" y="4479727"/>
-            <a:ext cx="57686" cy="114300"/>
+            <a:off x="719840" y="4482852"/>
+            <a:ext cx="64972" cy="133350"/>
           </a:xfrm>
           <a:prstGeom prst="rect">
             <a:avLst/>
@@ -7742,7 +7587,7 @@
               <a:buNone/>
             </a:pPr>
             <a:r>
-              <a:rPr lang="en-US" sz="800" b="1" dirty="0">
+              <a:rPr lang="en-US" sz="900" b="1" dirty="0">
                 <a:solidFill>
                   <a:srgbClr val="818B98"/>
                 </a:solidFill>
@@ -7752,7 +7597,7 @@
               </a:rPr>
               <a:t>1</a:t>
             </a:r>
-            <a:endParaRPr lang="en-US" sz="800" dirty="0"/>
+            <a:endParaRPr lang="en-US" sz="900" dirty="0"/>
           </a:p>
         </p:txBody>
       </p:sp>
@@ -7764,8 +7609,8 @@
         </p:nvSpPr>
         <p:spPr>
           <a:xfrm>
-            <a:off x="911126" y="4470202"/>
-            <a:ext cx="520386" cy="133350"/>
+            <a:off x="936427" y="4478089"/>
+            <a:ext cx="578072" cy="142875"/>
           </a:xfrm>
           <a:prstGeom prst="rect">
             <a:avLst/>
@@ -7781,7 +7626,7 @@
               <a:buNone/>
             </a:pPr>
             <a:r>
-              <a:rPr lang="en-US" sz="900" b="1" dirty="0">
+              <a:rPr lang="en-US" sz="1000" b="1" dirty="0">
                 <a:solidFill>
                   <a:srgbClr val="818B98"/>
                 </a:solidFill>
@@ -7791,7 +7636,7 @@
               </a:rPr>
               <a:t>Why AKS</a:t>
             </a:r>
-            <a:endParaRPr lang="en-US" sz="900" dirty="0"/>
+            <a:endParaRPr lang="en-US" sz="1000" dirty="0"/>
           </a:p>
         </p:txBody>
       </p:sp>
@@ -7803,12 +7648,12 @@
         </p:nvSpPr>
         <p:spPr>
           <a:xfrm>
-            <a:off x="1659285" y="4368701"/>
-            <a:ext cx="1555998" cy="336352"/>
+            <a:off x="1753791" y="4368701"/>
+            <a:ext cx="1712268" cy="361652"/>
           </a:xfrm>
           <a:prstGeom prst="roundRect">
             <a:avLst>
-              <a:gd name="adj" fmla="val 52861"/>
+              <a:gd name="adj" fmla="val 52675"/>
             </a:avLst>
           </a:prstGeom>
           <a:solidFill>
@@ -7839,12 +7684,12 @@
         </p:nvSpPr>
         <p:spPr>
           <a:xfrm>
-            <a:off x="1745010" y="4441627"/>
-            <a:ext cx="190500" cy="190500"/>
+            <a:off x="1839516" y="4441627"/>
+            <a:ext cx="215801" cy="215801"/>
           </a:xfrm>
           <a:prstGeom prst="roundRect">
             <a:avLst>
-              <a:gd name="adj" fmla="val 480000"/>
+              <a:gd name="adj" fmla="val 423724"/>
             </a:avLst>
           </a:prstGeom>
           <a:solidFill>
@@ -7871,8 +7716,8 @@
         </p:nvSpPr>
         <p:spPr>
           <a:xfrm>
-            <a:off x="1811417" y="4479727"/>
-            <a:ext cx="57686" cy="114300"/>
+            <a:off x="1914930" y="4482852"/>
+            <a:ext cx="64972" cy="133350"/>
           </a:xfrm>
           <a:prstGeom prst="rect">
             <a:avLst/>
@@ -7888,7 +7733,7 @@
               <a:buNone/>
             </a:pPr>
             <a:r>
-              <a:rPr lang="en-US" sz="800" b="1" dirty="0">
+              <a:rPr lang="en-US" sz="900" b="1" dirty="0">
                 <a:solidFill>
                   <a:srgbClr val="818B98"/>
                 </a:solidFill>
@@ -7898,7 +7743,7 @@
               </a:rPr>
               <a:t>2</a:t>
             </a:r>
-            <a:endParaRPr lang="en-US" sz="800" dirty="0"/>
+            <a:endParaRPr lang="en-US" sz="900" dirty="0"/>
           </a:p>
         </p:txBody>
       </p:sp>
@@ -7910,8 +7755,8 @@
         </p:nvSpPr>
         <p:spPr>
           <a:xfrm>
-            <a:off x="2011710" y="4470202"/>
-            <a:ext cx="1088440" cy="133350"/>
+            <a:off x="2131516" y="4478089"/>
+            <a:ext cx="1209124" cy="142875"/>
           </a:xfrm>
           <a:prstGeom prst="rect">
             <a:avLst/>
@@ -7927,7 +7772,7 @@
               <a:buNone/>
             </a:pPr>
             <a:r>
-              <a:rPr lang="en-US" sz="900" b="1" dirty="0">
+              <a:rPr lang="en-US" sz="1000" b="1" dirty="0">
                 <a:solidFill>
                   <a:srgbClr val="818B98"/>
                 </a:solidFill>
@@ -7937,7 +7782,7 @@
               </a:rPr>
               <a:t>Gate, then generate</a:t>
             </a:r>
-            <a:endParaRPr lang="en-US" sz="900" dirty="0"/>
+            <a:endParaRPr lang="en-US" sz="1000" dirty="0"/>
           </a:p>
         </p:txBody>
       </p:sp>
@@ -7949,12 +7794,12 @@
         </p:nvSpPr>
         <p:spPr>
           <a:xfrm>
-            <a:off x="3316784" y="4368701"/>
-            <a:ext cx="1441698" cy="336352"/>
+            <a:off x="3567559" y="4368701"/>
+            <a:ext cx="1585317" cy="361652"/>
           </a:xfrm>
           <a:prstGeom prst="roundRect">
             <a:avLst>
-              <a:gd name="adj" fmla="val 52861"/>
+              <a:gd name="adj" fmla="val 52675"/>
             </a:avLst>
           </a:prstGeom>
           <a:solidFill>
@@ -7985,12 +7830,12 @@
         </p:nvSpPr>
         <p:spPr>
           <a:xfrm>
-            <a:off x="3402509" y="4441627"/>
-            <a:ext cx="190500" cy="190500"/>
+            <a:off x="3653284" y="4441627"/>
+            <a:ext cx="215801" cy="215801"/>
           </a:xfrm>
           <a:prstGeom prst="roundRect">
             <a:avLst>
-              <a:gd name="adj" fmla="val 480000"/>
+              <a:gd name="adj" fmla="val 423724"/>
             </a:avLst>
           </a:prstGeom>
           <a:solidFill>
@@ -8017,8 +7862,8 @@
         </p:nvSpPr>
         <p:spPr>
           <a:xfrm>
-            <a:off x="3468916" y="4479727"/>
-            <a:ext cx="57686" cy="114300"/>
+            <a:off x="3728698" y="4482852"/>
+            <a:ext cx="64972" cy="133350"/>
           </a:xfrm>
           <a:prstGeom prst="rect">
             <a:avLst/>
@@ -8034,7 +7879,7 @@
               <a:buNone/>
             </a:pPr>
             <a:r>
-              <a:rPr lang="en-US" sz="800" b="1" dirty="0">
+              <a:rPr lang="en-US" sz="900" b="1" dirty="0">
                 <a:solidFill>
                   <a:srgbClr val="1A7F37"/>
                 </a:solidFill>
@@ -8044,7 +7889,7 @@
               </a:rPr>
               <a:t>3</a:t>
             </a:r>
-            <a:endParaRPr lang="en-US" sz="800" dirty="0"/>
+            <a:endParaRPr lang="en-US" sz="900" dirty="0"/>
           </a:p>
         </p:txBody>
       </p:sp>
@@ -8056,8 +7901,8 @@
         </p:nvSpPr>
         <p:spPr>
           <a:xfrm>
-            <a:off x="3669209" y="4470202"/>
-            <a:ext cx="971854" cy="133350"/>
+            <a:off x="3945285" y="4478089"/>
+            <a:ext cx="1079635" cy="142875"/>
           </a:xfrm>
           <a:prstGeom prst="rect">
             <a:avLst/>
@@ -8073,7 +7918,7 @@
               <a:buNone/>
             </a:pPr>
             <a:r>
-              <a:rPr lang="en-US" sz="900" b="1" dirty="0">
+              <a:rPr lang="en-US" sz="1000" b="1" dirty="0">
                 <a:solidFill>
                   <a:srgbClr val="FFFFFF"/>
                 </a:solidFill>
@@ -8083,7 +7928,7 @@
               </a:rPr>
               <a:t>Deploy and verify</a:t>
             </a:r>
-            <a:endParaRPr lang="en-US" sz="900" dirty="0"/>
+            <a:endParaRPr lang="en-US" sz="1000" dirty="0"/>
           </a:p>
         </p:txBody>
       </p:sp>
@@ -8127,12 +7972,12 @@
         </p:nvSpPr>
         <p:spPr>
           <a:xfrm>
-            <a:off x="7689800" y="152400"/>
-            <a:ext cx="870049" cy="266700"/>
+            <a:off x="7596187" y="152400"/>
+            <a:ext cx="963662" cy="279350"/>
           </a:xfrm>
           <a:prstGeom prst="roundRect">
             <a:avLst>
-              <a:gd name="adj" fmla="val 23810"/>
+              <a:gd name="adj" fmla="val 22731"/>
             </a:avLst>
           </a:prstGeom>
           <a:solidFill>
@@ -8159,8 +8004,8 @@
         </p:nvSpPr>
         <p:spPr>
           <a:xfrm>
-            <a:off x="7810589" y="219075"/>
-            <a:ext cx="628471" cy="133350"/>
+            <a:off x="7728944" y="220563"/>
+            <a:ext cx="698150" cy="142875"/>
           </a:xfrm>
           <a:prstGeom prst="rect">
             <a:avLst/>
@@ -8176,7 +8021,7 @@
               <a:buNone/>
             </a:pPr>
             <a:r>
-              <a:rPr lang="en-US" sz="900" b="1" dirty="0">
+              <a:rPr lang="en-US" sz="1000" b="1" dirty="0">
                 <a:solidFill>
                   <a:srgbClr val="FFFFFF"/>
                 </a:solidFill>
@@ -8186,7 +8031,7 @@
               </a:rPr>
               <a:t>SUPERSET</a:t>
             </a:r>
-            <a:endParaRPr lang="en-US" sz="900" dirty="0"/>
+            <a:endParaRPr lang="en-US" sz="1000" dirty="0"/>
           </a:p>
         </p:txBody>
       </p:sp>
@@ -8223,7 +8068,7 @@
         <p:spPr>
           <a:xfrm>
             <a:off x="482501" y="330101"/>
-            <a:ext cx="7772400" cy="142875"/>
+            <a:ext cx="8342275" cy="152400"/>
           </a:xfrm>
           <a:prstGeom prst="rect">
             <a:avLst/>
@@ -8239,7 +8084,7 @@
               <a:buNone/>
             </a:pPr>
             <a:r>
-              <a:rPr lang="en-US" sz="1000" b="1" dirty="0">
+              <a:rPr lang="en-US" sz="1100" b="1" dirty="0">
                 <a:solidFill>
                   <a:srgbClr val="1A7F37"/>
                 </a:solidFill>
@@ -8249,7 +8094,7 @@
               </a:rPr>
               <a:t>WHILE AZD UP RUNS</a:t>
             </a:r>
-            <a:endParaRPr lang="en-US" sz="1000" dirty="0"/>
+            <a:endParaRPr lang="en-US" sz="1100" dirty="0"/>
           </a:p>
         </p:txBody>
       </p:sp>
@@ -8261,8 +8106,8 @@
         </p:nvSpPr>
         <p:spPr>
           <a:xfrm>
-            <a:off x="482501" y="523726"/>
-            <a:ext cx="7772400" cy="393650"/>
+            <a:off x="482501" y="533251"/>
+            <a:ext cx="8342275" cy="419100"/>
           </a:xfrm>
           <a:prstGeom prst="rect">
             <a:avLst/>
@@ -8276,7 +8121,7 @@
           <a:p>
             <a:pPr algn="l" indent="0" marL="0">
               <a:lnSpc>
-                <a:spcPts val="3100"/>
+                <a:spcPts val="3300"/>
               </a:lnSpc>
               <a:spcBef>
                 <a:spcPts val="400"/>
@@ -8284,7 +8129,7 @@
               <a:buNone/>
             </a:pPr>
             <a:r>
-              <a:rPr lang="en-US" sz="2600" b="1" dirty="0">
+              <a:rPr lang="en-US" sz="2800" b="1" dirty="0">
                 <a:solidFill>
                   <a:srgbClr val="1F2328"/>
                 </a:solidFill>
@@ -8294,7 +8139,7 @@
               </a:rPr>
               <a:t>Fork a what-if conversation</a:t>
             </a:r>
-            <a:endParaRPr lang="en-US" sz="2600" dirty="0"/>
+            <a:endParaRPr lang="en-US" sz="2800" dirty="0"/>
           </a:p>
         </p:txBody>
       </p:sp>
@@ -8306,7 +8151,7 @@
         </p:nvSpPr>
         <p:spPr>
           <a:xfrm>
-            <a:off x="1282601" y="2435126"/>
+            <a:off x="1219051" y="2460575"/>
             <a:ext cx="762000" cy="762000"/>
           </a:xfrm>
           <a:prstGeom prst="roundRect">
@@ -8346,7 +8191,7 @@
         </p:blipFill>
         <p:spPr>
           <a:xfrm>
-            <a:off x="1447651" y="2600176"/>
+            <a:off x="1384102" y="2625626"/>
             <a:ext cx="431750" cy="431750"/>
           </a:xfrm>
           <a:prstGeom prst="rect">
@@ -8362,7 +8207,7 @@
         </p:nvSpPr>
         <p:spPr>
           <a:xfrm>
-            <a:off x="1282601" y="3298627"/>
+            <a:off x="1219051" y="3324076"/>
             <a:ext cx="777240" cy="285750"/>
           </a:xfrm>
           <a:prstGeom prst="rect">
@@ -8401,12 +8246,12 @@
         </p:nvSpPr>
         <p:spPr>
           <a:xfrm>
-            <a:off x="2323951" y="2211884"/>
-            <a:ext cx="4191000" cy="1595735"/>
+            <a:off x="2260402" y="2111871"/>
+            <a:ext cx="4317950" cy="1846808"/>
           </a:xfrm>
           <a:prstGeom prst="roundRect">
             <a:avLst>
-              <a:gd name="adj" fmla="val 6367"/>
+              <a:gd name="adj" fmla="val 5501"/>
             </a:avLst>
           </a:prstGeom>
           <a:solidFill>
@@ -8440,8 +8285,8 @@
         </p:nvSpPr>
         <p:spPr>
           <a:xfrm>
-            <a:off x="2323951" y="2216646"/>
-            <a:ext cx="4191000" cy="0"/>
+            <a:off x="2260402" y="2116634"/>
+            <a:ext cx="4317950" cy="0"/>
           </a:xfrm>
           <a:prstGeom prst="line">
             <a:avLst/>
@@ -8463,8 +8308,8 @@
         </p:nvSpPr>
         <p:spPr>
           <a:xfrm>
-            <a:off x="6510189" y="2211884"/>
-            <a:ext cx="0" cy="1595735"/>
+            <a:off x="6573589" y="2111871"/>
+            <a:ext cx="0" cy="1846808"/>
           </a:xfrm>
           <a:prstGeom prst="line">
             <a:avLst/>
@@ -8486,8 +8331,8 @@
         </p:nvSpPr>
         <p:spPr>
           <a:xfrm>
-            <a:off x="2323951" y="3802856"/>
-            <a:ext cx="4191000" cy="0"/>
+            <a:off x="2260402" y="3953917"/>
+            <a:ext cx="4317950" cy="0"/>
           </a:xfrm>
           <a:prstGeom prst="line">
             <a:avLst/>
@@ -8509,8 +8354,8 @@
         </p:nvSpPr>
         <p:spPr>
           <a:xfrm>
-            <a:off x="2352526" y="2211884"/>
-            <a:ext cx="0" cy="1595735"/>
+            <a:off x="2288977" y="2111871"/>
+            <a:ext cx="0" cy="1846808"/>
           </a:xfrm>
           <a:prstGeom prst="line">
             <a:avLst/>
@@ -8540,8 +8385,8 @@
         </p:blipFill>
         <p:spPr>
           <a:xfrm>
-            <a:off x="2635002" y="2424559"/>
-            <a:ext cx="165050" cy="165050"/>
+            <a:off x="2596902" y="2349996"/>
+            <a:ext cx="190500" cy="190500"/>
           </a:xfrm>
           <a:prstGeom prst="rect">
             <a:avLst/>
@@ -8556,8 +8401,8 @@
         </p:nvSpPr>
         <p:spPr>
           <a:xfrm>
-            <a:off x="2876252" y="2440335"/>
-            <a:ext cx="498830" cy="133350"/>
+            <a:off x="2863602" y="2369046"/>
+            <a:ext cx="581867" cy="152400"/>
           </a:xfrm>
           <a:prstGeom prst="rect">
             <a:avLst/>
@@ -8573,7 +8418,7 @@
               <a:buNone/>
             </a:pPr>
             <a:r>
-              <a:rPr lang="en-US" sz="900" b="1" dirty="0">
+              <a:rPr lang="en-US" sz="1050" b="1" dirty="0">
                 <a:solidFill>
                   <a:srgbClr val="8250DF"/>
                 </a:solidFill>
@@ -8583,7 +8428,7 @@
               </a:rPr>
               <a:t>PROMPT</a:t>
             </a:r>
-            <a:endParaRPr lang="en-US" sz="900" dirty="0"/>
+            <a:endParaRPr lang="en-US" sz="1050" dirty="0"/>
           </a:p>
         </p:txBody>
       </p:sp>
@@ -8595,8 +8440,8 @@
         </p:nvSpPr>
         <p:spPr>
           <a:xfrm>
-            <a:off x="2635002" y="2703761"/>
-            <a:ext cx="3688854" cy="865733"/>
+            <a:off x="2596902" y="2667446"/>
+            <a:ext cx="3766426" cy="1027807"/>
           </a:xfrm>
           <a:prstGeom prst="rect">
             <a:avLst/>
@@ -8610,12 +8455,12 @@
           <a:p>
             <a:pPr algn="l" indent="0" marL="0">
               <a:lnSpc>
-                <a:spcPts val="2272"/>
+                <a:spcPts val="2698"/>
               </a:lnSpc>
               <a:buNone/>
             </a:pPr>
             <a:r>
-              <a:rPr lang="en-US" sz="1600" dirty="0">
+              <a:rPr lang="en-US" sz="1900" dirty="0">
                 <a:solidFill>
                   <a:srgbClr val="1F2328"/>
                 </a:solidFill>
@@ -8627,12 +8472,12 @@
             </a:r>
             <a:pPr algn="l" indent="0" marL="0">
               <a:lnSpc>
-                <a:spcPts val="2272"/>
+                <a:spcPts val="2698"/>
               </a:lnSpc>
               <a:buNone/>
             </a:pPr>
             <a:r>
-              <a:rPr lang="en-US" sz="1600" b="1" dirty="0">
+              <a:rPr lang="en-US" sz="1900" b="1" dirty="0">
                 <a:solidFill>
                   <a:srgbClr val="1F2328"/>
                 </a:solidFill>
@@ -8644,12 +8489,12 @@
             </a:r>
             <a:pPr algn="l" indent="0" marL="0">
               <a:lnSpc>
-                <a:spcPts val="2272"/>
+                <a:spcPts val="2698"/>
               </a:lnSpc>
               <a:buNone/>
             </a:pPr>
             <a:r>
-              <a:rPr lang="en-US" sz="1600" dirty="0">
+              <a:rPr lang="en-US" sz="1900" dirty="0">
                 <a:solidFill>
                   <a:srgbClr val="1F2328"/>
                 </a:solidFill>
@@ -8659,7 +8504,7 @@
               </a:rPr>
               <a:t> instead, and what would I give up?</a:t>
             </a:r>
-            <a:endParaRPr lang="en-US" sz="1600" dirty="0"/>
+            <a:endParaRPr lang="en-US" sz="1900" dirty="0"/>
           </a:p>
         </p:txBody>
       </p:sp>
@@ -8671,7 +8516,7 @@
         </p:nvSpPr>
         <p:spPr>
           <a:xfrm>
-            <a:off x="6946702" y="2435126"/>
+            <a:off x="7010102" y="2460575"/>
             <a:ext cx="762000" cy="762000"/>
           </a:xfrm>
           <a:prstGeom prst="roundRect">
@@ -8711,7 +8556,7 @@
         </p:blipFill>
         <p:spPr>
           <a:xfrm>
-            <a:off x="7111752" y="2600176"/>
+            <a:off x="7175153" y="2625626"/>
             <a:ext cx="431750" cy="431750"/>
           </a:xfrm>
           <a:prstGeom prst="rect">
@@ -8727,7 +8572,7 @@
         </p:nvSpPr>
         <p:spPr>
           <a:xfrm>
-            <a:off x="6794302" y="3298627"/>
+            <a:off x="6857702" y="3324076"/>
             <a:ext cx="1088136" cy="285750"/>
           </a:xfrm>
           <a:prstGeom prst="rect">
@@ -8798,12 +8643,12 @@
         </p:nvSpPr>
         <p:spPr>
           <a:xfrm>
-            <a:off x="7689800" y="152400"/>
-            <a:ext cx="870049" cy="266700"/>
+            <a:off x="7596187" y="152400"/>
+            <a:ext cx="963662" cy="279350"/>
           </a:xfrm>
           <a:prstGeom prst="roundRect">
             <a:avLst>
-              <a:gd name="adj" fmla="val 23810"/>
+              <a:gd name="adj" fmla="val 22731"/>
             </a:avLst>
           </a:prstGeom>
           <a:solidFill>
@@ -8830,8 +8675,8 @@
         </p:nvSpPr>
         <p:spPr>
           <a:xfrm>
-            <a:off x="7810589" y="219075"/>
-            <a:ext cx="628471" cy="133350"/>
+            <a:off x="7728944" y="220563"/>
+            <a:ext cx="698150" cy="142875"/>
           </a:xfrm>
           <a:prstGeom prst="rect">
             <a:avLst/>
@@ -8847,7 +8692,7 @@
               <a:buNone/>
             </a:pPr>
             <a:r>
-              <a:rPr lang="en-US" sz="900" b="1" dirty="0">
+              <a:rPr lang="en-US" sz="1000" b="1" dirty="0">
                 <a:solidFill>
                   <a:srgbClr val="FFFFFF"/>
                 </a:solidFill>
@@ -8857,7 +8702,7 @@
               </a:rPr>
               <a:t>SUPERSET</a:t>
             </a:r>
-            <a:endParaRPr lang="en-US" sz="900" dirty="0"/>
+            <a:endParaRPr lang="en-US" sz="1000" dirty="0"/>
           </a:p>
         </p:txBody>
       </p:sp>
@@ -8894,7 +8739,7 @@
         <p:spPr>
           <a:xfrm>
             <a:off x="482501" y="330101"/>
-            <a:ext cx="7772400" cy="142875"/>
+            <a:ext cx="8342275" cy="152400"/>
           </a:xfrm>
           <a:prstGeom prst="rect">
             <a:avLst/>
@@ -8910,7 +8755,7 @@
               <a:buNone/>
             </a:pPr>
             <a:r>
-              <a:rPr lang="en-US" sz="1000" b="1" dirty="0">
+              <a:rPr lang="en-US" sz="1100" b="1" dirty="0">
                 <a:solidFill>
                   <a:srgbClr val="1A7F37"/>
                 </a:solidFill>
@@ -8920,7 +8765,7 @@
               </a:rPr>
               <a:t>VERIFY</a:t>
             </a:r>
-            <a:endParaRPr lang="en-US" sz="1000" dirty="0"/>
+            <a:endParaRPr lang="en-US" sz="1100" dirty="0"/>
           </a:p>
         </p:txBody>
       </p:sp>
@@ -8932,8 +8777,8 @@
         </p:nvSpPr>
         <p:spPr>
           <a:xfrm>
-            <a:off x="482501" y="523726"/>
-            <a:ext cx="7772400" cy="393650"/>
+            <a:off x="482501" y="533251"/>
+            <a:ext cx="8342275" cy="419100"/>
           </a:xfrm>
           <a:prstGeom prst="rect">
             <a:avLst/>
@@ -8947,7 +8792,7 @@
           <a:p>
             <a:pPr algn="l" indent="0" marL="0">
               <a:lnSpc>
-                <a:spcPts val="3100"/>
+                <a:spcPts val="3300"/>
               </a:lnSpc>
               <a:spcBef>
                 <a:spcPts val="400"/>
@@ -8955,7 +8800,7 @@
               <a:buNone/>
             </a:pPr>
             <a:r>
-              <a:rPr lang="en-US" sz="2600" b="1" dirty="0">
+              <a:rPr lang="en-US" sz="2800" b="1" dirty="0">
                 <a:solidFill>
                   <a:srgbClr val="1F2328"/>
                 </a:solidFill>
@@ -8965,7 +8810,7 @@
               </a:rPr>
               <a:t>Six checks, all green</a:t>
             </a:r>
-            <a:endParaRPr lang="en-US" sz="2600" dirty="0"/>
+            <a:endParaRPr lang="en-US" sz="2800" dirty="0"/>
           </a:p>
         </p:txBody>
       </p:sp>
@@ -8977,7 +8822,7 @@
         </p:nvSpPr>
         <p:spPr>
           <a:xfrm>
-            <a:off x="888802" y="1702594"/>
+            <a:off x="888802" y="1690092"/>
             <a:ext cx="7365950" cy="2169765"/>
           </a:xfrm>
           <a:prstGeom prst="roundRect">
@@ -9016,7 +8861,7 @@
         </p:nvSpPr>
         <p:spPr>
           <a:xfrm>
-            <a:off x="888802" y="1702594"/>
+            <a:off x="888802" y="1690092"/>
             <a:ext cx="7365950" cy="253901"/>
           </a:xfrm>
           <a:prstGeom prst="roundRect">
@@ -9048,7 +8893,7 @@
         </p:nvSpPr>
         <p:spPr>
           <a:xfrm>
-            <a:off x="1015752" y="1785045"/>
+            <a:off x="1015752" y="1772543"/>
             <a:ext cx="88850" cy="88850"/>
           </a:xfrm>
           <a:prstGeom prst="roundRect">
@@ -9080,7 +8925,7 @@
         </p:nvSpPr>
         <p:spPr>
           <a:xfrm>
-            <a:off x="1168003" y="1785045"/>
+            <a:off x="1168003" y="1772543"/>
             <a:ext cx="88850" cy="88850"/>
           </a:xfrm>
           <a:prstGeom prst="roundRect">
@@ -9112,7 +8957,7 @@
         </p:nvSpPr>
         <p:spPr>
           <a:xfrm>
-            <a:off x="1320254" y="1785045"/>
+            <a:off x="1320254" y="1772543"/>
             <a:ext cx="88850" cy="88850"/>
           </a:xfrm>
           <a:prstGeom prst="roundRect">
@@ -9144,8 +8989,8 @@
         </p:nvSpPr>
         <p:spPr>
           <a:xfrm>
-            <a:off x="1574006" y="1772394"/>
-            <a:ext cx="528584" cy="114300"/>
+            <a:off x="1574006" y="1745605"/>
+            <a:ext cx="621792" cy="142875"/>
           </a:xfrm>
           <a:prstGeom prst="rect">
             <a:avLst/>
@@ -9161,7 +9006,7 @@
               <a:buNone/>
             </a:pPr>
             <a:r>
-              <a:rPr lang="en-US" sz="850" dirty="0">
+              <a:rPr lang="en-US" sz="1000" dirty="0">
                 <a:solidFill>
                   <a:srgbClr val="8B949E"/>
                 </a:solidFill>
@@ -9171,7 +9016,7 @@
               </a:rPr>
               <a:t>Terminal</a:t>
             </a:r>
-            <a:endParaRPr lang="en-US" sz="850" dirty="0"/>
+            <a:endParaRPr lang="en-US" sz="1000" dirty="0"/>
           </a:p>
         </p:txBody>
       </p:sp>
@@ -9183,7 +9028,7 @@
         </p:nvSpPr>
         <p:spPr>
           <a:xfrm>
-            <a:off x="1117402" y="2134195"/>
+            <a:off x="1117402" y="2121694"/>
             <a:ext cx="7046925" cy="255836"/>
           </a:xfrm>
           <a:prstGeom prst="rect">
@@ -9242,7 +9087,7 @@
         </p:nvSpPr>
         <p:spPr>
           <a:xfrm>
-            <a:off x="1117402" y="2390031"/>
+            <a:off x="1117402" y="2377529"/>
             <a:ext cx="7046925" cy="255836"/>
           </a:xfrm>
           <a:prstGeom prst="rect">
@@ -9284,7 +9129,7 @@
         </p:nvSpPr>
         <p:spPr>
           <a:xfrm>
-            <a:off x="1117402" y="2645866"/>
+            <a:off x="1117402" y="2633365"/>
             <a:ext cx="7046925" cy="255836"/>
           </a:xfrm>
           <a:prstGeom prst="rect">
@@ -9326,7 +9171,7 @@
         </p:nvSpPr>
         <p:spPr>
           <a:xfrm>
-            <a:off x="1117402" y="2901702"/>
+            <a:off x="1117402" y="2889200"/>
             <a:ext cx="7046925" cy="255836"/>
           </a:xfrm>
           <a:prstGeom prst="rect">
@@ -9368,7 +9213,7 @@
         </p:nvSpPr>
         <p:spPr>
           <a:xfrm>
-            <a:off x="1117402" y="3157538"/>
+            <a:off x="1117402" y="3145036"/>
             <a:ext cx="7046925" cy="255836"/>
           </a:xfrm>
           <a:prstGeom prst="rect">
@@ -9410,7 +9255,7 @@
         </p:nvSpPr>
         <p:spPr>
           <a:xfrm>
-            <a:off x="1117402" y="3413373"/>
+            <a:off x="1117402" y="3400871"/>
             <a:ext cx="7046925" cy="255836"/>
           </a:xfrm>
           <a:prstGeom prst="rect">
@@ -9460,8 +9305,8 @@
         </p:blipFill>
         <p:spPr>
           <a:xfrm>
-            <a:off x="888802" y="4113609"/>
-            <a:ext cx="190500" cy="190500"/>
+            <a:off x="888802" y="4151858"/>
+            <a:ext cx="215801" cy="215801"/>
           </a:xfrm>
           <a:prstGeom prst="rect">
             <a:avLst/>
@@ -9476,8 +9321,8 @@
         </p:nvSpPr>
         <p:spPr>
           <a:xfrm>
-            <a:off x="1180802" y="4100959"/>
-            <a:ext cx="3544639" cy="215950"/>
+            <a:off x="1206103" y="4139208"/>
+            <a:ext cx="3970148" cy="241250"/>
           </a:xfrm>
           <a:prstGeom prst="rect">
             <a:avLst/>
@@ -9491,12 +9336,12 @@
           <a:p>
             <a:pPr algn="l" indent="0" marL="0">
               <a:lnSpc>
-                <a:spcPts val="1700"/>
+                <a:spcPts val="1900"/>
               </a:lnSpc>
               <a:buNone/>
             </a:pPr>
             <a:r>
-              <a:rPr lang="en-US" sz="1250" dirty="0">
+              <a:rPr lang="en-US" sz="1400" dirty="0">
                 <a:solidFill>
                   <a:srgbClr val="1F2328"/>
                 </a:solidFill>
@@ -9508,12 +9353,12 @@
             </a:r>
             <a:pPr algn="l" indent="0" marL="0">
               <a:lnSpc>
-                <a:spcPts val="1700"/>
+                <a:spcPts val="1900"/>
               </a:lnSpc>
               <a:buNone/>
             </a:pPr>
             <a:r>
-              <a:rPr lang="en-US" sz="1250" b="1" dirty="0">
+              <a:rPr lang="en-US" sz="1400" b="1" dirty="0">
                 <a:solidFill>
                   <a:srgbClr val="1F2328"/>
                 </a:solidFill>
@@ -9525,12 +9370,12 @@
             </a:r>
             <a:pPr algn="l" indent="0" marL="0">
               <a:lnSpc>
-                <a:spcPts val="1700"/>
+                <a:spcPts val="1900"/>
               </a:lnSpc>
               <a:buNone/>
             </a:pPr>
             <a:r>
-              <a:rPr lang="en-US" sz="1250" dirty="0">
+              <a:rPr lang="en-US" sz="1400" dirty="0">
                 <a:solidFill>
                   <a:srgbClr val="1F2328"/>
                 </a:solidFill>
@@ -9540,7 +9385,7 @@
               </a:rPr>
               <a:t> and create your first chart.</a:t>
             </a:r>
-            <a:endParaRPr lang="en-US" sz="1250" dirty="0"/>
+            <a:endParaRPr lang="en-US" sz="1400" dirty="0"/>
           </a:p>
         </p:txBody>
       </p:sp>
@@ -9584,12 +9429,12 @@
         </p:nvSpPr>
         <p:spPr>
           <a:xfrm>
-            <a:off x="7689800" y="152400"/>
-            <a:ext cx="870049" cy="266700"/>
+            <a:off x="7596187" y="152400"/>
+            <a:ext cx="963662" cy="279350"/>
           </a:xfrm>
           <a:prstGeom prst="roundRect">
             <a:avLst>
-              <a:gd name="adj" fmla="val 23810"/>
+              <a:gd name="adj" fmla="val 22731"/>
             </a:avLst>
           </a:prstGeom>
           <a:solidFill>
@@ -9616,8 +9461,8 @@
         </p:nvSpPr>
         <p:spPr>
           <a:xfrm>
-            <a:off x="7810589" y="219075"/>
-            <a:ext cx="628471" cy="133350"/>
+            <a:off x="7728944" y="220563"/>
+            <a:ext cx="698150" cy="142875"/>
           </a:xfrm>
           <a:prstGeom prst="rect">
             <a:avLst/>
@@ -9633,7 +9478,7 @@
               <a:buNone/>
             </a:pPr>
             <a:r>
-              <a:rPr lang="en-US" sz="900" b="1" dirty="0">
+              <a:rPr lang="en-US" sz="1000" b="1" dirty="0">
                 <a:solidFill>
                   <a:srgbClr val="FFFFFF"/>
                 </a:solidFill>
@@ -9643,7 +9488,7 @@
               </a:rPr>
               <a:t>SUPERSET</a:t>
             </a:r>
-            <a:endParaRPr lang="en-US" sz="900" dirty="0"/>
+            <a:endParaRPr lang="en-US" sz="1000" dirty="0"/>
           </a:p>
         </p:txBody>
       </p:sp>
@@ -9680,7 +9525,7 @@
         <p:spPr>
           <a:xfrm>
             <a:off x="482501" y="330101"/>
-            <a:ext cx="7772400" cy="142875"/>
+            <a:ext cx="8342275" cy="152400"/>
           </a:xfrm>
           <a:prstGeom prst="rect">
             <a:avLst/>
@@ -9696,7 +9541,7 @@
               <a:buNone/>
             </a:pPr>
             <a:r>
-              <a:rPr lang="en-US" sz="1000" b="1" dirty="0">
+              <a:rPr lang="en-US" sz="1100" b="1" dirty="0">
                 <a:solidFill>
                   <a:srgbClr val="1A7F37"/>
                 </a:solidFill>
@@ -9706,7 +9551,7 @@
               </a:rPr>
               <a:t>THE TELLTALE LOG LINE</a:t>
             </a:r>
-            <a:endParaRPr lang="en-US" sz="1000" dirty="0"/>
+            <a:endParaRPr lang="en-US" sz="1100" dirty="0"/>
           </a:p>
         </p:txBody>
       </p:sp>
@@ -9718,8 +9563,8 @@
         </p:nvSpPr>
         <p:spPr>
           <a:xfrm>
-            <a:off x="482501" y="523726"/>
-            <a:ext cx="7772400" cy="393650"/>
+            <a:off x="482501" y="533251"/>
+            <a:ext cx="8342275" cy="419100"/>
           </a:xfrm>
           <a:prstGeom prst="rect">
             <a:avLst/>
@@ -9733,7 +9578,7 @@
           <a:p>
             <a:pPr algn="l" indent="0" marL="0">
               <a:lnSpc>
-                <a:spcPts val="3100"/>
+                <a:spcPts val="3300"/>
               </a:lnSpc>
               <a:spcBef>
                 <a:spcPts val="400"/>
@@ -9741,7 +9586,7 @@
               <a:buNone/>
             </a:pPr>
             <a:r>
-              <a:rPr lang="en-US" sz="2600" b="1" dirty="0">
+              <a:rPr lang="en-US" sz="2800" b="1" dirty="0">
                 <a:solidFill>
                   <a:srgbClr val="1F2328"/>
                 </a:solidFill>
@@ -9751,7 +9596,7 @@
               </a:rPr>
               <a:t>Is it really using PostgreSQL?</a:t>
             </a:r>
-            <a:endParaRPr lang="en-US" sz="2600" dirty="0"/>
+            <a:endParaRPr lang="en-US" sz="2800" dirty="0"/>
           </a:p>
         </p:txBody>
       </p:sp>
@@ -9763,12 +9608,12 @@
         </p:nvSpPr>
         <p:spPr>
           <a:xfrm>
-            <a:off x="990451" y="1314152"/>
-            <a:ext cx="3429000" cy="2136577"/>
+            <a:off x="990451" y="1363563"/>
+            <a:ext cx="3429000" cy="1958727"/>
           </a:xfrm>
           <a:prstGeom prst="roundRect">
             <a:avLst>
-              <a:gd name="adj" fmla="val 5944"/>
+              <a:gd name="adj" fmla="val 6484"/>
             </a:avLst>
           </a:prstGeom>
           <a:solidFill>
@@ -9807,8 +9652,8 @@
         </p:blipFill>
         <p:spPr>
           <a:xfrm>
-            <a:off x="2425601" y="1577578"/>
-            <a:ext cx="558701" cy="558701"/>
+            <a:off x="2450902" y="1576239"/>
+            <a:ext cx="507950" cy="507950"/>
           </a:xfrm>
           <a:prstGeom prst="rect">
             <a:avLst/>
@@ -9823,7 +9668,7 @@
         </p:nvSpPr>
         <p:spPr>
           <a:xfrm>
-            <a:off x="1507821" y="2288679"/>
+            <a:off x="1507821" y="2211139"/>
             <a:ext cx="2394112" cy="314325"/>
           </a:xfrm>
           <a:prstGeom prst="rect">
@@ -9862,8 +9707,8 @@
         </p:nvSpPr>
         <p:spPr>
           <a:xfrm>
-            <a:off x="1577194" y="2755404"/>
-            <a:ext cx="2255514" cy="215950"/>
+            <a:off x="1490515" y="2652415"/>
+            <a:ext cx="2428723" cy="228600"/>
           </a:xfrm>
           <a:prstGeom prst="rect">
             <a:avLst/>
@@ -9877,12 +9722,12 @@
           <a:p>
             <a:pPr algn="ctr" indent="0" marL="0">
               <a:lnSpc>
-                <a:spcPts val="1700"/>
+                <a:spcPts val="1800"/>
               </a:lnSpc>
               <a:buNone/>
             </a:pPr>
             <a:r>
-              <a:rPr lang="en-US" sz="1300" dirty="0">
+              <a:rPr lang="en-US" sz="1400" dirty="0">
                 <a:solidFill>
                   <a:srgbClr val="1F2328"/>
                 </a:solidFill>
@@ -9892,7 +9737,7 @@
               </a:rPr>
               <a:t>Superset is using PostgreSQL</a:t>
             </a:r>
-            <a:endParaRPr lang="en-US" sz="1300" dirty="0"/>
+            <a:endParaRPr lang="en-US" sz="1400" dirty="0"/>
           </a:p>
         </p:txBody>
       </p:sp>
@@ -9904,12 +9749,12 @@
         </p:nvSpPr>
         <p:spPr>
           <a:xfrm>
-            <a:off x="4724251" y="1314152"/>
-            <a:ext cx="3429000" cy="2136577"/>
+            <a:off x="4724251" y="1363563"/>
+            <a:ext cx="3429000" cy="1958727"/>
           </a:xfrm>
           <a:prstGeom prst="roundRect">
             <a:avLst>
-              <a:gd name="adj" fmla="val 5944"/>
+              <a:gd name="adj" fmla="val 6484"/>
             </a:avLst>
           </a:prstGeom>
           <a:solidFill>
@@ -9948,8 +9793,8 @@
         </p:blipFill>
         <p:spPr>
           <a:xfrm>
-            <a:off x="6159401" y="1577578"/>
-            <a:ext cx="558701" cy="558701"/>
+            <a:off x="6184702" y="1576239"/>
+            <a:ext cx="507950" cy="507950"/>
           </a:xfrm>
           <a:prstGeom prst="rect">
             <a:avLst/>
@@ -9964,7 +9809,7 @@
         </p:nvSpPr>
         <p:spPr>
           <a:xfrm>
-            <a:off x="5583637" y="2288679"/>
+            <a:off x="5583637" y="2211139"/>
             <a:ext cx="1710080" cy="314325"/>
           </a:xfrm>
           <a:prstGeom prst="rect">
@@ -10003,8 +9848,8 @@
         </p:nvSpPr>
         <p:spPr>
           <a:xfrm>
-            <a:off x="4958655" y="2755404"/>
-            <a:ext cx="2960191" cy="431899"/>
+            <a:off x="4958655" y="2652415"/>
+            <a:ext cx="2960191" cy="457200"/>
           </a:xfrm>
           <a:prstGeom prst="rect">
             <a:avLst/>
@@ -10018,12 +9863,12 @@
           <a:p>
             <a:pPr algn="ctr" indent="0" marL="0">
               <a:lnSpc>
-                <a:spcPts val="1700"/>
+                <a:spcPts val="1800"/>
               </a:lnSpc>
               <a:buNone/>
             </a:pPr>
             <a:r>
-              <a:rPr lang="en-US" sz="1300" dirty="0">
+              <a:rPr lang="en-US" sz="1400" dirty="0">
                 <a:solidFill>
                   <a:srgbClr val="1F2328"/>
                 </a:solidFill>
@@ -10033,7 +9878,7 @@
               </a:rPr>
               <a:t>The PostgreSQL driver or config is missing</a:t>
             </a:r>
-            <a:endParaRPr lang="en-US" sz="1300" dirty="0"/>
+            <a:endParaRPr lang="en-US" sz="1400" dirty="0"/>
           </a:p>
         </p:txBody>
       </p:sp>
@@ -10045,12 +9890,12 @@
         </p:nvSpPr>
         <p:spPr>
           <a:xfrm>
-            <a:off x="990451" y="3704630"/>
-            <a:ext cx="7162800" cy="1000571"/>
+            <a:off x="990451" y="3576191"/>
+            <a:ext cx="7162800" cy="1130796"/>
           </a:xfrm>
           <a:prstGeom prst="roundRect">
             <a:avLst>
-              <a:gd name="adj" fmla="val 10154"/>
+              <a:gd name="adj" fmla="val 8985"/>
             </a:avLst>
           </a:prstGeom>
           <a:solidFill>
@@ -10084,7 +9929,7 @@
         </p:nvSpPr>
         <p:spPr>
           <a:xfrm>
-            <a:off x="990451" y="3709392"/>
+            <a:off x="990451" y="3580954"/>
             <a:ext cx="7162800" cy="0"/>
           </a:xfrm>
           <a:prstGeom prst="line">
@@ -10107,8 +9952,8 @@
         </p:nvSpPr>
         <p:spPr>
           <a:xfrm>
-            <a:off x="8148489" y="3704630"/>
-            <a:ext cx="0" cy="1000571"/>
+            <a:off x="8148489" y="3576191"/>
+            <a:ext cx="0" cy="1130796"/>
           </a:xfrm>
           <a:prstGeom prst="line">
             <a:avLst/>
@@ -10130,7 +9975,7 @@
         </p:nvSpPr>
         <p:spPr>
           <a:xfrm>
-            <a:off x="990451" y="4700439"/>
+            <a:off x="990451" y="4702225"/>
             <a:ext cx="7162800" cy="0"/>
           </a:xfrm>
           <a:prstGeom prst="line">
@@ -10153,8 +9998,8 @@
         </p:nvSpPr>
         <p:spPr>
           <a:xfrm>
-            <a:off x="1019026" y="3704630"/>
-            <a:ext cx="0" cy="1000571"/>
+            <a:off x="1019026" y="3576191"/>
+            <a:ext cx="0" cy="1130796"/>
           </a:xfrm>
           <a:prstGeom prst="line">
             <a:avLst/>
@@ -10184,8 +10029,8 @@
         </p:blipFill>
         <p:spPr>
           <a:xfrm>
-            <a:off x="1301502" y="3917305"/>
-            <a:ext cx="165050" cy="165050"/>
+            <a:off x="1326952" y="3814316"/>
+            <a:ext cx="190500" cy="190500"/>
           </a:xfrm>
           <a:prstGeom prst="rect">
             <a:avLst/>
@@ -10200,8 +10045,8 @@
         </p:nvSpPr>
         <p:spPr>
           <a:xfrm>
-            <a:off x="1542752" y="3933081"/>
-            <a:ext cx="498830" cy="133350"/>
+            <a:off x="1593652" y="3833366"/>
+            <a:ext cx="581867" cy="152400"/>
           </a:xfrm>
           <a:prstGeom prst="rect">
             <a:avLst/>
@@ -10217,7 +10062,7 @@
               <a:buNone/>
             </a:pPr>
             <a:r>
-              <a:rPr lang="en-US" sz="900" b="1" dirty="0">
+              <a:rPr lang="en-US" sz="1050" b="1" dirty="0">
                 <a:solidFill>
                   <a:srgbClr val="8250DF"/>
                 </a:solidFill>
@@ -10227,7 +10072,7 @@
               </a:rPr>
               <a:t>PROMPT</a:t>
             </a:r>
-            <a:endParaRPr lang="en-US" sz="900" dirty="0"/>
+            <a:endParaRPr lang="en-US" sz="1050" dirty="0"/>
           </a:p>
         </p:txBody>
       </p:sp>
@@ -10239,8 +10084,8 @@
         </p:nvSpPr>
         <p:spPr>
           <a:xfrm>
-            <a:off x="1301502" y="4196507"/>
-            <a:ext cx="6720090" cy="270570"/>
+            <a:off x="1326952" y="4118967"/>
+            <a:ext cx="6668173" cy="324594"/>
           </a:xfrm>
           <a:prstGeom prst="rect">
             <a:avLst/>
@@ -10254,12 +10099,12 @@
           <a:p>
             <a:pPr algn="l" indent="0" marL="0">
               <a:lnSpc>
-                <a:spcPts val="2130"/>
+                <a:spcPts val="2556"/>
               </a:lnSpc>
               <a:buNone/>
             </a:pPr>
             <a:r>
-              <a:rPr lang="en-US" sz="1500" dirty="0">
+              <a:rPr lang="en-US" sz="1800" dirty="0">
                 <a:solidFill>
                   <a:srgbClr val="1F2328"/>
                 </a:solidFill>
@@ -10269,7 +10114,7 @@
               </a:rPr>
               <a:t>Is my Superset deployment using PostgreSQL?</a:t>
             </a:r>
-            <a:endParaRPr lang="en-US" sz="1500" dirty="0"/>
+            <a:endParaRPr lang="en-US" sz="1800" dirty="0"/>
           </a:p>
         </p:txBody>
       </p:sp>
@@ -10313,12 +10158,12 @@
         </p:nvSpPr>
         <p:spPr>
           <a:xfrm>
-            <a:off x="7689800" y="152400"/>
-            <a:ext cx="870049" cy="266700"/>
+            <a:off x="7596187" y="152400"/>
+            <a:ext cx="963662" cy="279350"/>
           </a:xfrm>
           <a:prstGeom prst="roundRect">
             <a:avLst>
-              <a:gd name="adj" fmla="val 23810"/>
+              <a:gd name="adj" fmla="val 22731"/>
             </a:avLst>
           </a:prstGeom>
           <a:solidFill>
@@ -10345,8 +10190,8 @@
         </p:nvSpPr>
         <p:spPr>
           <a:xfrm>
-            <a:off x="7810589" y="219075"/>
-            <a:ext cx="628471" cy="133350"/>
+            <a:off x="7728944" y="220563"/>
+            <a:ext cx="698150" cy="142875"/>
           </a:xfrm>
           <a:prstGeom prst="rect">
             <a:avLst/>
@@ -10362,7 +10207,7 @@
               <a:buNone/>
             </a:pPr>
             <a:r>
-              <a:rPr lang="en-US" sz="900" b="1" dirty="0">
+              <a:rPr lang="en-US" sz="1000" b="1" dirty="0">
                 <a:solidFill>
                   <a:srgbClr val="FFFFFF"/>
                 </a:solidFill>
@@ -10372,7 +10217,7 @@
               </a:rPr>
               <a:t>SUPERSET</a:t>
             </a:r>
-            <a:endParaRPr lang="en-US" sz="900" dirty="0"/>
+            <a:endParaRPr lang="en-US" sz="1000" dirty="0"/>
           </a:p>
         </p:txBody>
       </p:sp>
@@ -10409,7 +10254,7 @@
         <p:spPr>
           <a:xfrm>
             <a:off x="482501" y="330101"/>
-            <a:ext cx="7772400" cy="142875"/>
+            <a:ext cx="8342275" cy="152400"/>
           </a:xfrm>
           <a:prstGeom prst="rect">
             <a:avLst/>
@@ -10425,7 +10270,7 @@
               <a:buNone/>
             </a:pPr>
             <a:r>
-              <a:rPr lang="en-US" sz="1000" b="1" dirty="0">
+              <a:rPr lang="en-US" sz="1100" b="1" dirty="0">
                 <a:solidFill>
                   <a:srgbClr val="1A7F37"/>
                 </a:solidFill>
@@ -10435,7 +10280,7 @@
               </a:rPr>
               <a:t>CLEAN UP</a:t>
             </a:r>
-            <a:endParaRPr lang="en-US" sz="1000" dirty="0"/>
+            <a:endParaRPr lang="en-US" sz="1100" dirty="0"/>
           </a:p>
         </p:txBody>
       </p:sp>
@@ -10447,8 +10292,8 @@
         </p:nvSpPr>
         <p:spPr>
           <a:xfrm>
-            <a:off x="482501" y="523726"/>
-            <a:ext cx="7772400" cy="393650"/>
+            <a:off x="482501" y="533251"/>
+            <a:ext cx="8342275" cy="419100"/>
           </a:xfrm>
           <a:prstGeom prst="rect">
             <a:avLst/>
@@ -10462,7 +10307,7 @@
           <a:p>
             <a:pPr algn="l" indent="0" marL="0">
               <a:lnSpc>
-                <a:spcPts val="3100"/>
+                <a:spcPts val="3300"/>
               </a:lnSpc>
               <a:spcBef>
                 <a:spcPts val="400"/>
@@ -10470,7 +10315,7 @@
               <a:buNone/>
             </a:pPr>
             <a:r>
-              <a:rPr lang="en-US" sz="2600" b="1" dirty="0">
+              <a:rPr lang="en-US" sz="2800" b="1" dirty="0">
                 <a:solidFill>
                   <a:srgbClr val="1F2328"/>
                 </a:solidFill>
@@ -10480,7 +10325,7 @@
               </a:rPr>
               <a:t>Tear it down the same day</a:t>
             </a:r>
-            <a:endParaRPr lang="en-US" sz="2600" dirty="0"/>
+            <a:endParaRPr lang="en-US" sz="2800" dirty="0"/>
           </a:p>
         </p:txBody>
       </p:sp>
@@ -10492,7 +10337,7 @@
         </p:nvSpPr>
         <p:spPr>
           <a:xfrm>
-            <a:off x="1015901" y="1695301"/>
+            <a:off x="1015901" y="1670149"/>
             <a:ext cx="7111901" cy="1968252"/>
           </a:xfrm>
           <a:prstGeom prst="roundRect">
@@ -10531,7 +10376,7 @@
         </p:nvSpPr>
         <p:spPr>
           <a:xfrm>
-            <a:off x="1015901" y="1695301"/>
+            <a:off x="1015901" y="1670149"/>
             <a:ext cx="7111901" cy="253901"/>
           </a:xfrm>
           <a:prstGeom prst="roundRect">
@@ -10563,7 +10408,7 @@
         </p:nvSpPr>
         <p:spPr>
           <a:xfrm>
-            <a:off x="1142851" y="1777752"/>
+            <a:off x="1142851" y="1752600"/>
             <a:ext cx="88850" cy="88850"/>
           </a:xfrm>
           <a:prstGeom prst="roundRect">
@@ -10595,7 +10440,7 @@
         </p:nvSpPr>
         <p:spPr>
           <a:xfrm>
-            <a:off x="1295102" y="1777752"/>
+            <a:off x="1295102" y="1752600"/>
             <a:ext cx="88850" cy="88850"/>
           </a:xfrm>
           <a:prstGeom prst="roundRect">
@@ -10627,7 +10472,7 @@
         </p:nvSpPr>
         <p:spPr>
           <a:xfrm>
-            <a:off x="1447354" y="1777752"/>
+            <a:off x="1447354" y="1752600"/>
             <a:ext cx="88850" cy="88850"/>
           </a:xfrm>
           <a:prstGeom prst="roundRect">
@@ -10659,8 +10504,8 @@
         </p:nvSpPr>
         <p:spPr>
           <a:xfrm>
-            <a:off x="1701105" y="1765102"/>
-            <a:ext cx="528584" cy="114300"/>
+            <a:off x="1701105" y="1725662"/>
+            <a:ext cx="621792" cy="142875"/>
           </a:xfrm>
           <a:prstGeom prst="rect">
             <a:avLst/>
@@ -10676,7 +10521,7 @@
               <a:buNone/>
             </a:pPr>
             <a:r>
-              <a:rPr lang="en-US" sz="850" dirty="0">
+              <a:rPr lang="en-US" sz="1000" dirty="0">
                 <a:solidFill>
                   <a:srgbClr val="8B949E"/>
                 </a:solidFill>
@@ -10686,7 +10531,7 @@
               </a:rPr>
               <a:t>Terminal</a:t>
             </a:r>
-            <a:endParaRPr lang="en-US" sz="850" dirty="0"/>
+            <a:endParaRPr lang="en-US" sz="1000" dirty="0"/>
           </a:p>
         </p:txBody>
       </p:sp>
@@ -10698,7 +10543,7 @@
         </p:nvSpPr>
         <p:spPr>
           <a:xfrm>
-            <a:off x="1244501" y="2126903"/>
+            <a:off x="1244501" y="2101751"/>
             <a:ext cx="6787795" cy="295275"/>
           </a:xfrm>
           <a:prstGeom prst="rect">
@@ -10757,7 +10602,7 @@
         </p:nvSpPr>
         <p:spPr>
           <a:xfrm>
-            <a:off x="1244501" y="2574578"/>
+            <a:off x="1244501" y="2549426"/>
             <a:ext cx="6787795" cy="295275"/>
           </a:xfrm>
           <a:prstGeom prst="rect">
@@ -10799,7 +10644,7 @@
         </p:nvSpPr>
         <p:spPr>
           <a:xfrm>
-            <a:off x="1244501" y="2869853"/>
+            <a:off x="1244501" y="2844701"/>
             <a:ext cx="6787795" cy="295275"/>
           </a:xfrm>
           <a:prstGeom prst="rect">
@@ -10858,7 +10703,7 @@
         </p:nvSpPr>
         <p:spPr>
           <a:xfrm>
-            <a:off x="1244501" y="3165128"/>
+            <a:off x="1244501" y="3139976"/>
             <a:ext cx="6787795" cy="295275"/>
           </a:xfrm>
           <a:prstGeom prst="rect">
@@ -10908,8 +10753,8 @@
         </p:blipFill>
         <p:spPr>
           <a:xfrm>
-            <a:off x="1015901" y="4012853"/>
-            <a:ext cx="190500" cy="190500"/>
+            <a:off x="1015901" y="4051102"/>
+            <a:ext cx="215801" cy="215801"/>
           </a:xfrm>
           <a:prstGeom prst="rect">
             <a:avLst/>
@@ -10924,8 +10769,8 @@
         </p:nvSpPr>
         <p:spPr>
           <a:xfrm>
-            <a:off x="1307902" y="3892153"/>
-            <a:ext cx="6956298" cy="431899"/>
+            <a:off x="1333202" y="3917752"/>
+            <a:ext cx="6930491" cy="482501"/>
           </a:xfrm>
           <a:prstGeom prst="rect">
             <a:avLst/>
@@ -10939,12 +10784,12 @@
           <a:p>
             <a:pPr algn="l" indent="0" marL="0">
               <a:lnSpc>
-                <a:spcPts val="1700"/>
+                <a:spcPts val="1900"/>
               </a:lnSpc>
               <a:buNone/>
             </a:pPr>
             <a:r>
-              <a:rPr lang="en-US" sz="1250" dirty="0">
+              <a:rPr lang="en-US" sz="1400" dirty="0">
                 <a:solidFill>
                   <a:srgbClr val="1F2328"/>
                 </a:solidFill>
@@ -10956,12 +10801,12 @@
             </a:r>
             <a:pPr algn="l" indent="0" marL="0">
               <a:lnSpc>
-                <a:spcPts val="1700"/>
+                <a:spcPts val="1900"/>
               </a:lnSpc>
               <a:buNone/>
             </a:pPr>
             <a:r>
-              <a:rPr lang="en-US" sz="1250" b="1" dirty="0">
+              <a:rPr lang="en-US" sz="1400" b="1" dirty="0">
                 <a:solidFill>
                   <a:srgbClr val="1F2328"/>
                 </a:solidFill>
@@ -10973,12 +10818,12 @@
             </a:r>
             <a:pPr algn="l" indent="0" marL="0">
               <a:lnSpc>
-                <a:spcPts val="1700"/>
+                <a:spcPts val="1900"/>
               </a:lnSpc>
               <a:buNone/>
             </a:pPr>
             <a:r>
-              <a:rPr lang="en-US" sz="1250" dirty="0">
+              <a:rPr lang="en-US" sz="1400" dirty="0">
                 <a:solidFill>
                   <a:srgbClr val="1F2328"/>
                 </a:solidFill>
@@ -10988,7 +10833,7 @@
               </a:rPr>
               <a:t> AKS and PostgreSQL deletion takes 5–10 minutes.</a:t>
             </a:r>
-            <a:endParaRPr lang="en-US" sz="1250" dirty="0"/>
+            <a:endParaRPr lang="en-US" sz="1400" dirty="0"/>
           </a:p>
         </p:txBody>
       </p:sp>
@@ -11032,12 +10877,12 @@
         </p:nvSpPr>
         <p:spPr>
           <a:xfrm>
-            <a:off x="7689800" y="152400"/>
-            <a:ext cx="870049" cy="266700"/>
+            <a:off x="7596187" y="152400"/>
+            <a:ext cx="963662" cy="279350"/>
           </a:xfrm>
           <a:prstGeom prst="roundRect">
             <a:avLst>
-              <a:gd name="adj" fmla="val 23810"/>
+              <a:gd name="adj" fmla="val 22731"/>
             </a:avLst>
           </a:prstGeom>
           <a:solidFill>
@@ -11064,8 +10909,8 @@
         </p:nvSpPr>
         <p:spPr>
           <a:xfrm>
-            <a:off x="7810589" y="219075"/>
-            <a:ext cx="628471" cy="133350"/>
+            <a:off x="7728944" y="220563"/>
+            <a:ext cx="698150" cy="142875"/>
           </a:xfrm>
           <a:prstGeom prst="rect">
             <a:avLst/>
@@ -11081,7 +10926,7 @@
               <a:buNone/>
             </a:pPr>
             <a:r>
-              <a:rPr lang="en-US" sz="900" b="1" dirty="0">
+              <a:rPr lang="en-US" sz="1000" b="1" dirty="0">
                 <a:solidFill>
                   <a:srgbClr val="FFFFFF"/>
                 </a:solidFill>
@@ -11091,7 +10936,7 @@
               </a:rPr>
               <a:t>SUPERSET</a:t>
             </a:r>
-            <a:endParaRPr lang="en-US" sz="900" dirty="0"/>
+            <a:endParaRPr lang="en-US" sz="1000" dirty="0"/>
           </a:p>
         </p:txBody>
       </p:sp>
@@ -11128,7 +10973,7 @@
         <p:spPr>
           <a:xfrm>
             <a:off x="482501" y="330101"/>
-            <a:ext cx="7772400" cy="142875"/>
+            <a:ext cx="8342275" cy="152400"/>
           </a:xfrm>
           <a:prstGeom prst="rect">
             <a:avLst/>
@@ -11144,7 +10989,7 @@
               <a:buNone/>
             </a:pPr>
             <a:r>
-              <a:rPr lang="en-US" sz="1000" b="1" dirty="0">
+              <a:rPr lang="en-US" sz="1100" b="1" dirty="0">
                 <a:solidFill>
                   <a:srgbClr val="1A7F37"/>
                 </a:solidFill>
@@ -11154,7 +10999,7 @@
               </a:rPr>
               <a:t>KEY TAKEAWAYS</a:t>
             </a:r>
-            <a:endParaRPr lang="en-US" sz="1000" dirty="0"/>
+            <a:endParaRPr lang="en-US" sz="1100" dirty="0"/>
           </a:p>
         </p:txBody>
       </p:sp>
@@ -11166,8 +11011,8 @@
         </p:nvSpPr>
         <p:spPr>
           <a:xfrm>
-            <a:off x="482501" y="523726"/>
-            <a:ext cx="7772400" cy="393650"/>
+            <a:off x="482501" y="533251"/>
+            <a:ext cx="8342275" cy="419100"/>
           </a:xfrm>
           <a:prstGeom prst="rect">
             <a:avLst/>
@@ -11181,7 +11026,7 @@
           <a:p>
             <a:pPr algn="l" indent="0" marL="0">
               <a:lnSpc>
-                <a:spcPts val="3100"/>
+                <a:spcPts val="3300"/>
               </a:lnSpc>
               <a:spcBef>
                 <a:spcPts val="400"/>
@@ -11189,7 +11034,7 @@
               <a:buNone/>
             </a:pPr>
             <a:r>
-              <a:rPr lang="en-US" sz="2600" b="1" dirty="0">
+              <a:rPr lang="en-US" sz="2800" b="1" dirty="0">
                 <a:solidFill>
                   <a:srgbClr val="1F2328"/>
                 </a:solidFill>
@@ -11199,7 +11044,7 @@
               </a:rPr>
               <a:t>What to remember</a:t>
             </a:r>
-            <a:endParaRPr lang="en-US" sz="2600" dirty="0"/>
+            <a:endParaRPr lang="en-US" sz="2800" dirty="0"/>
           </a:p>
         </p:txBody>
       </p:sp>
@@ -11211,12 +11056,12 @@
         </p:nvSpPr>
         <p:spPr>
           <a:xfrm>
-            <a:off x="482501" y="1320701"/>
-            <a:ext cx="431750" cy="431750"/>
+            <a:off x="482501" y="1422350"/>
+            <a:ext cx="507950" cy="507950"/>
           </a:xfrm>
           <a:prstGeom prst="roundRect">
             <a:avLst>
-              <a:gd name="adj" fmla="val 17649"/>
+              <a:gd name="adj" fmla="val 15001"/>
             </a:avLst>
           </a:prstGeom>
           <a:solidFill>
@@ -11251,8 +11096,8 @@
         </p:blipFill>
         <p:spPr>
           <a:xfrm>
-            <a:off x="577751" y="1415951"/>
-            <a:ext cx="241250" cy="241250"/>
+            <a:off x="596801" y="1536650"/>
+            <a:ext cx="279350" cy="279350"/>
           </a:xfrm>
           <a:prstGeom prst="rect">
             <a:avLst/>
@@ -11267,8 +11112,8 @@
         </p:nvSpPr>
         <p:spPr>
           <a:xfrm>
-            <a:off x="1066651" y="1320701"/>
-            <a:ext cx="3355035" cy="431899"/>
+            <a:off x="1155502" y="1435001"/>
+            <a:ext cx="3290367" cy="482501"/>
           </a:xfrm>
           <a:prstGeom prst="rect">
             <a:avLst/>
@@ -11282,12 +11127,12 @@
           <a:p>
             <a:pPr algn="l" indent="0" marL="0">
               <a:lnSpc>
-                <a:spcPts val="1700"/>
+                <a:spcPts val="1900"/>
               </a:lnSpc>
               <a:buNone/>
             </a:pPr>
             <a:r>
-              <a:rPr lang="en-US" sz="1300" dirty="0">
+              <a:rPr lang="en-US" sz="1500" dirty="0">
                 <a:solidFill>
                   <a:srgbClr val="1F2328"/>
                 </a:solidFill>
@@ -11297,7 +11142,7 @@
               </a:rPr>
               <a:t>The workload decides the platform. Don't default to AKS.</a:t>
             </a:r>
-            <a:endParaRPr lang="en-US" sz="1300" dirty="0"/>
+            <a:endParaRPr lang="en-US" sz="1500" dirty="0"/>
           </a:p>
         </p:txBody>
       </p:sp>
@@ -11309,12 +11154,12 @@
         </p:nvSpPr>
         <p:spPr>
           <a:xfrm>
-            <a:off x="4736902" y="1320701"/>
-            <a:ext cx="431750" cy="431750"/>
+            <a:off x="4762351" y="1422350"/>
+            <a:ext cx="507950" cy="507950"/>
           </a:xfrm>
           <a:prstGeom prst="roundRect">
             <a:avLst>
-              <a:gd name="adj" fmla="val 17649"/>
+              <a:gd name="adj" fmla="val 15001"/>
             </a:avLst>
           </a:prstGeom>
           <a:solidFill>
@@ -11349,8 +11194,8 @@
         </p:blipFill>
         <p:spPr>
           <a:xfrm>
-            <a:off x="4832152" y="1415951"/>
-            <a:ext cx="241250" cy="241250"/>
+            <a:off x="4876651" y="1536650"/>
+            <a:ext cx="279350" cy="279350"/>
           </a:xfrm>
           <a:prstGeom prst="rect">
             <a:avLst/>
@@ -11365,8 +11210,8 @@
         </p:nvSpPr>
         <p:spPr>
           <a:xfrm>
-            <a:off x="5321052" y="1320701"/>
-            <a:ext cx="3355035" cy="431899"/>
+            <a:off x="5435352" y="1435001"/>
+            <a:ext cx="3290367" cy="482501"/>
           </a:xfrm>
           <a:prstGeom prst="rect">
             <a:avLst/>
@@ -11380,12 +11225,12 @@
           <a:p>
             <a:pPr algn="l" indent="0" marL="0">
               <a:lnSpc>
-                <a:spcPts val="1700"/>
+                <a:spcPts val="1900"/>
               </a:lnSpc>
               <a:buNone/>
             </a:pPr>
             <a:r>
-              <a:rPr lang="en-US" sz="1300" dirty="0">
+              <a:rPr lang="en-US" sz="1500" dirty="0">
                 <a:solidFill>
                   <a:srgbClr val="1F2328"/>
                 </a:solidFill>
@@ -11395,7 +11240,7 @@
               </a:rPr>
               <a:t>Init containers, shared volumes, and ConfigMaps justify Kubernetes.</a:t>
             </a:r>
-            <a:endParaRPr lang="en-US" sz="1300" dirty="0"/>
+            <a:endParaRPr lang="en-US" sz="1500" dirty="0"/>
           </a:p>
         </p:txBody>
       </p:sp>
@@ -11407,12 +11252,12 @@
         </p:nvSpPr>
         <p:spPr>
           <a:xfrm>
-            <a:off x="482501" y="2082701"/>
-            <a:ext cx="431750" cy="431750"/>
+            <a:off x="482501" y="2311301"/>
+            <a:ext cx="507950" cy="507950"/>
           </a:xfrm>
           <a:prstGeom prst="roundRect">
             <a:avLst>
-              <a:gd name="adj" fmla="val 17649"/>
+              <a:gd name="adj" fmla="val 15001"/>
             </a:avLst>
           </a:prstGeom>
           <a:solidFill>
@@ -11447,8 +11292,8 @@
         </p:blipFill>
         <p:spPr>
           <a:xfrm>
-            <a:off x="577751" y="2177951"/>
-            <a:ext cx="241250" cy="241250"/>
+            <a:off x="596801" y="2425601"/>
+            <a:ext cx="279350" cy="279350"/>
           </a:xfrm>
           <a:prstGeom prst="rect">
             <a:avLst/>
@@ -11463,8 +11308,8 @@
         </p:nvSpPr>
         <p:spPr>
           <a:xfrm>
-            <a:off x="1066651" y="2190601"/>
-            <a:ext cx="3250594" cy="215950"/>
+            <a:off x="1155502" y="2323951"/>
+            <a:ext cx="3290367" cy="482501"/>
           </a:xfrm>
           <a:prstGeom prst="rect">
             <a:avLst/>
@@ -11478,12 +11323,12 @@
           <a:p>
             <a:pPr algn="l" indent="0" marL="0">
               <a:lnSpc>
-                <a:spcPts val="1700"/>
+                <a:spcPts val="1900"/>
               </a:lnSpc>
               <a:buNone/>
             </a:pPr>
             <a:r>
-              <a:rPr lang="en-US" sz="1300" dirty="0">
+              <a:rPr lang="en-US" sz="1500" dirty="0">
                 <a:solidFill>
                   <a:srgbClr val="1F2328"/>
                 </a:solidFill>
@@ -11493,7 +11338,7 @@
               </a:rPr>
               <a:t>Write the gate first. Fail offline, not in Azure.</a:t>
             </a:r>
-            <a:endParaRPr lang="en-US" sz="1300" dirty="0"/>
+            <a:endParaRPr lang="en-US" sz="1500" dirty="0"/>
           </a:p>
         </p:txBody>
       </p:sp>
@@ -11505,12 +11350,12 @@
         </p:nvSpPr>
         <p:spPr>
           <a:xfrm>
-            <a:off x="4736902" y="2082701"/>
-            <a:ext cx="431750" cy="431750"/>
+            <a:off x="4762351" y="2311301"/>
+            <a:ext cx="507950" cy="507950"/>
           </a:xfrm>
           <a:prstGeom prst="roundRect">
             <a:avLst>
-              <a:gd name="adj" fmla="val 17649"/>
+              <a:gd name="adj" fmla="val 15001"/>
             </a:avLst>
           </a:prstGeom>
           <a:solidFill>
@@ -11545,8 +11390,8 @@
         </p:blipFill>
         <p:spPr>
           <a:xfrm>
-            <a:off x="4832152" y="2177951"/>
-            <a:ext cx="241250" cy="241250"/>
+            <a:off x="4876651" y="2425601"/>
+            <a:ext cx="279350" cy="279350"/>
           </a:xfrm>
           <a:prstGeom prst="rect">
             <a:avLst/>
@@ -11561,8 +11406,8 @@
         </p:nvSpPr>
         <p:spPr>
           <a:xfrm>
-            <a:off x="5321052" y="2082701"/>
-            <a:ext cx="3355035" cy="431899"/>
+            <a:off x="5435352" y="2323951"/>
+            <a:ext cx="3290367" cy="482501"/>
           </a:xfrm>
           <a:prstGeom prst="rect">
             <a:avLst/>
@@ -11576,12 +11421,12 @@
           <a:p>
             <a:pPr algn="l" indent="0" marL="0">
               <a:lnSpc>
-                <a:spcPts val="1700"/>
+                <a:spcPts val="1900"/>
               </a:lnSpc>
               <a:buNone/>
             </a:pPr>
             <a:r>
-              <a:rPr lang="en-US" sz="1300" dirty="0">
+              <a:rPr lang="en-US" sz="1500" dirty="0">
                 <a:solidFill>
                   <a:srgbClr val="1F2328"/>
                 </a:solidFill>
@@ -11591,7 +11436,7 @@
               </a:rPr>
               <a:t>Review cost and quota before a big deploy. Clean up today.</a:t>
             </a:r>
-            <a:endParaRPr lang="en-US" sz="1300" dirty="0"/>
+            <a:endParaRPr lang="en-US" sz="1500" dirty="0"/>
           </a:p>
         </p:txBody>
       </p:sp>
@@ -11603,12 +11448,12 @@
         </p:nvSpPr>
         <p:spPr>
           <a:xfrm>
-            <a:off x="482501" y="3886200"/>
-            <a:ext cx="8178701" cy="711101"/>
+            <a:off x="482501" y="3810000"/>
+            <a:ext cx="8178701" cy="787301"/>
           </a:xfrm>
           <a:prstGeom prst="roundRect">
             <a:avLst>
-              <a:gd name="adj" fmla="val 14288"/>
+              <a:gd name="adj" fmla="val 12905"/>
             </a:avLst>
           </a:prstGeom>
           <a:solidFill>
@@ -11639,12 +11484,12 @@
         </p:nvSpPr>
         <p:spPr>
           <a:xfrm>
-            <a:off x="669727" y="4051250"/>
-            <a:ext cx="381000" cy="381000"/>
+            <a:off x="669727" y="3987701"/>
+            <a:ext cx="431750" cy="431750"/>
           </a:xfrm>
           <a:prstGeom prst="roundRect">
             <a:avLst>
-              <a:gd name="adj" fmla="val 20000"/>
+              <a:gd name="adj" fmla="val 17649"/>
             </a:avLst>
           </a:prstGeom>
           <a:solidFill>
@@ -11679,8 +11524,8 @@
         </p:blipFill>
         <p:spPr>
           <a:xfrm>
-            <a:off x="752326" y="4133850"/>
-            <a:ext cx="215801" cy="215801"/>
+            <a:off x="764977" y="4082951"/>
+            <a:ext cx="241250" cy="241250"/>
           </a:xfrm>
           <a:prstGeom prst="rect">
             <a:avLst/>
@@ -11695,8 +11540,8 @@
         </p:nvSpPr>
         <p:spPr>
           <a:xfrm>
-            <a:off x="1203127" y="4067175"/>
-            <a:ext cx="5464362" cy="133350"/>
+            <a:off x="1253877" y="4008388"/>
+            <a:ext cx="6120158" cy="142875"/>
           </a:xfrm>
           <a:prstGeom prst="rect">
             <a:avLst/>
@@ -11712,7 +11557,7 @@
               <a:buNone/>
             </a:pPr>
             <a:r>
-              <a:rPr lang="en-US" sz="900" b="1" dirty="0">
+              <a:rPr lang="en-US" sz="1000" b="1" dirty="0">
                 <a:solidFill>
                   <a:srgbClr val="0969DA"/>
                 </a:solidFill>
@@ -11720,9 +11565,9 @@
                 <a:ea typeface="Arial" pitchFamily="34" charset="-122"/>
                 <a:cs typeface="Arial" pitchFamily="34" charset="-120"/>
               </a:rPr>
-              <a:t>Build your own</a:t>
-            </a:r>
-            <a:endParaRPr lang="en-US" sz="900" dirty="0"/>
+              <a:t>BUILD YOUR OWN</a:t>
+            </a:r>
+            <a:endParaRPr lang="en-US" sz="1000" dirty="0"/>
           </a:p>
         </p:txBody>
       </p:sp>
@@ -11734,8 +11579,8 @@
         </p:nvSpPr>
         <p:spPr>
           <a:xfrm>
-            <a:off x="1203127" y="4225826"/>
-            <a:ext cx="5464362" cy="190500"/>
+            <a:off x="1253877" y="4189363"/>
+            <a:ext cx="6120158" cy="209550"/>
           </a:xfrm>
           <a:prstGeom prst="rect">
             <a:avLst/>
@@ -11751,7 +11596,7 @@
               <a:buNone/>
             </a:pPr>
             <a:r>
-              <a:rPr lang="en-US" sz="1250" b="1" dirty="0">
+              <a:rPr lang="en-US" sz="1400" b="1" dirty="0">
                 <a:solidFill>
                   <a:srgbClr val="1F2328"/>
                 </a:solidFill>
@@ -11765,7 +11610,7 @@
               <a:buNone/>
             </a:pPr>
             <a:r>
-              <a:rPr lang="en-US" sz="1250" dirty="0">
+              <a:rPr lang="en-US" sz="1400" dirty="0">
                 <a:solidFill>
                   <a:srgbClr val="1F2328"/>
                 </a:solidFill>
@@ -11779,7 +11624,7 @@
               <a:buNone/>
             </a:pPr>
             <a:r>
-              <a:rPr lang="en-US" sz="1250" dirty="0">
+              <a:rPr lang="en-US" sz="1400" dirty="0">
                 <a:solidFill>
                   <a:srgbClr val="59636E"/>
                 </a:solidFill>
@@ -11789,7 +11634,7 @@
               </a:rPr>
               <a:t>· Go from a plan to your own app, and deploy it the same way</a:t>
             </a:r>
-            <a:endParaRPr lang="en-US" sz="1250" dirty="0"/>
+            <a:endParaRPr lang="en-US" sz="1400" dirty="0"/>
           </a:p>
         </p:txBody>
       </p:sp>
@@ -11833,12 +11678,12 @@
         </p:nvSpPr>
         <p:spPr>
           <a:xfrm>
-            <a:off x="7689800" y="152400"/>
-            <a:ext cx="870049" cy="266700"/>
+            <a:off x="7596187" y="152400"/>
+            <a:ext cx="963662" cy="279350"/>
           </a:xfrm>
           <a:prstGeom prst="roundRect">
             <a:avLst>
-              <a:gd name="adj" fmla="val 23810"/>
+              <a:gd name="adj" fmla="val 22731"/>
             </a:avLst>
           </a:prstGeom>
           <a:solidFill>
@@ -11865,8 +11710,8 @@
         </p:nvSpPr>
         <p:spPr>
           <a:xfrm>
-            <a:off x="7810589" y="219075"/>
-            <a:ext cx="628471" cy="133350"/>
+            <a:off x="7728944" y="220563"/>
+            <a:ext cx="698150" cy="142875"/>
           </a:xfrm>
           <a:prstGeom prst="rect">
             <a:avLst/>
@@ -11882,7 +11727,7 @@
               <a:buNone/>
             </a:pPr>
             <a:r>
-              <a:rPr lang="en-US" sz="900" b="1" dirty="0">
+              <a:rPr lang="en-US" sz="1000" b="1" dirty="0">
                 <a:solidFill>
                   <a:srgbClr val="FFFFFF"/>
                 </a:solidFill>
@@ -11892,7 +11737,7 @@
               </a:rPr>
               <a:t>SUPERSET</a:t>
             </a:r>
-            <a:endParaRPr lang="en-US" sz="900" dirty="0"/>
+            <a:endParaRPr lang="en-US" sz="1000" dirty="0"/>
           </a:p>
         </p:txBody>
       </p:sp>
@@ -11929,7 +11774,7 @@
         <p:spPr>
           <a:xfrm>
             <a:off x="482501" y="330101"/>
-            <a:ext cx="7772400" cy="142875"/>
+            <a:ext cx="8342275" cy="152400"/>
           </a:xfrm>
           <a:prstGeom prst="rect">
             <a:avLst/>
@@ -11945,7 +11790,7 @@
               <a:buNone/>
             </a:pPr>
             <a:r>
-              <a:rPr lang="en-US" sz="1000" b="1" dirty="0">
+              <a:rPr lang="en-US" sz="1100" b="1" dirty="0">
                 <a:solidFill>
                   <a:srgbClr val="59636E"/>
                 </a:solidFill>
@@ -11955,7 +11800,7 @@
               </a:rPr>
               <a:t>WHERE WE ARE HEADED</a:t>
             </a:r>
-            <a:endParaRPr lang="en-US" sz="1000" dirty="0"/>
+            <a:endParaRPr lang="en-US" sz="1100" dirty="0"/>
           </a:p>
         </p:txBody>
       </p:sp>
@@ -11967,8 +11812,8 @@
         </p:nvSpPr>
         <p:spPr>
           <a:xfrm>
-            <a:off x="482501" y="523726"/>
-            <a:ext cx="7772400" cy="393650"/>
+            <a:off x="482501" y="533251"/>
+            <a:ext cx="8342275" cy="419100"/>
           </a:xfrm>
           <a:prstGeom prst="rect">
             <a:avLst/>
@@ -11982,7 +11827,7 @@
           <a:p>
             <a:pPr algn="l" indent="0" marL="0">
               <a:lnSpc>
-                <a:spcPts val="3100"/>
+                <a:spcPts val="3300"/>
               </a:lnSpc>
               <a:spcBef>
                 <a:spcPts val="400"/>
@@ -11990,7 +11835,7 @@
               <a:buNone/>
             </a:pPr>
             <a:r>
-              <a:rPr lang="en-US" sz="2600" b="1" dirty="0">
+              <a:rPr lang="en-US" sz="2800" b="1" dirty="0">
                 <a:solidFill>
                   <a:srgbClr val="1F2328"/>
                 </a:solidFill>
@@ -12000,7 +11845,7 @@
               </a:rPr>
               <a:t>Business intelligence on Azure</a:t>
             </a:r>
-            <a:endParaRPr lang="en-US" sz="2600" dirty="0"/>
+            <a:endParaRPr lang="en-US" sz="2800" dirty="0"/>
           </a:p>
         </p:txBody>
       </p:sp>
@@ -12020,7 +11865,7 @@
         </p:blipFill>
         <p:spPr>
           <a:xfrm>
-            <a:off x="2079427" y="1231702"/>
+            <a:off x="2079427" y="1257300"/>
             <a:ext cx="4984700" cy="3555950"/>
           </a:xfrm>
           <a:prstGeom prst="rect">
@@ -12068,12 +11913,12 @@
         </p:nvSpPr>
         <p:spPr>
           <a:xfrm>
-            <a:off x="7689800" y="152400"/>
-            <a:ext cx="870049" cy="266700"/>
+            <a:off x="7596187" y="152400"/>
+            <a:ext cx="963662" cy="279350"/>
           </a:xfrm>
           <a:prstGeom prst="roundRect">
             <a:avLst>
-              <a:gd name="adj" fmla="val 23810"/>
+              <a:gd name="adj" fmla="val 22731"/>
             </a:avLst>
           </a:prstGeom>
           <a:solidFill>
@@ -12100,8 +11945,8 @@
         </p:nvSpPr>
         <p:spPr>
           <a:xfrm>
-            <a:off x="7810589" y="219075"/>
-            <a:ext cx="628471" cy="133350"/>
+            <a:off x="7728944" y="220563"/>
+            <a:ext cx="698150" cy="142875"/>
           </a:xfrm>
           <a:prstGeom prst="rect">
             <a:avLst/>
@@ -12117,7 +11962,7 @@
               <a:buNone/>
             </a:pPr>
             <a:r>
-              <a:rPr lang="en-US" sz="900" b="1" dirty="0">
+              <a:rPr lang="en-US" sz="1000" b="1" dirty="0">
                 <a:solidFill>
                   <a:srgbClr val="FFFFFF"/>
                 </a:solidFill>
@@ -12127,7 +11972,7 @@
               </a:rPr>
               <a:t>SUPERSET</a:t>
             </a:r>
-            <a:endParaRPr lang="en-US" sz="900" dirty="0"/>
+            <a:endParaRPr lang="en-US" sz="1000" dirty="0"/>
           </a:p>
         </p:txBody>
       </p:sp>
@@ -12164,7 +12009,7 @@
         <p:spPr>
           <a:xfrm>
             <a:off x="482501" y="330101"/>
-            <a:ext cx="7772400" cy="142875"/>
+            <a:ext cx="8342275" cy="152400"/>
           </a:xfrm>
           <a:prstGeom prst="rect">
             <a:avLst/>
@@ -12180,7 +12025,7 @@
               <a:buNone/>
             </a:pPr>
             <a:r>
-              <a:rPr lang="en-US" sz="1000" b="1" dirty="0">
+              <a:rPr lang="en-US" sz="1100" b="1" dirty="0">
                 <a:solidFill>
                   <a:srgbClr val="59636E"/>
                 </a:solidFill>
@@ -12190,7 +12035,7 @@
               </a:rPr>
               <a:t>HOW IT WORKS</a:t>
             </a:r>
-            <a:endParaRPr lang="en-US" sz="1000" dirty="0"/>
+            <a:endParaRPr lang="en-US" sz="1100" dirty="0"/>
           </a:p>
         </p:txBody>
       </p:sp>
@@ -12202,8 +12047,8 @@
         </p:nvSpPr>
         <p:spPr>
           <a:xfrm>
-            <a:off x="482501" y="523726"/>
-            <a:ext cx="7772400" cy="393650"/>
+            <a:off x="482501" y="533251"/>
+            <a:ext cx="8342275" cy="419100"/>
           </a:xfrm>
           <a:prstGeom prst="rect">
             <a:avLst/>
@@ -12217,7 +12062,7 @@
           <a:p>
             <a:pPr algn="l" indent="0" marL="0">
               <a:lnSpc>
-                <a:spcPts val="3100"/>
+                <a:spcPts val="3300"/>
               </a:lnSpc>
               <a:spcBef>
                 <a:spcPts val="400"/>
@@ -12225,7 +12070,7 @@
               <a:buNone/>
             </a:pPr>
             <a:r>
-              <a:rPr lang="en-US" sz="2600" b="1" dirty="0">
+              <a:rPr lang="en-US" sz="2800" b="1" dirty="0">
                 <a:solidFill>
                   <a:srgbClr val="1F2328"/>
                 </a:solidFill>
@@ -12235,7 +12080,7 @@
               </a:rPr>
               <a:t>Your prompt, the agent, and the skills</a:t>
             </a:r>
-            <a:endParaRPr lang="en-US" sz="2600" dirty="0"/>
+            <a:endParaRPr lang="en-US" sz="2800" dirty="0"/>
           </a:p>
         </p:txBody>
       </p:sp>
@@ -12255,7 +12100,7 @@
         </p:blipFill>
         <p:spPr>
           <a:xfrm>
-            <a:off x="690711" y="1282601"/>
+            <a:off x="690711" y="1308050"/>
             <a:ext cx="7762131" cy="3454301"/>
           </a:xfrm>
           <a:prstGeom prst="rect">
@@ -12303,12 +12148,12 @@
         </p:nvSpPr>
         <p:spPr>
           <a:xfrm>
-            <a:off x="7689800" y="152400"/>
-            <a:ext cx="870049" cy="266700"/>
+            <a:off x="7596187" y="152400"/>
+            <a:ext cx="963662" cy="279350"/>
           </a:xfrm>
           <a:prstGeom prst="roundRect">
             <a:avLst>
-              <a:gd name="adj" fmla="val 23810"/>
+              <a:gd name="adj" fmla="val 22731"/>
             </a:avLst>
           </a:prstGeom>
           <a:solidFill>
@@ -12335,8 +12180,8 @@
         </p:nvSpPr>
         <p:spPr>
           <a:xfrm>
-            <a:off x="7810589" y="219075"/>
-            <a:ext cx="628471" cy="133350"/>
+            <a:off x="7728944" y="220563"/>
+            <a:ext cx="698150" cy="142875"/>
           </a:xfrm>
           <a:prstGeom prst="rect">
             <a:avLst/>
@@ -12352,7 +12197,7 @@
               <a:buNone/>
             </a:pPr>
             <a:r>
-              <a:rPr lang="en-US" sz="900" b="1" dirty="0">
+              <a:rPr lang="en-US" sz="1000" b="1" dirty="0">
                 <a:solidFill>
                   <a:srgbClr val="FFFFFF"/>
                 </a:solidFill>
@@ -12362,7 +12207,7 @@
               </a:rPr>
               <a:t>SUPERSET</a:t>
             </a:r>
-            <a:endParaRPr lang="en-US" sz="900" dirty="0"/>
+            <a:endParaRPr lang="en-US" sz="1000" dirty="0"/>
           </a:p>
         </p:txBody>
       </p:sp>
@@ -12471,7 +12316,7 @@
         <p:spPr>
           <a:xfrm>
             <a:off x="558701" y="1828651"/>
-            <a:ext cx="3886200" cy="142875"/>
+            <a:ext cx="3886200" cy="152400"/>
           </a:xfrm>
           <a:prstGeom prst="rect">
             <a:avLst/>
@@ -12490,7 +12335,7 @@
               <a:buNone/>
             </a:pPr>
             <a:r>
-              <a:rPr lang="en-US" sz="1000" b="1" dirty="0">
+              <a:rPr lang="en-US" sz="1100" b="1" dirty="0">
                 <a:solidFill>
                   <a:srgbClr val="59636E"/>
                 </a:solidFill>
@@ -12500,7 +12345,7 @@
               </a:rPr>
               <a:t>SECTION 1 OF 3</a:t>
             </a:r>
-            <a:endParaRPr lang="en-US" sz="1000" dirty="0"/>
+            <a:endParaRPr lang="en-US" sz="1100" dirty="0"/>
           </a:p>
         </p:txBody>
       </p:sp>
@@ -12512,8 +12357,8 @@
         </p:nvSpPr>
         <p:spPr>
           <a:xfrm>
-            <a:off x="558701" y="2034927"/>
-            <a:ext cx="3886200" cy="444550"/>
+            <a:off x="558701" y="2044452"/>
+            <a:ext cx="3886200" cy="469850"/>
           </a:xfrm>
           <a:prstGeom prst="rect">
             <a:avLst/>
@@ -12527,7 +12372,7 @@
           <a:p>
             <a:pPr algn="l" indent="0" marL="0">
               <a:lnSpc>
-                <a:spcPts val="3500"/>
+                <a:spcPts val="3700"/>
               </a:lnSpc>
               <a:spcBef>
                 <a:spcPts val="500"/>
@@ -12535,7 +12380,7 @@
               <a:buNone/>
             </a:pPr>
             <a:r>
-              <a:rPr lang="en-US" sz="3000" b="1" dirty="0">
+              <a:rPr lang="en-US" sz="3200" b="1" dirty="0">
                 <a:solidFill>
                   <a:srgbClr val="1F2328"/>
                 </a:solidFill>
@@ -12545,7 +12390,7 @@
               </a:rPr>
               <a:t>Why AKS</a:t>
             </a:r>
-            <a:endParaRPr lang="en-US" sz="3000" dirty="0"/>
+            <a:endParaRPr lang="en-US" sz="3200" dirty="0"/>
           </a:p>
         </p:txBody>
       </p:sp>
@@ -12557,8 +12402,8 @@
         </p:nvSpPr>
         <p:spPr>
           <a:xfrm>
-            <a:off x="558701" y="2606427"/>
-            <a:ext cx="3886200" cy="723751"/>
+            <a:off x="558701" y="2666702"/>
+            <a:ext cx="3886200" cy="800100"/>
           </a:xfrm>
           <a:prstGeom prst="rect">
             <a:avLst/>
@@ -12572,15 +12417,15 @@
           <a:p>
             <a:pPr algn="l" indent="0" marL="0">
               <a:lnSpc>
-                <a:spcPts val="1900"/>
+                <a:spcPts val="2100"/>
               </a:lnSpc>
               <a:spcBef>
-                <a:spcPts val="1000"/>
+                <a:spcPts val="1200"/>
               </a:spcBef>
               <a:buNone/>
             </a:pPr>
             <a:r>
-              <a:rPr lang="en-US" sz="1400" dirty="0">
+              <a:rPr lang="en-US" sz="1600" dirty="0">
                 <a:solidFill>
                   <a:srgbClr val="59636E"/>
                 </a:solidFill>
@@ -12590,7 +12435,7 @@
               </a:rPr>
               <a:t>Workload requirements pick the platform. Superset needs things Container Apps does not give you.</a:t>
             </a:r>
-            <a:endParaRPr lang="en-US" sz="1400" dirty="0"/>
+            <a:endParaRPr lang="en-US" sz="1600" dirty="0"/>
           </a:p>
         </p:txBody>
       </p:sp>
@@ -12659,11 +12504,11 @@
         <p:spPr>
           <a:xfrm>
             <a:off x="558701" y="4368701"/>
-            <a:ext cx="999083" cy="336352"/>
+            <a:ext cx="1093589" cy="361652"/>
           </a:xfrm>
           <a:prstGeom prst="roundRect">
             <a:avLst>
-              <a:gd name="adj" fmla="val 52861"/>
+              <a:gd name="adj" fmla="val 52675"/>
             </a:avLst>
           </a:prstGeom>
           <a:solidFill>
@@ -12695,11 +12540,11 @@
         <p:spPr>
           <a:xfrm>
             <a:off x="644426" y="4441627"/>
-            <a:ext cx="190500" cy="190500"/>
+            <a:ext cx="215801" cy="215801"/>
           </a:xfrm>
           <a:prstGeom prst="roundRect">
             <a:avLst>
-              <a:gd name="adj" fmla="val 480000"/>
+              <a:gd name="adj" fmla="val 423724"/>
             </a:avLst>
           </a:prstGeom>
           <a:solidFill>
@@ -12726,8 +12571,8 @@
         </p:nvSpPr>
         <p:spPr>
           <a:xfrm>
-            <a:off x="710833" y="4479727"/>
-            <a:ext cx="57686" cy="114300"/>
+            <a:off x="719840" y="4482852"/>
+            <a:ext cx="64972" cy="133350"/>
           </a:xfrm>
           <a:prstGeom prst="rect">
             <a:avLst/>
@@ -12743,7 +12588,7 @@
               <a:buNone/>
             </a:pPr>
             <a:r>
-              <a:rPr lang="en-US" sz="800" b="1" dirty="0">
+              <a:rPr lang="en-US" sz="900" b="1" dirty="0">
                 <a:solidFill>
                   <a:srgbClr val="0969DA"/>
                 </a:solidFill>
@@ -12753,7 +12598,7 @@
               </a:rPr>
               <a:t>1</a:t>
             </a:r>
-            <a:endParaRPr lang="en-US" sz="800" dirty="0"/>
+            <a:endParaRPr lang="en-US" sz="900" dirty="0"/>
           </a:p>
         </p:txBody>
       </p:sp>
@@ -12765,8 +12610,8 @@
         </p:nvSpPr>
         <p:spPr>
           <a:xfrm>
-            <a:off x="911126" y="4470202"/>
-            <a:ext cx="520386" cy="133350"/>
+            <a:off x="936427" y="4478089"/>
+            <a:ext cx="578072" cy="142875"/>
           </a:xfrm>
           <a:prstGeom prst="rect">
             <a:avLst/>
@@ -12782,7 +12627,7 @@
               <a:buNone/>
             </a:pPr>
             <a:r>
-              <a:rPr lang="en-US" sz="900" b="1" dirty="0">
+              <a:rPr lang="en-US" sz="1000" b="1" dirty="0">
                 <a:solidFill>
                   <a:srgbClr val="FFFFFF"/>
                 </a:solidFill>
@@ -12792,7 +12637,7 @@
               </a:rPr>
               <a:t>Why AKS</a:t>
             </a:r>
-            <a:endParaRPr lang="en-US" sz="900" dirty="0"/>
+            <a:endParaRPr lang="en-US" sz="1000" dirty="0"/>
           </a:p>
         </p:txBody>
       </p:sp>
@@ -12804,12 +12649,12 @@
         </p:nvSpPr>
         <p:spPr>
           <a:xfrm>
-            <a:off x="1659285" y="4368701"/>
-            <a:ext cx="1555998" cy="336352"/>
+            <a:off x="1753791" y="4368701"/>
+            <a:ext cx="1712268" cy="361652"/>
           </a:xfrm>
           <a:prstGeom prst="roundRect">
             <a:avLst>
-              <a:gd name="adj" fmla="val 52861"/>
+              <a:gd name="adj" fmla="val 52675"/>
             </a:avLst>
           </a:prstGeom>
           <a:solidFill>
@@ -12840,12 +12685,12 @@
         </p:nvSpPr>
         <p:spPr>
           <a:xfrm>
-            <a:off x="1745010" y="4441627"/>
-            <a:ext cx="190500" cy="190500"/>
+            <a:off x="1839516" y="4441627"/>
+            <a:ext cx="215801" cy="215801"/>
           </a:xfrm>
           <a:prstGeom prst="roundRect">
             <a:avLst>
-              <a:gd name="adj" fmla="val 480000"/>
+              <a:gd name="adj" fmla="val 423724"/>
             </a:avLst>
           </a:prstGeom>
           <a:solidFill>
@@ -12872,8 +12717,8 @@
         </p:nvSpPr>
         <p:spPr>
           <a:xfrm>
-            <a:off x="1811417" y="4479727"/>
-            <a:ext cx="57686" cy="114300"/>
+            <a:off x="1914930" y="4482852"/>
+            <a:ext cx="64972" cy="133350"/>
           </a:xfrm>
           <a:prstGeom prst="rect">
             <a:avLst/>
@@ -12889,7 +12734,7 @@
               <a:buNone/>
             </a:pPr>
             <a:r>
-              <a:rPr lang="en-US" sz="800" b="1" dirty="0">
+              <a:rPr lang="en-US" sz="900" b="1" dirty="0">
                 <a:solidFill>
                   <a:srgbClr val="818B98"/>
                 </a:solidFill>
@@ -12899,7 +12744,7 @@
               </a:rPr>
               <a:t>2</a:t>
             </a:r>
-            <a:endParaRPr lang="en-US" sz="800" dirty="0"/>
+            <a:endParaRPr lang="en-US" sz="900" dirty="0"/>
           </a:p>
         </p:txBody>
       </p:sp>
@@ -12911,8 +12756,8 @@
         </p:nvSpPr>
         <p:spPr>
           <a:xfrm>
-            <a:off x="2011710" y="4470202"/>
-            <a:ext cx="1088440" cy="133350"/>
+            <a:off x="2131516" y="4478089"/>
+            <a:ext cx="1209124" cy="142875"/>
           </a:xfrm>
           <a:prstGeom prst="rect">
             <a:avLst/>
@@ -12928,7 +12773,7 @@
               <a:buNone/>
             </a:pPr>
             <a:r>
-              <a:rPr lang="en-US" sz="900" b="1" dirty="0">
+              <a:rPr lang="en-US" sz="1000" b="1" dirty="0">
                 <a:solidFill>
                   <a:srgbClr val="818B98"/>
                 </a:solidFill>
@@ -12938,7 +12783,7 @@
               </a:rPr>
               <a:t>Gate, then generate</a:t>
             </a:r>
-            <a:endParaRPr lang="en-US" sz="900" dirty="0"/>
+            <a:endParaRPr lang="en-US" sz="1000" dirty="0"/>
           </a:p>
         </p:txBody>
       </p:sp>
@@ -12950,12 +12795,12 @@
         </p:nvSpPr>
         <p:spPr>
           <a:xfrm>
-            <a:off x="3316784" y="4368701"/>
-            <a:ext cx="1441698" cy="336352"/>
+            <a:off x="3567559" y="4368701"/>
+            <a:ext cx="1585317" cy="361652"/>
           </a:xfrm>
           <a:prstGeom prst="roundRect">
             <a:avLst>
-              <a:gd name="adj" fmla="val 52861"/>
+              <a:gd name="adj" fmla="val 52675"/>
             </a:avLst>
           </a:prstGeom>
           <a:solidFill>
@@ -12986,12 +12831,12 @@
         </p:nvSpPr>
         <p:spPr>
           <a:xfrm>
-            <a:off x="3402509" y="4441627"/>
-            <a:ext cx="190500" cy="190500"/>
+            <a:off x="3653284" y="4441627"/>
+            <a:ext cx="215801" cy="215801"/>
           </a:xfrm>
           <a:prstGeom prst="roundRect">
             <a:avLst>
-              <a:gd name="adj" fmla="val 480000"/>
+              <a:gd name="adj" fmla="val 423724"/>
             </a:avLst>
           </a:prstGeom>
           <a:solidFill>
@@ -13018,8 +12863,8 @@
         </p:nvSpPr>
         <p:spPr>
           <a:xfrm>
-            <a:off x="3468916" y="4479727"/>
-            <a:ext cx="57686" cy="114300"/>
+            <a:off x="3728698" y="4482852"/>
+            <a:ext cx="64972" cy="133350"/>
           </a:xfrm>
           <a:prstGeom prst="rect">
             <a:avLst/>
@@ -13035,7 +12880,7 @@
               <a:buNone/>
             </a:pPr>
             <a:r>
-              <a:rPr lang="en-US" sz="800" b="1" dirty="0">
+              <a:rPr lang="en-US" sz="900" b="1" dirty="0">
                 <a:solidFill>
                   <a:srgbClr val="818B98"/>
                 </a:solidFill>
@@ -13045,7 +12890,7 @@
               </a:rPr>
               <a:t>3</a:t>
             </a:r>
-            <a:endParaRPr lang="en-US" sz="800" dirty="0"/>
+            <a:endParaRPr lang="en-US" sz="900" dirty="0"/>
           </a:p>
         </p:txBody>
       </p:sp>
@@ -13057,8 +12902,8 @@
         </p:nvSpPr>
         <p:spPr>
           <a:xfrm>
-            <a:off x="3669209" y="4470202"/>
-            <a:ext cx="971854" cy="133350"/>
+            <a:off x="3945285" y="4478089"/>
+            <a:ext cx="1079635" cy="142875"/>
           </a:xfrm>
           <a:prstGeom prst="rect">
             <a:avLst/>
@@ -13074,7 +12919,7 @@
               <a:buNone/>
             </a:pPr>
             <a:r>
-              <a:rPr lang="en-US" sz="900" b="1" dirty="0">
+              <a:rPr lang="en-US" sz="1000" b="1" dirty="0">
                 <a:solidFill>
                   <a:srgbClr val="818B98"/>
                 </a:solidFill>
@@ -13084,7 +12929,7 @@
               </a:rPr>
               <a:t>Deploy and verify</a:t>
             </a:r>
-            <a:endParaRPr lang="en-US" sz="900" dirty="0"/>
+            <a:endParaRPr lang="en-US" sz="1000" dirty="0"/>
           </a:p>
         </p:txBody>
       </p:sp>
@@ -13128,12 +12973,12 @@
         </p:nvSpPr>
         <p:spPr>
           <a:xfrm>
-            <a:off x="7689800" y="152400"/>
-            <a:ext cx="870049" cy="266700"/>
+            <a:off x="7596187" y="152400"/>
+            <a:ext cx="963662" cy="279350"/>
           </a:xfrm>
           <a:prstGeom prst="roundRect">
             <a:avLst>
-              <a:gd name="adj" fmla="val 23810"/>
+              <a:gd name="adj" fmla="val 22731"/>
             </a:avLst>
           </a:prstGeom>
           <a:solidFill>
@@ -13160,8 +13005,8 @@
         </p:nvSpPr>
         <p:spPr>
           <a:xfrm>
-            <a:off x="7810589" y="219075"/>
-            <a:ext cx="628471" cy="133350"/>
+            <a:off x="7728944" y="220563"/>
+            <a:ext cx="698150" cy="142875"/>
           </a:xfrm>
           <a:prstGeom prst="rect">
             <a:avLst/>
@@ -13177,7 +13022,7 @@
               <a:buNone/>
             </a:pPr>
             <a:r>
-              <a:rPr lang="en-US" sz="900" b="1" dirty="0">
+              <a:rPr lang="en-US" sz="1000" b="1" dirty="0">
                 <a:solidFill>
                   <a:srgbClr val="FFFFFF"/>
                 </a:solidFill>
@@ -13187,7 +13032,7 @@
               </a:rPr>
               <a:t>SUPERSET</a:t>
             </a:r>
-            <a:endParaRPr lang="en-US" sz="900" dirty="0"/>
+            <a:endParaRPr lang="en-US" sz="1000" dirty="0"/>
           </a:p>
         </p:txBody>
       </p:sp>
@@ -13224,7 +13069,7 @@
         <p:spPr>
           <a:xfrm>
             <a:off x="482501" y="330101"/>
-            <a:ext cx="7772400" cy="142875"/>
+            <a:ext cx="8342275" cy="152400"/>
           </a:xfrm>
           <a:prstGeom prst="rect">
             <a:avLst/>
@@ -13240,7 +13085,7 @@
               <a:buNone/>
             </a:pPr>
             <a:r>
-              <a:rPr lang="en-US" sz="1000" b="1" dirty="0">
+              <a:rPr lang="en-US" sz="1100" b="1" dirty="0">
                 <a:solidFill>
                   <a:srgbClr val="0969DA"/>
                 </a:solidFill>
@@ -13250,7 +13095,7 @@
               </a:rPr>
               <a:t>CHOOSE THE PLATFORM</a:t>
             </a:r>
-            <a:endParaRPr lang="en-US" sz="1000" dirty="0"/>
+            <a:endParaRPr lang="en-US" sz="1100" dirty="0"/>
           </a:p>
         </p:txBody>
       </p:sp>
@@ -13262,8 +13107,8 @@
         </p:nvSpPr>
         <p:spPr>
           <a:xfrm>
-            <a:off x="482501" y="523726"/>
-            <a:ext cx="7772400" cy="393650"/>
+            <a:off x="482501" y="533251"/>
+            <a:ext cx="8342275" cy="419100"/>
           </a:xfrm>
           <a:prstGeom prst="rect">
             <a:avLst/>
@@ -13277,7 +13122,7 @@
           <a:p>
             <a:pPr algn="l" indent="0" marL="0">
               <a:lnSpc>
-                <a:spcPts val="3100"/>
+                <a:spcPts val="3300"/>
               </a:lnSpc>
               <a:spcBef>
                 <a:spcPts val="400"/>
@@ -13285,7 +13130,7 @@
               <a:buNone/>
             </a:pPr>
             <a:r>
-              <a:rPr lang="en-US" sz="2600" b="1" dirty="0">
+              <a:rPr lang="en-US" sz="2800" b="1" dirty="0">
                 <a:solidFill>
                   <a:srgbClr val="1F2328"/>
                 </a:solidFill>
@@ -13295,7 +13140,7 @@
               </a:rPr>
               <a:t>Container Apps or AKS?</a:t>
             </a:r>
-            <a:endParaRPr lang="en-US" sz="2600" dirty="0"/>
+            <a:endParaRPr lang="en-US" sz="2800" dirty="0"/>
           </a:p>
         </p:txBody>
       </p:sp>
@@ -13315,7 +13160,7 @@
         </p:blipFill>
         <p:spPr>
           <a:xfrm>
-            <a:off x="1904851" y="1231702"/>
+            <a:off x="1904851" y="1257300"/>
             <a:ext cx="5334000" cy="3555950"/>
           </a:xfrm>
           <a:prstGeom prst="rect">
@@ -13363,12 +13208,12 @@
         </p:nvSpPr>
         <p:spPr>
           <a:xfrm>
-            <a:off x="7689800" y="152400"/>
-            <a:ext cx="870049" cy="266700"/>
+            <a:off x="7596187" y="152400"/>
+            <a:ext cx="963662" cy="279350"/>
           </a:xfrm>
           <a:prstGeom prst="roundRect">
             <a:avLst>
-              <a:gd name="adj" fmla="val 23810"/>
+              <a:gd name="adj" fmla="val 22731"/>
             </a:avLst>
           </a:prstGeom>
           <a:solidFill>
@@ -13395,8 +13240,8 @@
         </p:nvSpPr>
         <p:spPr>
           <a:xfrm>
-            <a:off x="7810589" y="219075"/>
-            <a:ext cx="628471" cy="133350"/>
+            <a:off x="7728944" y="220563"/>
+            <a:ext cx="698150" cy="142875"/>
           </a:xfrm>
           <a:prstGeom prst="rect">
             <a:avLst/>
@@ -13412,7 +13257,7 @@
               <a:buNone/>
             </a:pPr>
             <a:r>
-              <a:rPr lang="en-US" sz="900" b="1" dirty="0">
+              <a:rPr lang="en-US" sz="1000" b="1" dirty="0">
                 <a:solidFill>
                   <a:srgbClr val="FFFFFF"/>
                 </a:solidFill>
@@ -13422,7 +13267,7 @@
               </a:rPr>
               <a:t>SUPERSET</a:t>
             </a:r>
-            <a:endParaRPr lang="en-US" sz="900" dirty="0"/>
+            <a:endParaRPr lang="en-US" sz="1000" dirty="0"/>
           </a:p>
         </p:txBody>
       </p:sp>
@@ -13459,7 +13304,7 @@
         <p:spPr>
           <a:xfrm>
             <a:off x="482501" y="330101"/>
-            <a:ext cx="7772400" cy="142875"/>
+            <a:ext cx="8342275" cy="152400"/>
           </a:xfrm>
           <a:prstGeom prst="rect">
             <a:avLst/>
@@ -13475,7 +13320,7 @@
               <a:buNone/>
             </a:pPr>
             <a:r>
-              <a:rPr lang="en-US" sz="1000" b="1" dirty="0">
+              <a:rPr lang="en-US" sz="1100" b="1" dirty="0">
                 <a:solidFill>
                   <a:srgbClr val="0969DA"/>
                 </a:solidFill>
@@ -13485,7 +13330,7 @@
               </a:rPr>
               <a:t>WHY SUPERSET NEEDS IT</a:t>
             </a:r>
-            <a:endParaRPr lang="en-US" sz="1000" dirty="0"/>
+            <a:endParaRPr lang="en-US" sz="1100" dirty="0"/>
           </a:p>
         </p:txBody>
       </p:sp>
@@ -13497,8 +13342,8 @@
         </p:nvSpPr>
         <p:spPr>
           <a:xfrm>
-            <a:off x="482501" y="523726"/>
-            <a:ext cx="7772400" cy="393650"/>
+            <a:off x="482501" y="533251"/>
+            <a:ext cx="8342275" cy="419100"/>
           </a:xfrm>
           <a:prstGeom prst="rect">
             <a:avLst/>
@@ -13512,7 +13357,7 @@
           <a:p>
             <a:pPr algn="l" indent="0" marL="0">
               <a:lnSpc>
-                <a:spcPts val="3100"/>
+                <a:spcPts val="3300"/>
               </a:lnSpc>
               <a:spcBef>
                 <a:spcPts val="400"/>
@@ -13520,7 +13365,7 @@
               <a:buNone/>
             </a:pPr>
             <a:r>
-              <a:rPr lang="en-US" sz="2600" b="1" dirty="0">
+              <a:rPr lang="en-US" sz="2800" b="1" dirty="0">
                 <a:solidFill>
                   <a:srgbClr val="1F2328"/>
                 </a:solidFill>
@@ -13530,7 +13375,7 @@
               </a:rPr>
               <a:t>Inside the Superset pod</a:t>
             </a:r>
-            <a:endParaRPr lang="en-US" sz="2600" dirty="0"/>
+            <a:endParaRPr lang="en-US" sz="2800" dirty="0"/>
           </a:p>
         </p:txBody>
       </p:sp>
@@ -13550,7 +13395,7 @@
         </p:blipFill>
         <p:spPr>
           <a:xfrm>
-            <a:off x="1759446" y="1282601"/>
+            <a:off x="1759446" y="1308050"/>
             <a:ext cx="5624810" cy="3454301"/>
           </a:xfrm>
           <a:prstGeom prst="rect">
@@ -13598,12 +13443,12 @@
         </p:nvSpPr>
         <p:spPr>
           <a:xfrm>
-            <a:off x="7689800" y="152400"/>
-            <a:ext cx="870049" cy="266700"/>
+            <a:off x="7596187" y="152400"/>
+            <a:ext cx="963662" cy="279350"/>
           </a:xfrm>
           <a:prstGeom prst="roundRect">
             <a:avLst>
-              <a:gd name="adj" fmla="val 23810"/>
+              <a:gd name="adj" fmla="val 22731"/>
             </a:avLst>
           </a:prstGeom>
           <a:solidFill>
@@ -13630,8 +13475,8 @@
         </p:nvSpPr>
         <p:spPr>
           <a:xfrm>
-            <a:off x="7810589" y="219075"/>
-            <a:ext cx="628471" cy="133350"/>
+            <a:off x="7728944" y="220563"/>
+            <a:ext cx="698150" cy="142875"/>
           </a:xfrm>
           <a:prstGeom prst="rect">
             <a:avLst/>
@@ -13647,7 +13492,7 @@
               <a:buNone/>
             </a:pPr>
             <a:r>
-              <a:rPr lang="en-US" sz="900" b="1" dirty="0">
+              <a:rPr lang="en-US" sz="1000" b="1" dirty="0">
                 <a:solidFill>
                   <a:srgbClr val="FFFFFF"/>
                 </a:solidFill>
@@ -13657,7 +13502,7 @@
               </a:rPr>
               <a:t>SUPERSET</a:t>
             </a:r>
-            <a:endParaRPr lang="en-US" sz="900" dirty="0"/>
+            <a:endParaRPr lang="en-US" sz="1000" dirty="0"/>
           </a:p>
         </p:txBody>
       </p:sp>
@@ -13694,7 +13539,7 @@
         <p:spPr>
           <a:xfrm>
             <a:off x="482501" y="330101"/>
-            <a:ext cx="7772400" cy="142875"/>
+            <a:ext cx="8342275" cy="152400"/>
           </a:xfrm>
           <a:prstGeom prst="rect">
             <a:avLst/>
@@ -13710,7 +13555,7 @@
               <a:buNone/>
             </a:pPr>
             <a:r>
-              <a:rPr lang="en-US" sz="1000" b="1" dirty="0">
+              <a:rPr lang="en-US" sz="1100" b="1" dirty="0">
                 <a:solidFill>
                   <a:srgbClr val="0969DA"/>
                 </a:solidFill>
@@ -13720,7 +13565,7 @@
               </a:rPr>
               <a:t>GET STARTED</a:t>
             </a:r>
-            <a:endParaRPr lang="en-US" sz="1000" dirty="0"/>
+            <a:endParaRPr lang="en-US" sz="1100" dirty="0"/>
           </a:p>
         </p:txBody>
       </p:sp>
@@ -13732,8 +13577,8 @@
         </p:nvSpPr>
         <p:spPr>
           <a:xfrm>
-            <a:off x="482501" y="523726"/>
-            <a:ext cx="7772400" cy="393650"/>
+            <a:off x="482501" y="533251"/>
+            <a:ext cx="8342275" cy="419100"/>
           </a:xfrm>
           <a:prstGeom prst="rect">
             <a:avLst/>
@@ -13747,7 +13592,7 @@
           <a:p>
             <a:pPr algn="l" indent="0" marL="0">
               <a:lnSpc>
-                <a:spcPts val="3100"/>
+                <a:spcPts val="3300"/>
               </a:lnSpc>
               <a:spcBef>
                 <a:spcPts val="400"/>
@@ -13755,7 +13600,7 @@
               <a:buNone/>
             </a:pPr>
             <a:r>
-              <a:rPr lang="en-US" sz="2600" b="1" dirty="0">
+              <a:rPr lang="en-US" sz="2800" b="1" dirty="0">
                 <a:solidFill>
                   <a:srgbClr val="1F2328"/>
                 </a:solidFill>
@@ -13765,7 +13610,7 @@
               </a:rPr>
               <a:t>Load the Azure skills and the deploy agent</a:t>
             </a:r>
-            <a:endParaRPr lang="en-US" sz="2600" dirty="0"/>
+            <a:endParaRPr lang="en-US" sz="2800" dirty="0"/>
           </a:p>
         </p:txBody>
       </p:sp>
@@ -13777,7 +13622,7 @@
         </p:nvSpPr>
         <p:spPr>
           <a:xfrm>
-            <a:off x="1269802" y="1638895"/>
+            <a:off x="1269802" y="1626394"/>
             <a:ext cx="6603950" cy="2297162"/>
           </a:xfrm>
           <a:prstGeom prst="roundRect">
@@ -13816,7 +13661,7 @@
         </p:nvSpPr>
         <p:spPr>
           <a:xfrm>
-            <a:off x="1269802" y="1638895"/>
+            <a:off x="1269802" y="1626394"/>
             <a:ext cx="6603950" cy="253901"/>
           </a:xfrm>
           <a:prstGeom prst="roundRect">
@@ -13848,7 +13693,7 @@
         </p:nvSpPr>
         <p:spPr>
           <a:xfrm>
-            <a:off x="1396752" y="1721346"/>
+            <a:off x="1396752" y="1708845"/>
             <a:ext cx="88850" cy="88850"/>
           </a:xfrm>
           <a:prstGeom prst="roundRect">
@@ -13880,7 +13725,7 @@
         </p:nvSpPr>
         <p:spPr>
           <a:xfrm>
-            <a:off x="1549003" y="1721346"/>
+            <a:off x="1549003" y="1708845"/>
             <a:ext cx="88850" cy="88850"/>
           </a:xfrm>
           <a:prstGeom prst="roundRect">
@@ -13912,7 +13757,7 @@
         </p:nvSpPr>
         <p:spPr>
           <a:xfrm>
-            <a:off x="1701254" y="1721346"/>
+            <a:off x="1701254" y="1708845"/>
             <a:ext cx="88850" cy="88850"/>
           </a:xfrm>
           <a:prstGeom prst="roundRect">
@@ -13944,8 +13789,8 @@
         </p:nvSpPr>
         <p:spPr>
           <a:xfrm>
-            <a:off x="1955006" y="1708696"/>
-            <a:ext cx="462397" cy="114300"/>
+            <a:off x="1955006" y="1681907"/>
+            <a:ext cx="544068" cy="142875"/>
           </a:xfrm>
           <a:prstGeom prst="rect">
             <a:avLst/>
@@ -13961,7 +13806,7 @@
               <a:buNone/>
             </a:pPr>
             <a:r>
-              <a:rPr lang="en-US" sz="850" dirty="0">
+              <a:rPr lang="en-US" sz="1000" dirty="0">
                 <a:solidFill>
                   <a:srgbClr val="8B949E"/>
                 </a:solidFill>
@@ -13971,7 +13816,7 @@
               </a:rPr>
               <a:t>copilot</a:t>
             </a:r>
-            <a:endParaRPr lang="en-US" sz="850" dirty="0"/>
+            <a:endParaRPr lang="en-US" sz="1000" dirty="0"/>
           </a:p>
         </p:txBody>
       </p:sp>
@@ -13983,7 +13828,7 @@
         </p:nvSpPr>
         <p:spPr>
           <a:xfrm>
-            <a:off x="1498402" y="2070497"/>
+            <a:off x="1498402" y="2057995"/>
             <a:ext cx="6269685" cy="275630"/>
           </a:xfrm>
           <a:prstGeom prst="rect">
@@ -14042,7 +13887,7 @@
         </p:nvSpPr>
         <p:spPr>
           <a:xfrm>
-            <a:off x="1498402" y="2346127"/>
+            <a:off x="1498402" y="2333625"/>
             <a:ext cx="6269685" cy="275630"/>
           </a:xfrm>
           <a:prstGeom prst="rect">
@@ -14101,7 +13946,7 @@
         </p:nvSpPr>
         <p:spPr>
           <a:xfrm>
-            <a:off x="1498402" y="2763887"/>
+            <a:off x="1498402" y="2751386"/>
             <a:ext cx="6269685" cy="275630"/>
           </a:xfrm>
           <a:prstGeom prst="rect">
@@ -14160,7 +14005,7 @@
         </p:nvSpPr>
         <p:spPr>
           <a:xfrm>
-            <a:off x="1498402" y="3039517"/>
+            <a:off x="1498402" y="3027015"/>
             <a:ext cx="6269685" cy="275630"/>
           </a:xfrm>
           <a:prstGeom prst="rect">
@@ -14202,7 +14047,7 @@
         </p:nvSpPr>
         <p:spPr>
           <a:xfrm>
-            <a:off x="1498402" y="3457277"/>
+            <a:off x="1498402" y="3444776"/>
             <a:ext cx="6269685" cy="275630"/>
           </a:xfrm>
           <a:prstGeom prst="rect">
@@ -14269,8 +14114,8 @@
         </p:blipFill>
         <p:spPr>
           <a:xfrm>
-            <a:off x="1269802" y="4177308"/>
-            <a:ext cx="190500" cy="190500"/>
+            <a:off x="1269802" y="4215557"/>
+            <a:ext cx="215801" cy="215801"/>
           </a:xfrm>
           <a:prstGeom prst="rect">
             <a:avLst/>
@@ -14285,8 +14130,8 @@
         </p:nvSpPr>
         <p:spPr>
           <a:xfrm>
-            <a:off x="1561802" y="4164657"/>
-            <a:ext cx="5011225" cy="215950"/>
+            <a:off x="1587103" y="4202906"/>
+            <a:ext cx="5612827" cy="241250"/>
           </a:xfrm>
           <a:prstGeom prst="rect">
             <a:avLst/>
@@ -14300,12 +14145,12 @@
           <a:p>
             <a:pPr algn="l" indent="0" marL="0">
               <a:lnSpc>
-                <a:spcPts val="1700"/>
+                <a:spcPts val="1900"/>
               </a:lnSpc>
               <a:buNone/>
             </a:pPr>
             <a:r>
-              <a:rPr lang="en-US" sz="1250" dirty="0">
+              <a:rPr lang="en-US" sz="1400" dirty="0">
                 <a:solidFill>
                   <a:srgbClr val="1F2328"/>
                 </a:solidFill>
@@ -14315,7 +14160,7 @@
               </a:rPr>
               <a:t>The agent brings the workflow. Skills bring the app-specific know-how.</a:t>
             </a:r>
-            <a:endParaRPr lang="en-US" sz="1250" dirty="0"/>
+            <a:endParaRPr lang="en-US" sz="1400" dirty="0"/>
           </a:p>
         </p:txBody>
       </p:sp>
@@ -14359,12 +14204,12 @@
         </p:nvSpPr>
         <p:spPr>
           <a:xfrm>
-            <a:off x="7689800" y="152400"/>
-            <a:ext cx="870049" cy="266700"/>
+            <a:off x="7596187" y="152400"/>
+            <a:ext cx="963662" cy="279350"/>
           </a:xfrm>
           <a:prstGeom prst="roundRect">
             <a:avLst>
-              <a:gd name="adj" fmla="val 23810"/>
+              <a:gd name="adj" fmla="val 22731"/>
             </a:avLst>
           </a:prstGeom>
           <a:solidFill>
@@ -14391,8 +14236,8 @@
         </p:nvSpPr>
         <p:spPr>
           <a:xfrm>
-            <a:off x="7810589" y="219075"/>
-            <a:ext cx="628471" cy="133350"/>
+            <a:off x="7728944" y="220563"/>
+            <a:ext cx="698150" cy="142875"/>
           </a:xfrm>
           <a:prstGeom prst="rect">
             <a:avLst/>
@@ -14408,7 +14253,7 @@
               <a:buNone/>
             </a:pPr>
             <a:r>
-              <a:rPr lang="en-US" sz="900" b="1" dirty="0">
+              <a:rPr lang="en-US" sz="1000" b="1" dirty="0">
                 <a:solidFill>
                   <a:srgbClr val="FFFFFF"/>
                 </a:solidFill>
@@ -14418,7 +14263,7 @@
               </a:rPr>
               <a:t>SUPERSET</a:t>
             </a:r>
-            <a:endParaRPr lang="en-US" sz="900" dirty="0"/>
+            <a:endParaRPr lang="en-US" sz="1000" dirty="0"/>
           </a:p>
         </p:txBody>
       </p:sp>
@@ -14455,7 +14300,7 @@
         <p:spPr>
           <a:xfrm>
             <a:off x="482501" y="330101"/>
-            <a:ext cx="7772400" cy="142875"/>
+            <a:ext cx="8342275" cy="152400"/>
           </a:xfrm>
           <a:prstGeom prst="rect">
             <a:avLst/>
@@ -14471,7 +14316,7 @@
               <a:buNone/>
             </a:pPr>
             <a:r>
-              <a:rPr lang="en-US" sz="1000" b="1" dirty="0">
+              <a:rPr lang="en-US" sz="1100" b="1" dirty="0">
                 <a:solidFill>
                   <a:srgbClr val="0969DA"/>
                 </a:solidFill>
@@ -14481,7 +14326,7 @@
               </a:rPr>
               <a:t>PLAN AND COST FIRST</a:t>
             </a:r>
-            <a:endParaRPr lang="en-US" sz="1000" dirty="0"/>
+            <a:endParaRPr lang="en-US" sz="1100" dirty="0"/>
           </a:p>
         </p:txBody>
       </p:sp>
@@ -14493,8 +14338,8 @@
         </p:nvSpPr>
         <p:spPr>
           <a:xfrm>
-            <a:off x="482501" y="523726"/>
-            <a:ext cx="7772400" cy="393650"/>
+            <a:off x="482501" y="533251"/>
+            <a:ext cx="8342275" cy="419100"/>
           </a:xfrm>
           <a:prstGeom prst="rect">
             <a:avLst/>
@@ -14508,7 +14353,7 @@
           <a:p>
             <a:pPr algn="l" indent="0" marL="0">
               <a:lnSpc>
-                <a:spcPts val="3100"/>
+                <a:spcPts val="3300"/>
               </a:lnSpc>
               <a:spcBef>
                 <a:spcPts val="400"/>
@@ -14516,7 +14361,7 @@
               <a:buNone/>
             </a:pPr>
             <a:r>
-              <a:rPr lang="en-US" sz="2600" b="1" dirty="0">
+              <a:rPr lang="en-US" sz="2800" b="1" dirty="0">
                 <a:solidFill>
                   <a:srgbClr val="1F2328"/>
                 </a:solidFill>
@@ -14526,7 +14371,7 @@
               </a:rPr>
               <a:t>Ask it to justify the platform</a:t>
             </a:r>
-            <a:endParaRPr lang="en-US" sz="2600" dirty="0"/>
+            <a:endParaRPr lang="en-US" sz="2800" dirty="0"/>
           </a:p>
         </p:txBody>
       </p:sp>
@@ -14538,12 +14383,12 @@
         </p:nvSpPr>
         <p:spPr>
           <a:xfrm>
-            <a:off x="634901" y="1993850"/>
-            <a:ext cx="7873901" cy="2082850"/>
+            <a:off x="634901" y="2008287"/>
+            <a:ext cx="7873901" cy="2104579"/>
           </a:xfrm>
           <a:prstGeom prst="roundRect">
             <a:avLst>
-              <a:gd name="adj" fmla="val 4878"/>
+              <a:gd name="adj" fmla="val 4828"/>
             </a:avLst>
           </a:prstGeom>
           <a:solidFill>
@@ -14577,7 +14422,7 @@
         </p:nvSpPr>
         <p:spPr>
           <a:xfrm>
-            <a:off x="634901" y="1998613"/>
+            <a:off x="634901" y="2013049"/>
             <a:ext cx="7873901" cy="0"/>
           </a:xfrm>
           <a:prstGeom prst="line">
@@ -14600,8 +14445,8 @@
         </p:nvSpPr>
         <p:spPr>
           <a:xfrm>
-            <a:off x="8504039" y="1993850"/>
-            <a:ext cx="0" cy="2082850"/>
+            <a:off x="8504039" y="2008287"/>
+            <a:ext cx="0" cy="2104579"/>
           </a:xfrm>
           <a:prstGeom prst="line">
             <a:avLst/>
@@ -14623,7 +14468,7 @@
         </p:nvSpPr>
         <p:spPr>
           <a:xfrm>
-            <a:off x="634901" y="4071938"/>
+            <a:off x="634901" y="4108103"/>
             <a:ext cx="7873901" cy="0"/>
           </a:xfrm>
           <a:prstGeom prst="line">
@@ -14646,8 +14491,8 @@
         </p:nvSpPr>
         <p:spPr>
           <a:xfrm>
-            <a:off x="663476" y="1993850"/>
-            <a:ext cx="0" cy="2082850"/>
+            <a:off x="663476" y="2008287"/>
+            <a:ext cx="0" cy="2104579"/>
           </a:xfrm>
           <a:prstGeom prst="line">
             <a:avLst/>
@@ -14677,8 +14522,8 @@
         </p:blipFill>
         <p:spPr>
           <a:xfrm>
-            <a:off x="945952" y="2206526"/>
-            <a:ext cx="165050" cy="165050"/>
+            <a:off x="971401" y="2246412"/>
+            <a:ext cx="190500" cy="190500"/>
           </a:xfrm>
           <a:prstGeom prst="rect">
             <a:avLst/>
@@ -14693,8 +14538,8 @@
         </p:nvSpPr>
         <p:spPr>
           <a:xfrm>
-            <a:off x="1187202" y="2222302"/>
-            <a:ext cx="498830" cy="133350"/>
+            <a:off x="1238101" y="2265462"/>
+            <a:ext cx="1423169" cy="152400"/>
           </a:xfrm>
           <a:prstGeom prst="rect">
             <a:avLst/>
@@ -14710,7 +14555,7 @@
               <a:buNone/>
             </a:pPr>
             <a:r>
-              <a:rPr lang="en-US" sz="900" b="1" dirty="0">
+              <a:rPr lang="en-US" sz="1050" dirty="0">
                 <a:solidFill>
                   <a:srgbClr val="8250DF"/>
                 </a:solidFill>
@@ -14720,7 +14565,21 @@
               </a:rPr>
               <a:t>PROMPT</a:t>
             </a:r>
-            <a:endParaRPr lang="en-US" sz="900" dirty="0"/>
+            <a:pPr algn="l" indent="0" marL="0">
+              <a:buNone/>
+            </a:pPr>
+            <a:r>
+              <a:rPr lang="en-US" sz="1050" b="1" dirty="0">
+                <a:solidFill>
+                  <a:srgbClr val="818B98"/>
+                </a:solidFill>
+                <a:latin typeface="Arial" pitchFamily="34" charset="0"/>
+                <a:ea typeface="Arial" pitchFamily="34" charset="-122"/>
+                <a:cs typeface="Arial" pitchFamily="34" charset="-120"/>
+              </a:rPr>
+              <a:t> · ABRIDGED</a:t>
+            </a:r>
+            <a:endParaRPr lang="en-US" sz="1050" dirty="0"/>
           </a:p>
         </p:txBody>
       </p:sp>
@@ -14732,8 +14591,8 @@
         </p:nvSpPr>
         <p:spPr>
           <a:xfrm>
-            <a:off x="945952" y="2485727"/>
-            <a:ext cx="7445413" cy="1352848"/>
+            <a:off x="971401" y="2551063"/>
+            <a:ext cx="7393496" cy="1298377"/>
           </a:xfrm>
           <a:prstGeom prst="rect">
             <a:avLst/>
@@ -14747,12 +14606,12 @@
           <a:p>
             <a:pPr algn="l" indent="0" marL="0">
               <a:lnSpc>
-                <a:spcPts val="2130"/>
+                <a:spcPts val="2556"/>
               </a:lnSpc>
               <a:buNone/>
             </a:pPr>
             <a:r>
-              <a:rPr lang="en-US" sz="1500" dirty="0">
+              <a:rPr lang="en-US" sz="1800" dirty="0">
                 <a:solidFill>
                   <a:srgbClr val="1F2328"/>
                 </a:solidFill>
@@ -14760,16 +14619,16 @@
                 <a:ea typeface="Arial" pitchFamily="34" charset="-122"/>
                 <a:cs typeface="Arial" pitchFamily="34" charset="-120"/>
               </a:rPr>
-              <a:t>Plan an Apache Superset deployment to Azure with Bicep and azd, using AKS with two Standard_D2s_v3 nodes (not Container Apps), Azure Database for PostgreSQL Flexible Server, and the westus region. </a:t>
+              <a:t>Plan an Apache Superset deployment to Azure with Bicep and azd, using AKS with two Standard_D2s_v3 nodes (not Container Apps) … </a:t>
             </a:r>
             <a:pPr algn="l" indent="0" marL="0">
               <a:lnSpc>
-                <a:spcPts val="2130"/>
+                <a:spcPts val="2556"/>
               </a:lnSpc>
               <a:buNone/>
             </a:pPr>
             <a:r>
-              <a:rPr lang="en-US" sz="1500" b="1" dirty="0">
+              <a:rPr lang="en-US" sz="1800" b="1" dirty="0">
                 <a:solidFill>
                   <a:srgbClr val="1F2328"/>
                 </a:solidFill>
@@ -14781,12 +14640,12 @@
             </a:r>
             <a:pPr algn="l" indent="0" marL="0">
               <a:lnSpc>
-                <a:spcPts val="2130"/>
+                <a:spcPts val="2556"/>
               </a:lnSpc>
               <a:buNone/>
             </a:pPr>
             <a:r>
-              <a:rPr lang="en-US" sz="1500" dirty="0">
+              <a:rPr lang="en-US" sz="1800" dirty="0">
                 <a:solidFill>
                   <a:srgbClr val="1F2328"/>
                 </a:solidFill>
@@ -14798,12 +14657,12 @@
             </a:r>
             <a:pPr algn="l" indent="0" marL="0">
               <a:lnSpc>
-                <a:spcPts val="2130"/>
+                <a:spcPts val="2556"/>
               </a:lnSpc>
               <a:buNone/>
             </a:pPr>
             <a:r>
-              <a:rPr lang="en-US" sz="1500" b="1" dirty="0">
+              <a:rPr lang="en-US" sz="1800" b="1" dirty="0">
                 <a:solidFill>
                   <a:srgbClr val="1F2328"/>
                 </a:solidFill>
@@ -14815,12 +14674,12 @@
             </a:r>
             <a:pPr algn="l" indent="0" marL="0">
               <a:lnSpc>
-                <a:spcPts val="2130"/>
+                <a:spcPts val="2556"/>
               </a:lnSpc>
               <a:buNone/>
             </a:pPr>
             <a:r>
-              <a:rPr lang="en-US" sz="1500" dirty="0">
+              <a:rPr lang="en-US" sz="1800" dirty="0">
                 <a:solidFill>
                   <a:srgbClr val="1F2328"/>
                 </a:solidFill>
@@ -14828,9 +14687,9 @@
                 <a:ea typeface="Arial" pitchFamily="34" charset="-122"/>
                 <a:cs typeface="Arial" pitchFamily="34" charset="-120"/>
               </a:rPr>
-              <a:t>. Don't create files or Azure resources yet.</a:t>
-            </a:r>
-            <a:endParaRPr lang="en-US" sz="1500" dirty="0"/>
+              <a:t>.</a:t>
+            </a:r>
+            <a:endParaRPr lang="en-US" sz="1800" dirty="0"/>
           </a:p>
         </p:txBody>
       </p:sp>
@@ -14874,12 +14733,12 @@
         </p:nvSpPr>
         <p:spPr>
           <a:xfrm>
-            <a:off x="7689800" y="152400"/>
-            <a:ext cx="870049" cy="266700"/>
+            <a:off x="7596187" y="152400"/>
+            <a:ext cx="963662" cy="279350"/>
           </a:xfrm>
           <a:prstGeom prst="roundRect">
             <a:avLst>
-              <a:gd name="adj" fmla="val 23810"/>
+              <a:gd name="adj" fmla="val 22731"/>
             </a:avLst>
           </a:prstGeom>
           <a:solidFill>
@@ -14906,8 +14765,8 @@
         </p:nvSpPr>
         <p:spPr>
           <a:xfrm>
-            <a:off x="7810589" y="219075"/>
-            <a:ext cx="628471" cy="133350"/>
+            <a:off x="7728944" y="220563"/>
+            <a:ext cx="698150" cy="142875"/>
           </a:xfrm>
           <a:prstGeom prst="rect">
             <a:avLst/>
@@ -14923,7 +14782,7 @@
               <a:buNone/>
             </a:pPr>
             <a:r>
-              <a:rPr lang="en-US" sz="900" b="1" dirty="0">
+              <a:rPr lang="en-US" sz="1000" b="1" dirty="0">
                 <a:solidFill>
                   <a:srgbClr val="FFFFFF"/>
                 </a:solidFill>
@@ -14933,7 +14792,7 @@
               </a:rPr>
               <a:t>SUPERSET</a:t>
             </a:r>
-            <a:endParaRPr lang="en-US" sz="900" dirty="0"/>
+            <a:endParaRPr lang="en-US" sz="1000" dirty="0"/>
           </a:p>
         </p:txBody>
       </p:sp>
@@ -15042,7 +14901,7 @@
         <p:spPr>
           <a:xfrm>
             <a:off x="558701" y="1828651"/>
-            <a:ext cx="3886200" cy="142875"/>
+            <a:ext cx="3886200" cy="152400"/>
           </a:xfrm>
           <a:prstGeom prst="rect">
             <a:avLst/>
@@ -15061,7 +14920,7 @@
               <a:buNone/>
             </a:pPr>
             <a:r>
-              <a:rPr lang="en-US" sz="1000" b="1" dirty="0">
+              <a:rPr lang="en-US" sz="1100" b="1" dirty="0">
                 <a:solidFill>
                   <a:srgbClr val="59636E"/>
                 </a:solidFill>
@@ -15071,7 +14930,7 @@
               </a:rPr>
               <a:t>SECTION 2 OF 3</a:t>
             </a:r>
-            <a:endParaRPr lang="en-US" sz="1000" dirty="0"/>
+            <a:endParaRPr lang="en-US" sz="1100" dirty="0"/>
           </a:p>
         </p:txBody>
       </p:sp>
@@ -15083,8 +14942,8 @@
         </p:nvSpPr>
         <p:spPr>
           <a:xfrm>
-            <a:off x="558701" y="2034927"/>
-            <a:ext cx="3886200" cy="444550"/>
+            <a:off x="558701" y="2044452"/>
+            <a:ext cx="3886200" cy="469850"/>
           </a:xfrm>
           <a:prstGeom prst="rect">
             <a:avLst/>
@@ -15098,7 +14957,7 @@
           <a:p>
             <a:pPr algn="l" indent="0" marL="0">
               <a:lnSpc>
-                <a:spcPts val="3500"/>
+                <a:spcPts val="3700"/>
               </a:lnSpc>
               <a:spcBef>
                 <a:spcPts val="500"/>
@@ -15106,7 +14965,7 @@
               <a:buNone/>
             </a:pPr>
             <a:r>
-              <a:rPr lang="en-US" sz="3000" b="1" dirty="0">
+              <a:rPr lang="en-US" sz="3200" b="1" dirty="0">
                 <a:solidFill>
                   <a:srgbClr val="1F2328"/>
                 </a:solidFill>
@@ -15116,7 +14975,7 @@
               </a:rPr>
               <a:t>Gate, then generate</a:t>
             </a:r>
-            <a:endParaRPr lang="en-US" sz="3000" dirty="0"/>
+            <a:endParaRPr lang="en-US" sz="3200" dirty="0"/>
           </a:p>
         </p:txBody>
       </p:sp>
@@ -15128,8 +14987,8 @@
         </p:nvSpPr>
         <p:spPr>
           <a:xfrm>
-            <a:off x="558701" y="2606427"/>
-            <a:ext cx="3886200" cy="723751"/>
+            <a:off x="558701" y="2666702"/>
+            <a:ext cx="3886200" cy="800100"/>
           </a:xfrm>
           <a:prstGeom prst="rect">
             <a:avLst/>
@@ -15143,15 +15002,15 @@
           <a:p>
             <a:pPr algn="l" indent="0" marL="0">
               <a:lnSpc>
-                <a:spcPts val="1900"/>
+                <a:spcPts val="2100"/>
               </a:lnSpc>
               <a:spcBef>
-                <a:spcPts val="1000"/>
+                <a:spcPts val="1200"/>
               </a:spcBef>
               <a:buNone/>
             </a:pPr>
             <a:r>
-              <a:rPr lang="en-US" sz="1400" dirty="0">
+              <a:rPr lang="en-US" sz="1600" dirty="0">
                 <a:solidFill>
                   <a:srgbClr val="59636E"/>
                 </a:solidFill>
@@ -15161,7 +15020,7 @@
               </a:rPr>
               <a:t>Write an automated check before the infrastructure exists, so the expensive failures happen offline.</a:t>
             </a:r>
-            <a:endParaRPr lang="en-US" sz="1400" dirty="0"/>
+            <a:endParaRPr lang="en-US" sz="1600" dirty="0"/>
           </a:p>
         </p:txBody>
       </p:sp>
@@ -15230,11 +15089,11 @@
         <p:spPr>
           <a:xfrm>
             <a:off x="558701" y="4368701"/>
-            <a:ext cx="999083" cy="336352"/>
+            <a:ext cx="1093589" cy="361652"/>
           </a:xfrm>
           <a:prstGeom prst="roundRect">
             <a:avLst>
-              <a:gd name="adj" fmla="val 52861"/>
+              <a:gd name="adj" fmla="val 52675"/>
             </a:avLst>
           </a:prstGeom>
           <a:solidFill>
@@ -15266,11 +15125,11 @@
         <p:spPr>
           <a:xfrm>
             <a:off x="644426" y="4441627"/>
-            <a:ext cx="190500" cy="190500"/>
+            <a:ext cx="215801" cy="215801"/>
           </a:xfrm>
           <a:prstGeom prst="roundRect">
             <a:avLst>
-              <a:gd name="adj" fmla="val 480000"/>
+              <a:gd name="adj" fmla="val 423724"/>
             </a:avLst>
           </a:prstGeom>
           <a:solidFill>
@@ -15297,8 +15156,8 @@
         </p:nvSpPr>
         <p:spPr>
           <a:xfrm>
-            <a:off x="710833" y="4479727"/>
-            <a:ext cx="57686" cy="114300"/>
+            <a:off x="719840" y="4482852"/>
+            <a:ext cx="64972" cy="133350"/>
           </a:xfrm>
           <a:prstGeom prst="rect">
             <a:avLst/>
@@ -15314,7 +15173,7 @@
               <a:buNone/>
             </a:pPr>
             <a:r>
-              <a:rPr lang="en-US" sz="800" b="1" dirty="0">
+              <a:rPr lang="en-US" sz="900" b="1" dirty="0">
                 <a:solidFill>
                   <a:srgbClr val="818B98"/>
                 </a:solidFill>
@@ -15324,7 +15183,7 @@
               </a:rPr>
               <a:t>1</a:t>
             </a:r>
-            <a:endParaRPr lang="en-US" sz="800" dirty="0"/>
+            <a:endParaRPr lang="en-US" sz="900" dirty="0"/>
           </a:p>
         </p:txBody>
       </p:sp>
@@ -15336,8 +15195,8 @@
         </p:nvSpPr>
         <p:spPr>
           <a:xfrm>
-            <a:off x="911126" y="4470202"/>
-            <a:ext cx="520386" cy="133350"/>
+            <a:off x="936427" y="4478089"/>
+            <a:ext cx="578072" cy="142875"/>
           </a:xfrm>
           <a:prstGeom prst="rect">
             <a:avLst/>
@@ -15353,7 +15212,7 @@
               <a:buNone/>
             </a:pPr>
             <a:r>
-              <a:rPr lang="en-US" sz="900" b="1" dirty="0">
+              <a:rPr lang="en-US" sz="1000" b="1" dirty="0">
                 <a:solidFill>
                   <a:srgbClr val="818B98"/>
                 </a:solidFill>
@@ -15363,7 +15222,7 @@
               </a:rPr>
               <a:t>Why AKS</a:t>
             </a:r>
-            <a:endParaRPr lang="en-US" sz="900" dirty="0"/>
+            <a:endParaRPr lang="en-US" sz="1000" dirty="0"/>
           </a:p>
         </p:txBody>
       </p:sp>
@@ -15375,12 +15234,12 @@
         </p:nvSpPr>
         <p:spPr>
           <a:xfrm>
-            <a:off x="1659285" y="4368701"/>
-            <a:ext cx="1555998" cy="336352"/>
+            <a:off x="1753791" y="4368701"/>
+            <a:ext cx="1712268" cy="361652"/>
           </a:xfrm>
           <a:prstGeom prst="roundRect">
             <a:avLst>
-              <a:gd name="adj" fmla="val 52861"/>
+              <a:gd name="adj" fmla="val 52675"/>
             </a:avLst>
           </a:prstGeom>
           <a:solidFill>
@@ -15411,12 +15270,12 @@
         </p:nvSpPr>
         <p:spPr>
           <a:xfrm>
-            <a:off x="1745010" y="4441627"/>
-            <a:ext cx="190500" cy="190500"/>
+            <a:off x="1839516" y="4441627"/>
+            <a:ext cx="215801" cy="215801"/>
           </a:xfrm>
           <a:prstGeom prst="roundRect">
             <a:avLst>
-              <a:gd name="adj" fmla="val 480000"/>
+              <a:gd name="adj" fmla="val 423724"/>
             </a:avLst>
           </a:prstGeom>
           <a:solidFill>
@@ -15443,8 +15302,8 @@
         </p:nvSpPr>
         <p:spPr>
           <a:xfrm>
-            <a:off x="1811417" y="4479727"/>
-            <a:ext cx="57686" cy="114300"/>
+            <a:off x="1914930" y="4482852"/>
+            <a:ext cx="64972" cy="133350"/>
           </a:xfrm>
           <a:prstGeom prst="rect">
             <a:avLst/>
@@ -15460,7 +15319,7 @@
               <a:buNone/>
             </a:pPr>
             <a:r>
-              <a:rPr lang="en-US" sz="800" b="1" dirty="0">
+              <a:rPr lang="en-US" sz="900" b="1" dirty="0">
                 <a:solidFill>
                   <a:srgbClr val="8250DF"/>
                 </a:solidFill>
@@ -15470,7 +15329,7 @@
               </a:rPr>
               <a:t>2</a:t>
             </a:r>
-            <a:endParaRPr lang="en-US" sz="800" dirty="0"/>
+            <a:endParaRPr lang="en-US" sz="900" dirty="0"/>
           </a:p>
         </p:txBody>
       </p:sp>
@@ -15482,8 +15341,8 @@
         </p:nvSpPr>
         <p:spPr>
           <a:xfrm>
-            <a:off x="2011710" y="4470202"/>
-            <a:ext cx="1088440" cy="133350"/>
+            <a:off x="2131516" y="4478089"/>
+            <a:ext cx="1209124" cy="142875"/>
           </a:xfrm>
           <a:prstGeom prst="rect">
             <a:avLst/>
@@ -15499,7 +15358,7 @@
               <a:buNone/>
             </a:pPr>
             <a:r>
-              <a:rPr lang="en-US" sz="900" b="1" dirty="0">
+              <a:rPr lang="en-US" sz="1000" b="1" dirty="0">
                 <a:solidFill>
                   <a:srgbClr val="FFFFFF"/>
                 </a:solidFill>
@@ -15509,7 +15368,7 @@
               </a:rPr>
               <a:t>Gate, then generate</a:t>
             </a:r>
-            <a:endParaRPr lang="en-US" sz="900" dirty="0"/>
+            <a:endParaRPr lang="en-US" sz="1000" dirty="0"/>
           </a:p>
         </p:txBody>
       </p:sp>
@@ -15521,12 +15380,12 @@
         </p:nvSpPr>
         <p:spPr>
           <a:xfrm>
-            <a:off x="3316784" y="4368701"/>
-            <a:ext cx="1441698" cy="336352"/>
+            <a:off x="3567559" y="4368701"/>
+            <a:ext cx="1585317" cy="361652"/>
           </a:xfrm>
           <a:prstGeom prst="roundRect">
             <a:avLst>
-              <a:gd name="adj" fmla="val 52861"/>
+              <a:gd name="adj" fmla="val 52675"/>
             </a:avLst>
           </a:prstGeom>
           <a:solidFill>
@@ -15557,12 +15416,12 @@
         </p:nvSpPr>
         <p:spPr>
           <a:xfrm>
-            <a:off x="3402509" y="4441627"/>
-            <a:ext cx="190500" cy="190500"/>
+            <a:off x="3653284" y="4441627"/>
+            <a:ext cx="215801" cy="215801"/>
           </a:xfrm>
           <a:prstGeom prst="roundRect">
             <a:avLst>
-              <a:gd name="adj" fmla="val 480000"/>
+              <a:gd name="adj" fmla="val 423724"/>
             </a:avLst>
           </a:prstGeom>
           <a:solidFill>
@@ -15589,8 +15448,8 @@
         </p:nvSpPr>
         <p:spPr>
           <a:xfrm>
-            <a:off x="3468916" y="4479727"/>
-            <a:ext cx="57686" cy="114300"/>
+            <a:off x="3728698" y="4482852"/>
+            <a:ext cx="64972" cy="133350"/>
           </a:xfrm>
           <a:prstGeom prst="rect">
             <a:avLst/>
@@ -15606,7 +15465,7 @@
               <a:buNone/>
             </a:pPr>
             <a:r>
-              <a:rPr lang="en-US" sz="800" b="1" dirty="0">
+              <a:rPr lang="en-US" sz="900" b="1" dirty="0">
                 <a:solidFill>
                   <a:srgbClr val="818B98"/>
                 </a:solidFill>
@@ -15616,7 +15475,7 @@
               </a:rPr>
               <a:t>3</a:t>
             </a:r>
-            <a:endParaRPr lang="en-US" sz="800" dirty="0"/>
+            <a:endParaRPr lang="en-US" sz="900" dirty="0"/>
           </a:p>
         </p:txBody>
       </p:sp>
@@ -15628,8 +15487,8 @@
         </p:nvSpPr>
         <p:spPr>
           <a:xfrm>
-            <a:off x="3669209" y="4470202"/>
-            <a:ext cx="971854" cy="133350"/>
+            <a:off x="3945285" y="4478089"/>
+            <a:ext cx="1079635" cy="142875"/>
           </a:xfrm>
           <a:prstGeom prst="rect">
             <a:avLst/>
@@ -15645,7 +15504,7 @@
               <a:buNone/>
             </a:pPr>
             <a:r>
-              <a:rPr lang="en-US" sz="900" b="1" dirty="0">
+              <a:rPr lang="en-US" sz="1000" b="1" dirty="0">
                 <a:solidFill>
                   <a:srgbClr val="818B98"/>
                 </a:solidFill>
@@ -15655,7 +15514,7 @@
               </a:rPr>
               <a:t>Deploy and verify</a:t>
             </a:r>
-            <a:endParaRPr lang="en-US" sz="900" dirty="0"/>
+            <a:endParaRPr lang="en-US" sz="1000" dirty="0"/>
           </a:p>
         </p:txBody>
       </p:sp>
